--- a/content/W01/D4/slides/C2_W01_D04_half1_STUDENT.pptx
+++ b/content/W01/D4/slides/C2_W01_D04_half1_STUDENT.pptx
@@ -3253,7 +3253,7 @@
           <a:noFill/>
         </p:spPr>
         <p:txBody>
-          <a:bodyPr wrap="square" anchor="ctr">
+          <a:bodyPr wrap="square" anchor="ctr" lIns="0" rIns="0" tIns="0" bIns="0">
             <a:spAutoFit/>
           </a:bodyPr>
           <a:lstStyle/>
@@ -3322,8 +3322,8 @@
         </p:nvSpPr>
         <p:spPr>
           <a:xfrm>
-            <a:off x="685800" y="2985008"/>
-            <a:ext cx="10820095" cy="1710944"/>
+            <a:off x="685800" y="2812288"/>
+            <a:ext cx="10820095" cy="2056384"/>
           </a:xfrm>
           <a:prstGeom prst="rect">
             <a:avLst/>
@@ -3331,7 +3331,7 @@
           <a:noFill/>
         </p:spPr>
         <p:txBody>
-          <a:bodyPr wrap="square" anchor="t">
+          <a:bodyPr wrap="square" anchor="t" lIns="0" rIns="0" tIns="0" bIns="0">
             <a:spAutoFit/>
           </a:bodyPr>
           <a:lstStyle/>
@@ -3430,7 +3430,7 @@
           <a:noFill/>
         </p:spPr>
         <p:txBody>
-          <a:bodyPr wrap="square" anchor="t">
+          <a:bodyPr wrap="square" anchor="t" lIns="0" rIns="0" tIns="0" bIns="0">
             <a:spAutoFit/>
           </a:bodyPr>
           <a:lstStyle/>
@@ -3464,7 +3464,7 @@
           <a:noFill/>
         </p:spPr>
         <p:txBody>
-          <a:bodyPr wrap="square" anchor="t">
+          <a:bodyPr wrap="square" anchor="t" lIns="0" rIns="0" tIns="0" bIns="0">
             <a:spAutoFit/>
           </a:bodyPr>
           <a:lstStyle/>
@@ -3614,7 +3614,7 @@
           <a:noFill/>
         </p:spPr>
         <p:txBody>
-          <a:bodyPr wrap="square" anchor="ctr">
+          <a:bodyPr wrap="square" anchor="ctr" lIns="0" rIns="0" tIns="0" bIns="0">
             <a:spAutoFit/>
           </a:bodyPr>
           <a:lstStyle/>
@@ -3683,7 +3683,7 @@
         </p:nvSpPr>
         <p:spPr>
           <a:xfrm>
-            <a:off x="685800" y="2102612"/>
+            <a:off x="685800" y="1929892"/>
             <a:ext cx="10820095" cy="910336"/>
           </a:xfrm>
           <a:prstGeom prst="rect">
@@ -3692,7 +3692,7 @@
           <a:noFill/>
         </p:spPr>
         <p:txBody>
-          <a:bodyPr wrap="square" anchor="t">
+          <a:bodyPr wrap="square" anchor="t" lIns="0" rIns="0" tIns="0" bIns="0">
             <a:spAutoFit/>
           </a:bodyPr>
           <a:lstStyle/>
@@ -3723,8 +3723,8 @@
           <p:nvPr/>
         </p:nvGraphicFramePr>
         <p:xfrm>
-          <a:off x="685800" y="3140964"/>
-          <a:ext cx="10820095" cy="1161288"/>
+          <a:off x="685800" y="2968244"/>
+          <a:ext cx="10820094" cy="1161288"/>
         </p:xfrm>
         <a:graphic>
           <a:graphicData uri="http://schemas.openxmlformats.org/drawingml/2006/table">
@@ -3733,9 +3733,9 @@
                 <a:tableStyleId>{2D5ABB26-0587-4C30-8999-92F81FD0307C}</a:tableStyleId>
               </a:tblPr>
               <a:tblGrid>
-                <a:gridCol w="3606698"/>
-                <a:gridCol w="3606698"/>
-                <a:gridCol w="3606699"/>
+                <a:gridCol w="3140454"/>
+                <a:gridCol w="3699947"/>
+                <a:gridCol w="3979693"/>
               </a:tblGrid>
               <a:tr h="387096">
                 <a:tc>
@@ -3953,8 +3953,8 @@
         </p:nvSpPr>
         <p:spPr>
           <a:xfrm>
-            <a:off x="685800" y="4558284"/>
-            <a:ext cx="10820095" cy="1020064"/>
+            <a:off x="685800" y="4385564"/>
+            <a:ext cx="10820095" cy="1365504"/>
           </a:xfrm>
           <a:prstGeom prst="rect">
             <a:avLst/>
@@ -3962,7 +3962,7 @@
           <a:noFill/>
         </p:spPr>
         <p:txBody>
-          <a:bodyPr wrap="square" anchor="t">
+          <a:bodyPr wrap="square" anchor="t" lIns="0" rIns="0" tIns="0" bIns="0">
             <a:spAutoFit/>
           </a:bodyPr>
           <a:lstStyle/>
@@ -4061,7 +4061,7 @@
           <a:noFill/>
         </p:spPr>
         <p:txBody>
-          <a:bodyPr wrap="square" anchor="t">
+          <a:bodyPr wrap="square" anchor="t" lIns="0" rIns="0" tIns="0" bIns="0">
             <a:spAutoFit/>
           </a:bodyPr>
           <a:lstStyle/>
@@ -4095,7 +4095,7 @@
           <a:noFill/>
         </p:spPr>
         <p:txBody>
-          <a:bodyPr wrap="square" anchor="t">
+          <a:bodyPr wrap="square" anchor="t" lIns="0" rIns="0" tIns="0" bIns="0">
             <a:spAutoFit/>
           </a:bodyPr>
           <a:lstStyle/>
@@ -4298,7 +4298,7 @@
           <a:noFill/>
         </p:spPr>
         <p:txBody>
-          <a:bodyPr wrap="square" anchor="ctr">
+          <a:bodyPr wrap="square" anchor="ctr" lIns="0" rIns="0" tIns="0" bIns="0">
             <a:spAutoFit/>
           </a:bodyPr>
           <a:lstStyle/>
@@ -4376,7 +4376,7 @@
           <a:noFill/>
         </p:spPr>
         <p:txBody>
-          <a:bodyPr wrap="square" anchor="t">
+          <a:bodyPr wrap="square" anchor="t" lIns="0" rIns="0" tIns="0" bIns="0">
             <a:spAutoFit/>
           </a:bodyPr>
           <a:lstStyle/>
@@ -4523,7 +4523,7 @@
           <a:noFill/>
         </p:spPr>
         <p:txBody>
-          <a:bodyPr wrap="square" anchor="t">
+          <a:bodyPr wrap="square" anchor="t" lIns="0" rIns="0" tIns="0" bIns="0">
             <a:spAutoFit/>
           </a:bodyPr>
           <a:lstStyle/>
@@ -4557,7 +4557,7 @@
           <a:noFill/>
         </p:spPr>
         <p:txBody>
-          <a:bodyPr wrap="square" anchor="t">
+          <a:bodyPr wrap="square" anchor="t" lIns="0" rIns="0" tIns="0" bIns="0">
             <a:spAutoFit/>
           </a:bodyPr>
           <a:lstStyle/>
@@ -4760,7 +4760,7 @@
           <a:noFill/>
         </p:spPr>
         <p:txBody>
-          <a:bodyPr wrap="square" anchor="ctr">
+          <a:bodyPr wrap="square" anchor="ctr" lIns="0" rIns="0" tIns="0" bIns="0">
             <a:spAutoFit/>
           </a:bodyPr>
           <a:lstStyle/>
@@ -4823,7 +4823,7 @@
       </p:sp>
       <p:pic>
         <p:nvPicPr>
-          <p:cNvPr id="7" name="Picture 6" descr="27d656b391a67029.png"/>
+          <p:cNvPr id="7" name="Picture 6" descr="bdc35963a028ff2d.png"/>
           <p:cNvPicPr>
             <a:picLocks noChangeAspect="1"/>
           </p:cNvPicPr>
@@ -4837,7 +4837,7 @@
         </p:blipFill>
         <p:spPr>
           <a:xfrm>
-            <a:off x="685800" y="2853930"/>
+            <a:off x="685800" y="2808210"/>
             <a:ext cx="10820095" cy="1007899"/>
           </a:xfrm>
           <a:prstGeom prst="rect">
@@ -4853,8 +4853,8 @@
         </p:nvSpPr>
         <p:spPr>
           <a:xfrm>
-            <a:off x="685800" y="5197856"/>
-            <a:ext cx="10820095" cy="855471"/>
+            <a:off x="685800" y="3962413"/>
+            <a:ext cx="10820095" cy="910336"/>
           </a:xfrm>
           <a:prstGeom prst="rect">
             <a:avLst/>
@@ -4862,11 +4862,16 @@
           <a:noFill/>
         </p:spPr>
         <p:txBody>
-          <a:bodyPr wrap="square" anchor="t">
+          <a:bodyPr wrap="square" anchor="t" lIns="0" rIns="0" tIns="0" bIns="0">
             <a:spAutoFit/>
           </a:bodyPr>
           <a:lstStyle/>
           <a:p>
+            <a:pPr>
+              <a:spcAft>
+                <a:spcPts val="900"/>
+              </a:spcAft>
+            </a:pPr>
             <a:r>
               <a:rPr sz="2000" b="0">
                 <a:solidFill>
@@ -4940,7 +4945,7 @@
           <a:noFill/>
         </p:spPr>
         <p:txBody>
-          <a:bodyPr wrap="square" anchor="t">
+          <a:bodyPr wrap="square" anchor="t" lIns="0" rIns="0" tIns="0" bIns="0">
             <a:spAutoFit/>
           </a:bodyPr>
           <a:lstStyle/>
@@ -4974,7 +4979,7 @@
           <a:noFill/>
         </p:spPr>
         <p:txBody>
-          <a:bodyPr wrap="square" anchor="t">
+          <a:bodyPr wrap="square" anchor="t" lIns="0" rIns="0" tIns="0" bIns="0">
             <a:spAutoFit/>
           </a:bodyPr>
           <a:lstStyle/>
@@ -5124,7 +5129,7 @@
           <a:noFill/>
         </p:spPr>
         <p:txBody>
-          <a:bodyPr wrap="square" anchor="ctr">
+          <a:bodyPr wrap="square" anchor="ctr" lIns="0" rIns="0" tIns="0" bIns="0">
             <a:spAutoFit/>
           </a:bodyPr>
           <a:lstStyle/>
@@ -5202,7 +5207,7 @@
           <a:noFill/>
         </p:spPr>
         <p:txBody>
-          <a:bodyPr wrap="square" anchor="t">
+          <a:bodyPr wrap="square" anchor="t" lIns="0" rIns="0" tIns="0" bIns="0">
             <a:spAutoFit/>
           </a:bodyPr>
           <a:lstStyle/>
@@ -5335,7 +5340,7 @@
           <a:noFill/>
         </p:spPr>
         <p:txBody>
-          <a:bodyPr wrap="square" anchor="t">
+          <a:bodyPr wrap="square" anchor="t" lIns="0" rIns="0" tIns="0" bIns="0">
             <a:spAutoFit/>
           </a:bodyPr>
           <a:lstStyle/>
@@ -5369,7 +5374,7 @@
           <a:noFill/>
         </p:spPr>
         <p:txBody>
-          <a:bodyPr wrap="square" anchor="t">
+          <a:bodyPr wrap="square" anchor="t" lIns="0" rIns="0" tIns="0" bIns="0">
             <a:spAutoFit/>
           </a:bodyPr>
           <a:lstStyle/>
@@ -5572,7 +5577,7 @@
           <a:noFill/>
         </p:spPr>
         <p:txBody>
-          <a:bodyPr wrap="square" anchor="ctr">
+          <a:bodyPr wrap="square" anchor="ctr" lIns="0" rIns="0" tIns="0" bIns="0">
             <a:spAutoFit/>
           </a:bodyPr>
           <a:lstStyle/>
@@ -5641,8 +5646,8 @@
         </p:nvSpPr>
         <p:spPr>
           <a:xfrm>
-            <a:off x="685800" y="1627632"/>
-            <a:ext cx="10820095" cy="910336"/>
+            <a:off x="685800" y="1912112"/>
+            <a:ext cx="10820095" cy="806704"/>
           </a:xfrm>
           <a:prstGeom prst="rect">
             <a:avLst/>
@@ -5650,18 +5655,18 @@
           <a:noFill/>
         </p:spPr>
         <p:txBody>
-          <a:bodyPr wrap="square" anchor="t">
+          <a:bodyPr wrap="square" anchor="t" lIns="0" rIns="0" tIns="0" bIns="0">
             <a:spAutoFit/>
           </a:bodyPr>
           <a:lstStyle/>
           <a:p>
             <a:pPr>
               <a:spcAft>
-                <a:spcPts val="900"/>
+                <a:spcPts val="800"/>
               </a:spcAft>
             </a:pPr>
             <a:r>
-              <a:rPr sz="2000" b="0">
+              <a:rPr sz="1700" b="0">
                 <a:solidFill>
                   <a:srgbClr val="1C1C1A"/>
                 </a:solidFill>
@@ -5681,8 +5686,8 @@
           <p:nvPr/>
         </p:nvGraphicFramePr>
         <p:xfrm>
-          <a:off x="685800" y="2665984"/>
-          <a:ext cx="10820095" cy="2584704"/>
+          <a:off x="685800" y="2846832"/>
+          <a:ext cx="10820094" cy="1859280"/>
         </p:xfrm>
         <a:graphic>
           <a:graphicData uri="http://schemas.openxmlformats.org/drawingml/2006/table">
@@ -5691,18 +5696,18 @@
                 <a:tableStyleId>{2D5ABB26-0587-4C30-8999-92F81FD0307C}</a:tableStyleId>
               </a:tblPr>
               <a:tblGrid>
-                <a:gridCol w="3606698"/>
-                <a:gridCol w="3606698"/>
-                <a:gridCol w="3606699"/>
+                <a:gridCol w="1233747"/>
+                <a:gridCol w="6752902"/>
+                <a:gridCol w="2833445"/>
               </a:tblGrid>
-              <a:tr h="387096">
+              <a:tr h="352552">
                 <a:tc>
                   <a:txBody>
                     <a:bodyPr/>
                     <a:lstStyle/>
                     <a:p>
                       <a:r>
-                        <a:rPr sz="1600" b="1">
+                        <a:rPr sz="1400" b="1">
                           <a:solidFill>
                             <a:srgbClr val="FFFFFF"/>
                           </a:solidFill>
@@ -5724,7 +5729,7 @@
                     <a:lstStyle/>
                     <a:p>
                       <a:r>
-                        <a:rPr sz="1600" b="1">
+                        <a:rPr sz="1400" b="1">
                           <a:solidFill>
                             <a:srgbClr val="FFFFFF"/>
                           </a:solidFill>
@@ -5746,7 +5751,7 @@
                     <a:lstStyle/>
                     <a:p>
                       <a:r>
-                        <a:rPr sz="1600" b="1">
+                        <a:rPr sz="1400" b="1">
                           <a:solidFill>
                             <a:srgbClr val="FFFFFF"/>
                           </a:solidFill>
@@ -5763,14 +5768,14 @@
                   </a:tcPr>
                 </a:tc>
               </a:tr>
-              <a:tr h="387096">
+              <a:tr h="352552">
                 <a:tc>
                   <a:txBody>
                     <a:bodyPr/>
                     <a:lstStyle/>
                     <a:p>
                       <a:r>
-                        <a:rPr sz="1500" b="0">
+                        <a:rPr sz="1300" b="0">
                           <a:solidFill>
                             <a:srgbClr val="1C1C1A"/>
                           </a:solidFill>
@@ -5792,7 +5797,7 @@
                     <a:lstStyle/>
                     <a:p>
                       <a:r>
-                        <a:rPr sz="1500" b="0">
+                        <a:rPr sz="1300" b="0">
                           <a:solidFill>
                             <a:srgbClr val="1C1C1A"/>
                           </a:solidFill>
@@ -5814,7 +5819,7 @@
                     <a:lstStyle/>
                     <a:p>
                       <a:r>
-                        <a:rPr sz="1500" b="0">
+                        <a:rPr sz="1300" b="0">
                           <a:solidFill>
                             <a:srgbClr val="1C1C1A"/>
                           </a:solidFill>
@@ -5831,14 +5836,14 @@
                   </a:tcPr>
                 </a:tc>
               </a:tr>
-              <a:tr h="905256">
+              <a:tr h="577088">
                 <a:tc>
                   <a:txBody>
                     <a:bodyPr/>
                     <a:lstStyle/>
                     <a:p>
                       <a:r>
-                        <a:rPr sz="1500" b="0">
+                        <a:rPr sz="1300" b="0">
                           <a:solidFill>
                             <a:srgbClr val="1C1C1A"/>
                           </a:solidFill>
@@ -5860,7 +5865,7 @@
                     <a:lstStyle/>
                     <a:p>
                       <a:r>
-                        <a:rPr sz="1500" b="0">
+                        <a:rPr sz="1300" b="0">
                           <a:solidFill>
                             <a:srgbClr val="1C1C1A"/>
                           </a:solidFill>
@@ -5882,7 +5887,7 @@
                     <a:lstStyle/>
                     <a:p>
                       <a:r>
-                        <a:rPr sz="1500" b="0">
+                        <a:rPr sz="1300" b="0">
                           <a:solidFill>
                             <a:srgbClr val="1C1C1A"/>
                           </a:solidFill>
@@ -5899,14 +5904,14 @@
                   </a:tcPr>
                 </a:tc>
               </a:tr>
-              <a:tr h="905256">
+              <a:tr h="577088">
                 <a:tc>
                   <a:txBody>
                     <a:bodyPr/>
                     <a:lstStyle/>
                     <a:p>
                       <a:r>
-                        <a:rPr sz="1500" b="0">
+                        <a:rPr sz="1300" b="0">
                           <a:solidFill>
                             <a:srgbClr val="1C1C1A"/>
                           </a:solidFill>
@@ -5928,7 +5933,7 @@
                     <a:lstStyle/>
                     <a:p>
                       <a:r>
-                        <a:rPr sz="1500" b="0">
+                        <a:rPr sz="1300" b="0">
                           <a:solidFill>
                             <a:srgbClr val="1C1C1A"/>
                           </a:solidFill>
@@ -5950,7 +5955,7 @@
                     <a:lstStyle/>
                     <a:p>
                       <a:r>
-                        <a:rPr sz="1500" b="0">
+                        <a:rPr sz="1300" b="0">
                           <a:solidFill>
                             <a:srgbClr val="1C1C1A"/>
                           </a:solidFill>
@@ -5979,8 +5984,8 @@
         </p:nvSpPr>
         <p:spPr>
           <a:xfrm>
-            <a:off x="685800" y="5506720"/>
-            <a:ext cx="10820095" cy="910336"/>
+            <a:off x="685800" y="4962144"/>
+            <a:ext cx="10820095" cy="806704"/>
           </a:xfrm>
           <a:prstGeom prst="rect">
             <a:avLst/>
@@ -5988,18 +5993,18 @@
           <a:noFill/>
         </p:spPr>
         <p:txBody>
-          <a:bodyPr wrap="square" anchor="t">
+          <a:bodyPr wrap="square" anchor="t" lIns="0" rIns="0" tIns="0" bIns="0">
             <a:spAutoFit/>
           </a:bodyPr>
           <a:lstStyle/>
           <a:p>
             <a:pPr>
               <a:spcAft>
-                <a:spcPts val="900"/>
+                <a:spcPts val="800"/>
               </a:spcAft>
             </a:pPr>
             <a:r>
-              <a:rPr sz="2000" b="0">
+              <a:rPr sz="1700" b="0">
                 <a:solidFill>
                   <a:srgbClr val="1C1C1A"/>
                 </a:solidFill>
@@ -6071,7 +6076,7 @@
           <a:noFill/>
         </p:spPr>
         <p:txBody>
-          <a:bodyPr wrap="square" anchor="t">
+          <a:bodyPr wrap="square" anchor="t" lIns="0" rIns="0" tIns="0" bIns="0">
             <a:spAutoFit/>
           </a:bodyPr>
           <a:lstStyle/>
@@ -6105,7 +6110,7 @@
           <a:noFill/>
         </p:spPr>
         <p:txBody>
-          <a:bodyPr wrap="square" anchor="t">
+          <a:bodyPr wrap="square" anchor="t" lIns="0" rIns="0" tIns="0" bIns="0">
             <a:spAutoFit/>
           </a:bodyPr>
           <a:lstStyle/>
@@ -6255,7 +6260,7 @@
           <a:noFill/>
         </p:spPr>
         <p:txBody>
-          <a:bodyPr wrap="square" anchor="ctr">
+          <a:bodyPr wrap="square" anchor="ctr" lIns="0" rIns="0" tIns="0" bIns="0">
             <a:spAutoFit/>
           </a:bodyPr>
           <a:lstStyle/>
@@ -6326,7 +6331,7 @@
         </p:nvGraphicFramePr>
         <p:xfrm>
           <a:off x="685800" y="1627632"/>
-          <a:ext cx="10820095" cy="1807464"/>
+          <a:ext cx="10820094" cy="1243584"/>
         </p:xfrm>
         <a:graphic>
           <a:graphicData uri="http://schemas.openxmlformats.org/drawingml/2006/table">
@@ -6335,17 +6340,17 @@
                 <a:tableStyleId>{2D5ABB26-0587-4C30-8999-92F81FD0307C}</a:tableStyleId>
               </a:tblPr>
               <a:tblGrid>
-                <a:gridCol w="5410047"/>
-                <a:gridCol w="5410048"/>
+                <a:gridCol w="1741178"/>
+                <a:gridCol w="9078916"/>
               </a:tblGrid>
-              <a:tr h="387096">
+              <a:tr h="310896">
                 <a:tc>
                   <a:txBody>
                     <a:bodyPr/>
                     <a:lstStyle/>
                     <a:p>
                       <a:r>
-                        <a:rPr sz="1600" b="1">
+                        <a:rPr sz="1000" b="1">
                           <a:solidFill>
                             <a:srgbClr val="FFFFFF"/>
                           </a:solidFill>
@@ -6367,7 +6372,7 @@
                     <a:lstStyle/>
                     <a:p>
                       <a:r>
-                        <a:rPr sz="1600" b="1">
+                        <a:rPr sz="1000" b="1">
                           <a:solidFill>
                             <a:srgbClr val="FFFFFF"/>
                           </a:solidFill>
@@ -6384,14 +6389,14 @@
                   </a:tcPr>
                 </a:tc>
               </a:tr>
-              <a:tr h="646176">
+              <a:tr h="310896">
                 <a:tc>
                   <a:txBody>
                     <a:bodyPr/>
                     <a:lstStyle/>
                     <a:p>
                       <a:r>
-                        <a:rPr sz="1500" b="0">
+                        <a:rPr sz="900" b="0">
                           <a:solidFill>
                             <a:srgbClr val="1C1C1A"/>
                           </a:solidFill>
@@ -6413,7 +6418,7 @@
                     <a:lstStyle/>
                     <a:p>
                       <a:r>
-                        <a:rPr sz="1500" b="0">
+                        <a:rPr sz="900" b="0">
                           <a:solidFill>
                             <a:srgbClr val="1C1C1A"/>
                           </a:solidFill>
@@ -6430,14 +6435,14 @@
                   </a:tcPr>
                 </a:tc>
               </a:tr>
-              <a:tr h="387096">
+              <a:tr h="310896">
                 <a:tc>
                   <a:txBody>
                     <a:bodyPr/>
                     <a:lstStyle/>
                     <a:p>
                       <a:r>
-                        <a:rPr sz="1500" b="0">
+                        <a:rPr sz="900" b="0">
                           <a:solidFill>
                             <a:srgbClr val="1C1C1A"/>
                           </a:solidFill>
@@ -6459,7 +6464,7 @@
                     <a:lstStyle/>
                     <a:p>
                       <a:r>
-                        <a:rPr sz="1500" b="0">
+                        <a:rPr sz="900" b="0">
                           <a:solidFill>
                             <a:srgbClr val="1C1C1A"/>
                           </a:solidFill>
@@ -6476,14 +6481,14 @@
                   </a:tcPr>
                 </a:tc>
               </a:tr>
-              <a:tr h="387096">
+              <a:tr h="310896">
                 <a:tc>
                   <a:txBody>
                     <a:bodyPr/>
                     <a:lstStyle/>
                     <a:p>
                       <a:r>
-                        <a:rPr sz="1500" b="0">
+                        <a:rPr sz="900" b="0">
                           <a:solidFill>
                             <a:srgbClr val="1C1C1A"/>
                           </a:solidFill>
@@ -6505,7 +6510,7 @@
                     <a:lstStyle/>
                     <a:p>
                       <a:r>
-                        <a:rPr sz="1500" b="0">
+                        <a:rPr sz="900" b="0">
                           <a:solidFill>
                             <a:srgbClr val="1C1C1A"/>
                           </a:solidFill>
@@ -6534,8 +6539,8 @@
         </p:nvSpPr>
         <p:spPr>
           <a:xfrm>
-            <a:off x="685800" y="3691128"/>
-            <a:ext cx="10820095" cy="910336"/>
+            <a:off x="685800" y="3127248"/>
+            <a:ext cx="10820095" cy="443992"/>
           </a:xfrm>
           <a:prstGeom prst="rect">
             <a:avLst/>
@@ -6543,18 +6548,18 @@
           <a:noFill/>
         </p:spPr>
         <p:txBody>
-          <a:bodyPr wrap="square" anchor="t">
+          <a:bodyPr wrap="square" anchor="t" lIns="0" rIns="0" tIns="0" bIns="0">
             <a:spAutoFit/>
           </a:bodyPr>
           <a:lstStyle/>
           <a:p>
             <a:pPr>
               <a:spcAft>
-                <a:spcPts val="900"/>
+                <a:spcPts val="600"/>
               </a:spcAft>
             </a:pPr>
             <a:r>
-              <a:rPr sz="2000" b="0">
+              <a:rPr sz="1300" b="0">
                 <a:solidFill>
                   <a:srgbClr val="1C1C1A"/>
                 </a:solidFill>
@@ -6567,7 +6572,7 @@
       </p:sp>
       <p:pic>
         <p:nvPicPr>
-          <p:cNvPr id="8" name="Picture 7" descr="529771cfcc1b17f8.png"/>
+          <p:cNvPr id="8" name="Picture 7" descr="6537f3a9820bab07.png"/>
           <p:cNvPicPr>
             <a:picLocks noChangeAspect="1"/>
           </p:cNvPicPr>
@@ -6581,8 +6586,8 @@
         </p:blipFill>
         <p:spPr>
           <a:xfrm>
-            <a:off x="4356828" y="4729480"/>
-            <a:ext cx="3478038" cy="1323847"/>
+            <a:off x="3003516" y="3699256"/>
+            <a:ext cx="6184662" cy="2354072"/>
           </a:xfrm>
           <a:prstGeom prst="rect">
             <a:avLst/>
@@ -6650,7 +6655,7 @@
           <a:noFill/>
         </p:spPr>
         <p:txBody>
-          <a:bodyPr wrap="square" anchor="t">
+          <a:bodyPr wrap="square" anchor="t" lIns="0" rIns="0" tIns="0" bIns="0">
             <a:spAutoFit/>
           </a:bodyPr>
           <a:lstStyle/>
@@ -6684,7 +6689,7 @@
           <a:noFill/>
         </p:spPr>
         <p:txBody>
-          <a:bodyPr wrap="square" anchor="t">
+          <a:bodyPr wrap="square" anchor="t" lIns="0" rIns="0" tIns="0" bIns="0">
             <a:spAutoFit/>
           </a:bodyPr>
           <a:lstStyle/>
@@ -6781,7 +6786,7 @@
           <a:noFill/>
         </p:spPr>
         <p:txBody>
-          <a:bodyPr wrap="square" anchor="ctr">
+          <a:bodyPr wrap="square" anchor="ctr" lIns="0" rIns="0" tIns="0" bIns="0">
             <a:spAutoFit/>
           </a:bodyPr>
           <a:lstStyle/>
@@ -7125,7 +7130,7 @@
           <a:noFill/>
         </p:spPr>
         <p:txBody>
-          <a:bodyPr wrap="square" anchor="t">
+          <a:bodyPr wrap="square" anchor="t" lIns="0" rIns="0" tIns="0" bIns="0">
             <a:spAutoFit/>
           </a:bodyPr>
           <a:lstStyle/>
@@ -7159,7 +7164,7 @@
           <a:noFill/>
         </p:spPr>
         <p:txBody>
-          <a:bodyPr wrap="square" anchor="t">
+          <a:bodyPr wrap="square" anchor="t" lIns="0" rIns="0" tIns="0" bIns="0">
             <a:spAutoFit/>
           </a:bodyPr>
           <a:lstStyle/>
@@ -7309,7 +7314,7 @@
           <a:noFill/>
         </p:spPr>
         <p:txBody>
-          <a:bodyPr wrap="square" anchor="ctr">
+          <a:bodyPr wrap="square" anchor="ctr" lIns="0" rIns="0" tIns="0" bIns="0">
             <a:spAutoFit/>
           </a:bodyPr>
           <a:lstStyle/>
@@ -7378,7 +7383,7 @@
         </p:nvSpPr>
         <p:spPr>
           <a:xfrm>
-            <a:off x="685800" y="2858008"/>
+            <a:off x="685800" y="2684272"/>
             <a:ext cx="10820095" cy="564896"/>
           </a:xfrm>
           <a:prstGeom prst="rect">
@@ -7387,7 +7392,7 @@
           <a:noFill/>
         </p:spPr>
         <p:txBody>
-          <a:bodyPr wrap="square" anchor="t">
+          <a:bodyPr wrap="square" anchor="t" lIns="0" rIns="0" tIns="0" bIns="0">
             <a:spAutoFit/>
           </a:bodyPr>
           <a:lstStyle/>
@@ -7417,8 +7422,8 @@
         </p:nvSpPr>
         <p:spPr>
           <a:xfrm>
-            <a:off x="685800" y="3550920"/>
-            <a:ext cx="10820095" cy="542543"/>
+            <a:off x="685800" y="3377184"/>
+            <a:ext cx="10820095" cy="544576"/>
           </a:xfrm>
           <a:prstGeom prst="rect">
             <a:avLst/>
@@ -7461,8 +7466,8 @@
         </p:nvSpPr>
         <p:spPr>
           <a:xfrm>
-            <a:off x="685800" y="3550920"/>
-            <a:ext cx="50292" cy="542543"/>
+            <a:off x="685800" y="3377184"/>
+            <a:ext cx="50292" cy="544576"/>
           </a:xfrm>
           <a:prstGeom prst="rect">
             <a:avLst/>
@@ -7505,8 +7510,8 @@
         </p:nvSpPr>
         <p:spPr>
           <a:xfrm>
-            <a:off x="923544" y="3651504"/>
-            <a:ext cx="10417759" cy="359663"/>
+            <a:off x="923544" y="3477768"/>
+            <a:ext cx="10417759" cy="361696"/>
           </a:xfrm>
           <a:prstGeom prst="rect">
             <a:avLst/>
@@ -7514,7 +7519,7 @@
           <a:noFill/>
         </p:spPr>
         <p:txBody>
-          <a:bodyPr wrap="square" anchor="t">
+          <a:bodyPr wrap="square" anchor="t" lIns="0" rIns="0" tIns="0" bIns="0">
             <a:spAutoFit/>
           </a:bodyPr>
           <a:lstStyle/>
@@ -7544,8 +7549,8 @@
         </p:nvSpPr>
         <p:spPr>
           <a:xfrm>
-            <a:off x="685800" y="4258056"/>
-            <a:ext cx="10820095" cy="564896"/>
+            <a:off x="685800" y="4086352"/>
+            <a:ext cx="10820095" cy="910336"/>
           </a:xfrm>
           <a:prstGeom prst="rect">
             <a:avLst/>
@@ -7553,7 +7558,7 @@
           <a:noFill/>
         </p:spPr>
         <p:txBody>
-          <a:bodyPr wrap="square" anchor="t">
+          <a:bodyPr wrap="square" anchor="t" lIns="0" rIns="0" tIns="0" bIns="0">
             <a:spAutoFit/>
           </a:bodyPr>
           <a:lstStyle/>
@@ -7636,7 +7641,7 @@
           <a:noFill/>
         </p:spPr>
         <p:txBody>
-          <a:bodyPr wrap="square" anchor="t">
+          <a:bodyPr wrap="square" anchor="t" lIns="0" rIns="0" tIns="0" bIns="0">
             <a:spAutoFit/>
           </a:bodyPr>
           <a:lstStyle/>
@@ -7670,7 +7675,7 @@
           <a:noFill/>
         </p:spPr>
         <p:txBody>
-          <a:bodyPr wrap="square" anchor="t">
+          <a:bodyPr wrap="square" anchor="t" lIns="0" rIns="0" tIns="0" bIns="0">
             <a:spAutoFit/>
           </a:bodyPr>
           <a:lstStyle/>
@@ -7820,7 +7825,7 @@
           <a:noFill/>
         </p:spPr>
         <p:txBody>
-          <a:bodyPr wrap="square" anchor="ctr">
+          <a:bodyPr wrap="square" anchor="ctr" lIns="0" rIns="0" tIns="0" bIns="0">
             <a:spAutoFit/>
           </a:bodyPr>
           <a:lstStyle/>
@@ -7889,8 +7894,8 @@
         </p:nvSpPr>
         <p:spPr>
           <a:xfrm>
-            <a:off x="685800" y="2708656"/>
-            <a:ext cx="10820095" cy="1078992"/>
+            <a:off x="685800" y="2514600"/>
+            <a:ext cx="10820095" cy="1121664"/>
           </a:xfrm>
           <a:prstGeom prst="rect">
             <a:avLst/>
@@ -7933,8 +7938,8 @@
         </p:nvSpPr>
         <p:spPr>
           <a:xfrm>
-            <a:off x="685800" y="2708656"/>
-            <a:ext cx="50292" cy="1078992"/>
+            <a:off x="685800" y="2514600"/>
+            <a:ext cx="50292" cy="1121664"/>
           </a:xfrm>
           <a:prstGeom prst="rect">
             <a:avLst/>
@@ -7977,8 +7982,8 @@
         </p:nvSpPr>
         <p:spPr>
           <a:xfrm>
-            <a:off x="923544" y="2809240"/>
-            <a:ext cx="10417759" cy="896112"/>
+            <a:off x="923544" y="2615184"/>
+            <a:ext cx="10417759" cy="938784"/>
           </a:xfrm>
           <a:prstGeom prst="rect">
             <a:avLst/>
@@ -7986,7 +7991,7 @@
           <a:noFill/>
         </p:spPr>
         <p:txBody>
-          <a:bodyPr wrap="square" anchor="t">
+          <a:bodyPr wrap="square" anchor="t" lIns="0" rIns="0" tIns="0" bIns="0">
             <a:spAutoFit/>
           </a:bodyPr>
           <a:lstStyle/>
@@ -8048,8 +8053,8 @@
         </p:nvSpPr>
         <p:spPr>
           <a:xfrm>
-            <a:off x="685800" y="3952240"/>
-            <a:ext cx="10820095" cy="1020064"/>
+            <a:off x="685800" y="3800856"/>
+            <a:ext cx="10820095" cy="1365504"/>
           </a:xfrm>
           <a:prstGeom prst="rect">
             <a:avLst/>
@@ -8057,7 +8062,7 @@
           <a:noFill/>
         </p:spPr>
         <p:txBody>
-          <a:bodyPr wrap="square" anchor="t">
+          <a:bodyPr wrap="square" anchor="t" lIns="0" rIns="0" tIns="0" bIns="0">
             <a:spAutoFit/>
           </a:bodyPr>
           <a:lstStyle/>
@@ -8156,7 +8161,7 @@
           <a:noFill/>
         </p:spPr>
         <p:txBody>
-          <a:bodyPr wrap="square" anchor="t">
+          <a:bodyPr wrap="square" anchor="t" lIns="0" rIns="0" tIns="0" bIns="0">
             <a:spAutoFit/>
           </a:bodyPr>
           <a:lstStyle/>
@@ -8190,7 +8195,7 @@
           <a:noFill/>
         </p:spPr>
         <p:txBody>
-          <a:bodyPr wrap="square" anchor="t">
+          <a:bodyPr wrap="square" anchor="t" lIns="0" rIns="0" tIns="0" bIns="0">
             <a:spAutoFit/>
           </a:bodyPr>
           <a:lstStyle/>
@@ -8340,7 +8345,7 @@
           <a:noFill/>
         </p:spPr>
         <p:txBody>
-          <a:bodyPr wrap="square" anchor="ctr">
+          <a:bodyPr wrap="square" anchor="ctr" lIns="0" rIns="0" tIns="0" bIns="0">
             <a:spAutoFit/>
           </a:bodyPr>
           <a:lstStyle/>
@@ -8409,8 +8414,8 @@
         </p:nvSpPr>
         <p:spPr>
           <a:xfrm>
-            <a:off x="685800" y="2804160"/>
-            <a:ext cx="10820095" cy="542543"/>
+            <a:off x="685800" y="2803144"/>
+            <a:ext cx="10820095" cy="544576"/>
           </a:xfrm>
           <a:prstGeom prst="rect">
             <a:avLst/>
@@ -8453,8 +8458,8 @@
         </p:nvSpPr>
         <p:spPr>
           <a:xfrm>
-            <a:off x="685800" y="2804160"/>
-            <a:ext cx="50292" cy="542543"/>
+            <a:off x="685800" y="2803144"/>
+            <a:ext cx="50292" cy="544576"/>
           </a:xfrm>
           <a:prstGeom prst="rect">
             <a:avLst/>
@@ -8497,8 +8502,8 @@
         </p:nvSpPr>
         <p:spPr>
           <a:xfrm>
-            <a:off x="923544" y="2904744"/>
-            <a:ext cx="10417759" cy="359663"/>
+            <a:off x="923544" y="2903728"/>
+            <a:ext cx="10417759" cy="361696"/>
           </a:xfrm>
           <a:prstGeom prst="rect">
             <a:avLst/>
@@ -8506,7 +8511,7 @@
           <a:noFill/>
         </p:spPr>
         <p:txBody>
-          <a:bodyPr wrap="square" anchor="t">
+          <a:bodyPr wrap="square" anchor="t" lIns="0" rIns="0" tIns="0" bIns="0">
             <a:spAutoFit/>
           </a:bodyPr>
           <a:lstStyle/>
@@ -8536,7 +8541,7 @@
         </p:nvSpPr>
         <p:spPr>
           <a:xfrm>
-            <a:off x="685800" y="3511296"/>
+            <a:off x="685800" y="3512312"/>
             <a:ext cx="10820095" cy="1365504"/>
           </a:xfrm>
           <a:prstGeom prst="rect">
@@ -8545,7 +8550,7 @@
           <a:noFill/>
         </p:spPr>
         <p:txBody>
-          <a:bodyPr wrap="square" anchor="t">
+          <a:bodyPr wrap="square" anchor="t" lIns="0" rIns="0" tIns="0" bIns="0">
             <a:spAutoFit/>
           </a:bodyPr>
           <a:lstStyle/>
@@ -8644,7 +8649,7 @@
           <a:noFill/>
         </p:spPr>
         <p:txBody>
-          <a:bodyPr wrap="square" anchor="t">
+          <a:bodyPr wrap="square" anchor="t" lIns="0" rIns="0" tIns="0" bIns="0">
             <a:spAutoFit/>
           </a:bodyPr>
           <a:lstStyle/>
@@ -8678,7 +8683,7 @@
           <a:noFill/>
         </p:spPr>
         <p:txBody>
-          <a:bodyPr wrap="square" anchor="t">
+          <a:bodyPr wrap="square" anchor="t" lIns="0" rIns="0" tIns="0" bIns="0">
             <a:spAutoFit/>
           </a:bodyPr>
           <a:lstStyle/>
@@ -8828,7 +8833,7 @@
           <a:noFill/>
         </p:spPr>
         <p:txBody>
-          <a:bodyPr wrap="square" anchor="ctr">
+          <a:bodyPr wrap="square" anchor="ctr" lIns="0" rIns="0" tIns="0" bIns="0">
             <a:spAutoFit/>
           </a:bodyPr>
           <a:lstStyle/>
@@ -9181,7 +9186,7 @@
           <a:noFill/>
         </p:spPr>
         <p:txBody>
-          <a:bodyPr wrap="square" anchor="t">
+          <a:bodyPr wrap="square" anchor="t" lIns="0" rIns="0" tIns="0" bIns="0">
             <a:spAutoFit/>
           </a:bodyPr>
           <a:lstStyle/>
@@ -9280,7 +9285,7 @@
           <a:noFill/>
         </p:spPr>
         <p:txBody>
-          <a:bodyPr wrap="square" anchor="t">
+          <a:bodyPr wrap="square" anchor="t" lIns="0" rIns="0" tIns="0" bIns="0">
             <a:spAutoFit/>
           </a:bodyPr>
           <a:lstStyle/>
@@ -9314,7 +9319,7 @@
           <a:noFill/>
         </p:spPr>
         <p:txBody>
-          <a:bodyPr wrap="square" anchor="t">
+          <a:bodyPr wrap="square" anchor="t" lIns="0" rIns="0" tIns="0" bIns="0">
             <a:spAutoFit/>
           </a:bodyPr>
           <a:lstStyle/>
@@ -9464,7 +9469,7 @@
           <a:noFill/>
         </p:spPr>
         <p:txBody>
-          <a:bodyPr wrap="square" anchor="ctr">
+          <a:bodyPr wrap="square" anchor="ctr" lIns="0" rIns="0" tIns="0" bIns="0">
             <a:spAutoFit/>
           </a:bodyPr>
           <a:lstStyle/>
@@ -9525,9 +9530,225 @@
           </a:p>
         </p:txBody>
       </p:sp>
+      <p:sp>
+        <p:nvSpPr>
+          <p:cNvPr id="6" name="Rectangle 5"/>
+          <p:cNvSpPr/>
+          <p:nvPr/>
+        </p:nvSpPr>
+        <p:spPr>
+          <a:xfrm>
+            <a:off x="685800" y="1627632"/>
+            <a:ext cx="10820095" cy="472439"/>
+          </a:xfrm>
+          <a:prstGeom prst="rect">
+            <a:avLst/>
+          </a:prstGeom>
+          <a:solidFill>
+            <a:srgbClr val="1C1C1A"/>
+          </a:solidFill>
+          <a:ln>
+            <a:noFill/>
+          </a:ln>
+          <a:effectLst/>
+        </p:spPr>
+        <p:style>
+          <a:lnRef idx="1">
+            <a:schemeClr val="accent1"/>
+          </a:lnRef>
+          <a:fillRef idx="3">
+            <a:schemeClr val="accent1"/>
+          </a:fillRef>
+          <a:effectRef idx="2">
+            <a:schemeClr val="accent1"/>
+          </a:effectRef>
+          <a:fontRef idx="minor">
+            <a:schemeClr val="lt1"/>
+          </a:fontRef>
+        </p:style>
+        <p:txBody>
+          <a:bodyPr rtlCol="0" anchor="ctr" wrap="square"/>
+          <a:lstStyle/>
+          <a:p>
+            <a:pPr algn="ctr"/>
+          </a:p>
+        </p:txBody>
+      </p:sp>
+      <p:sp>
+        <p:nvSpPr>
+          <p:cNvPr id="7" name="Rectangle 6"/>
+          <p:cNvSpPr/>
+          <p:nvPr/>
+        </p:nvSpPr>
+        <p:spPr>
+          <a:xfrm>
+            <a:off x="685800" y="1627632"/>
+            <a:ext cx="50292" cy="472439"/>
+          </a:xfrm>
+          <a:prstGeom prst="rect">
+            <a:avLst/>
+          </a:prstGeom>
+          <a:solidFill>
+            <a:srgbClr val="2B4A7D"/>
+          </a:solidFill>
+          <a:ln>
+            <a:noFill/>
+          </a:ln>
+          <a:effectLst/>
+        </p:spPr>
+        <p:style>
+          <a:lnRef idx="1">
+            <a:schemeClr val="accent1"/>
+          </a:lnRef>
+          <a:fillRef idx="3">
+            <a:schemeClr val="accent1"/>
+          </a:fillRef>
+          <a:effectRef idx="2">
+            <a:schemeClr val="accent1"/>
+          </a:effectRef>
+          <a:fontRef idx="minor">
+            <a:schemeClr val="lt1"/>
+          </a:fontRef>
+        </p:style>
+        <p:txBody>
+          <a:bodyPr rtlCol="0" anchor="ctr" wrap="square"/>
+          <a:lstStyle/>
+          <a:p>
+            <a:pPr algn="ctr"/>
+          </a:p>
+        </p:txBody>
+      </p:sp>
+      <p:sp>
+        <p:nvSpPr>
+          <p:cNvPr id="8" name="TextBox 7"/>
+          <p:cNvSpPr txBox="1"/>
+          <p:nvPr/>
+        </p:nvSpPr>
+        <p:spPr>
+          <a:xfrm>
+            <a:off x="923544" y="1728216"/>
+            <a:ext cx="10417759" cy="289559"/>
+          </a:xfrm>
+          <a:prstGeom prst="rect">
+            <a:avLst/>
+          </a:prstGeom>
+          <a:noFill/>
+        </p:spPr>
+        <p:txBody>
+          <a:bodyPr wrap="square" anchor="t" lIns="0" rIns="0" tIns="0" bIns="0">
+            <a:spAutoFit/>
+          </a:bodyPr>
+          <a:lstStyle/>
+          <a:p>
+            <a:pPr>
+              <a:spcAft>
+                <a:spcPts val="200"/>
+              </a:spcAft>
+            </a:pPr>
+            <a:r>
+              <a:rPr sz="1200" b="0">
+                <a:solidFill>
+                  <a:srgbClr val="E4ECF7"/>
+                </a:solidFill>
+                <a:latin typeface="Consolas"/>
+              </a:rPr>
+              <a:t>KR4232   C1749   Retail-Core   480000   delivered   2026-08-19</a:t>
+            </a:r>
+          </a:p>
+        </p:txBody>
+      </p:sp>
+      <p:sp>
+        <p:nvSpPr>
+          <p:cNvPr id="9" name="TextBox 8"/>
+          <p:cNvSpPr txBox="1"/>
+          <p:nvPr/>
+        </p:nvSpPr>
+        <p:spPr>
+          <a:xfrm>
+            <a:off x="685800" y="2264664"/>
+            <a:ext cx="10820095" cy="1734312"/>
+          </a:xfrm>
+          <a:prstGeom prst="rect">
+            <a:avLst/>
+          </a:prstGeom>
+          <a:noFill/>
+        </p:spPr>
+        <p:txBody>
+          <a:bodyPr wrap="square" anchor="t" lIns="0" rIns="0" tIns="0" bIns="0">
+            <a:spAutoFit/>
+          </a:bodyPr>
+          <a:lstStyle/>
+          <a:p>
+            <a:pPr>
+              <a:spcAft>
+                <a:spcPts val="700"/>
+              </a:spcAft>
+            </a:pPr>
+            <a:r>
+              <a:rPr sz="1500" b="0">
+                <a:solidFill>
+                  <a:srgbClr val="1C1C1A"/>
+                </a:solidFill>
+                <a:latin typeface="Calibri"/>
+              </a:rPr>
+              <a:t>One order. It carries </a:t>
+            </a:r>
+            <a:r>
+              <a:rPr sz="1500" b="1">
+                <a:solidFill>
+                  <a:srgbClr val="1C1C1A"/>
+                </a:solidFill>
+                <a:latin typeface="Calibri"/>
+              </a:rPr>
+              <a:t>85.5 percent of every rupee in the file</a:t>
+            </a:r>
+            <a:r>
+              <a:rPr sz="1500" b="0">
+                <a:solidFill>
+                  <a:srgbClr val="1C1C1A"/>
+                </a:solidFill>
+                <a:latin typeface="Calibri"/>
+              </a:rPr>
+              <a:t>.</a:t>
+            </a:r>
+          </a:p>
+          <a:p>
+            <a:pPr>
+              <a:spcAft>
+                <a:spcPts val="700"/>
+              </a:spcAft>
+            </a:pPr>
+            <a:r>
+              <a:rPr sz="1500" b="0">
+                <a:solidFill>
+                  <a:srgbClr val="1C1C1A"/>
+                </a:solidFill>
+                <a:latin typeface="Calibri"/>
+              </a:rPr>
+              <a:t>It is not a typo, not a text value, not a duplicate. Yesterday's pass looked at it and kept it, and the decisions log says why: it converts cleanly and is well formed, so it is real until somebody says otherwise, and it was raised with the order book owner.</a:t>
+            </a:r>
+          </a:p>
+          <a:p>
+            <a:pPr>
+              <a:spcAft>
+                <a:spcPts val="700"/>
+              </a:spcAft>
+            </a:pPr>
+            <a:r>
+              <a:rPr sz="1500" b="0">
+                <a:solidFill>
+                  <a:srgbClr val="1C1C1A"/>
+                </a:solidFill>
+                <a:latin typeface="Calibri"/>
+              </a:rPr>
+              <a:t>An order can be correct and still wreck every summary it touches.</a:t>
+            </a:r>
+          </a:p>
+        </p:txBody>
+      </p:sp>
       <p:pic>
         <p:nvPicPr>
-          <p:cNvPr id="6" name="Picture 5" descr="8b79ea01c285e16d.png"/>
+          <p:cNvPr id="10" name="Picture 9" descr="afc505a4ce7b0404.png"/>
           <p:cNvPicPr>
             <a:picLocks noChangeAspect="1"/>
           </p:cNvPicPr>
@@ -9541,230 +9762,14 @@
         </p:blipFill>
         <p:spPr>
           <a:xfrm>
-            <a:off x="685800" y="2486877"/>
-            <a:ext cx="4652640" cy="2707204"/>
+            <a:off x="4445771" y="4133087"/>
+            <a:ext cx="3300152" cy="1920240"/>
           </a:xfrm>
           <a:prstGeom prst="rect">
             <a:avLst/>
           </a:prstGeom>
         </p:spPr>
       </p:pic>
-      <p:sp>
-        <p:nvSpPr>
-          <p:cNvPr id="7" name="Rectangle 6"/>
-          <p:cNvSpPr/>
-          <p:nvPr/>
-        </p:nvSpPr>
-        <p:spPr>
-          <a:xfrm>
-            <a:off x="5771244" y="1627632"/>
-            <a:ext cx="5734650" cy="810768"/>
-          </a:xfrm>
-          <a:prstGeom prst="rect">
-            <a:avLst/>
-          </a:prstGeom>
-          <a:solidFill>
-            <a:srgbClr val="1C1C1A"/>
-          </a:solidFill>
-          <a:ln>
-            <a:noFill/>
-          </a:ln>
-          <a:effectLst/>
-        </p:spPr>
-        <p:style>
-          <a:lnRef idx="1">
-            <a:schemeClr val="accent1"/>
-          </a:lnRef>
-          <a:fillRef idx="3">
-            <a:schemeClr val="accent1"/>
-          </a:fillRef>
-          <a:effectRef idx="2">
-            <a:schemeClr val="accent1"/>
-          </a:effectRef>
-          <a:fontRef idx="minor">
-            <a:schemeClr val="lt1"/>
-          </a:fontRef>
-        </p:style>
-        <p:txBody>
-          <a:bodyPr rtlCol="0" anchor="ctr" wrap="square"/>
-          <a:lstStyle/>
-          <a:p>
-            <a:pPr algn="ctr"/>
-          </a:p>
-        </p:txBody>
-      </p:sp>
-      <p:sp>
-        <p:nvSpPr>
-          <p:cNvPr id="8" name="Rectangle 7"/>
-          <p:cNvSpPr/>
-          <p:nvPr/>
-        </p:nvSpPr>
-        <p:spPr>
-          <a:xfrm>
-            <a:off x="5771244" y="1627632"/>
-            <a:ext cx="50292" cy="810768"/>
-          </a:xfrm>
-          <a:prstGeom prst="rect">
-            <a:avLst/>
-          </a:prstGeom>
-          <a:solidFill>
-            <a:srgbClr val="2B4A7D"/>
-          </a:solidFill>
-          <a:ln>
-            <a:noFill/>
-          </a:ln>
-          <a:effectLst/>
-        </p:spPr>
-        <p:style>
-          <a:lnRef idx="1">
-            <a:schemeClr val="accent1"/>
-          </a:lnRef>
-          <a:fillRef idx="3">
-            <a:schemeClr val="accent1"/>
-          </a:fillRef>
-          <a:effectRef idx="2">
-            <a:schemeClr val="accent1"/>
-          </a:effectRef>
-          <a:fontRef idx="minor">
-            <a:schemeClr val="lt1"/>
-          </a:fontRef>
-        </p:style>
-        <p:txBody>
-          <a:bodyPr rtlCol="0" anchor="ctr" wrap="square"/>
-          <a:lstStyle/>
-          <a:p>
-            <a:pPr algn="ctr"/>
-          </a:p>
-        </p:txBody>
-      </p:sp>
-      <p:sp>
-        <p:nvSpPr>
-          <p:cNvPr id="9" name="TextBox 8"/>
-          <p:cNvSpPr txBox="1"/>
-          <p:nvPr/>
-        </p:nvSpPr>
-        <p:spPr>
-          <a:xfrm>
-            <a:off x="6008988" y="1728216"/>
-            <a:ext cx="5332314" cy="627888"/>
-          </a:xfrm>
-          <a:prstGeom prst="rect">
-            <a:avLst/>
-          </a:prstGeom>
-          <a:noFill/>
-        </p:spPr>
-        <p:txBody>
-          <a:bodyPr wrap="square" anchor="t">
-            <a:spAutoFit/>
-          </a:bodyPr>
-          <a:lstStyle/>
-          <a:p>
-            <a:pPr>
-              <a:spcAft>
-                <a:spcPts val="200"/>
-              </a:spcAft>
-            </a:pPr>
-            <a:r>
-              <a:rPr sz="1600" b="0">
-                <a:solidFill>
-                  <a:srgbClr val="E4ECF7"/>
-                </a:solidFill>
-                <a:latin typeface="Consolas"/>
-              </a:rPr>
-              <a:t>KR4232   C1749   Retail-Core   480000   delivered   2026-08-19</a:t>
-            </a:r>
-          </a:p>
-        </p:txBody>
-      </p:sp>
-      <p:sp>
-        <p:nvSpPr>
-          <p:cNvPr id="10" name="TextBox 9"/>
-          <p:cNvSpPr txBox="1"/>
-          <p:nvPr/>
-        </p:nvSpPr>
-        <p:spPr>
-          <a:xfrm>
-            <a:off x="5771244" y="2602992"/>
-            <a:ext cx="5734650" cy="3893312"/>
-          </a:xfrm>
-          <a:prstGeom prst="rect">
-            <a:avLst/>
-          </a:prstGeom>
-          <a:noFill/>
-        </p:spPr>
-        <p:txBody>
-          <a:bodyPr wrap="square" anchor="t">
-            <a:spAutoFit/>
-          </a:bodyPr>
-          <a:lstStyle/>
-          <a:p>
-            <a:pPr>
-              <a:spcAft>
-                <a:spcPts val="900"/>
-              </a:spcAft>
-            </a:pPr>
-            <a:r>
-              <a:rPr sz="2000" b="0">
-                <a:solidFill>
-                  <a:srgbClr val="1C1C1A"/>
-                </a:solidFill>
-                <a:latin typeface="Calibri"/>
-              </a:rPr>
-              <a:t>One order. It carries </a:t>
-            </a:r>
-            <a:r>
-              <a:rPr sz="2000" b="1">
-                <a:solidFill>
-                  <a:srgbClr val="1C1C1A"/>
-                </a:solidFill>
-                <a:latin typeface="Calibri"/>
-              </a:rPr>
-              <a:t>85.5 percent of every rupee in the file</a:t>
-            </a:r>
-            <a:r>
-              <a:rPr sz="2000" b="0">
-                <a:solidFill>
-                  <a:srgbClr val="1C1C1A"/>
-                </a:solidFill>
-                <a:latin typeface="Calibri"/>
-              </a:rPr>
-              <a:t>.</a:t>
-            </a:r>
-          </a:p>
-          <a:p>
-            <a:pPr>
-              <a:spcAft>
-                <a:spcPts val="900"/>
-              </a:spcAft>
-            </a:pPr>
-            <a:r>
-              <a:rPr sz="2000" b="0">
-                <a:solidFill>
-                  <a:srgbClr val="1C1C1A"/>
-                </a:solidFill>
-                <a:latin typeface="Calibri"/>
-              </a:rPr>
-              <a:t>It is not a typo, not a text value, not a duplicate. Yesterday's pass looked at it and kept it, and the decisions log says why: it converts cleanly and is well formed, so it is real until somebody says otherwise, and it was raised with the order book owner.</a:t>
-            </a:r>
-          </a:p>
-          <a:p>
-            <a:pPr>
-              <a:spcAft>
-                <a:spcPts val="900"/>
-              </a:spcAft>
-            </a:pPr>
-            <a:r>
-              <a:rPr sz="2000" b="0">
-                <a:solidFill>
-                  <a:srgbClr val="1C1C1A"/>
-                </a:solidFill>
-                <a:latin typeface="Calibri"/>
-              </a:rPr>
-              <a:t>An order can be correct and still wreck every summary it touches.</a:t>
-            </a:r>
-          </a:p>
-        </p:txBody>
-      </p:sp>
       <p:sp>
         <p:nvSpPr>
           <p:cNvPr id="11" name="Rectangle 10"/>
@@ -9826,7 +9831,7 @@
           <a:noFill/>
         </p:spPr>
         <p:txBody>
-          <a:bodyPr wrap="square" anchor="t">
+          <a:bodyPr wrap="square" anchor="t" lIns="0" rIns="0" tIns="0" bIns="0">
             <a:spAutoFit/>
           </a:bodyPr>
           <a:lstStyle/>
@@ -9860,7 +9865,7 @@
           <a:noFill/>
         </p:spPr>
         <p:txBody>
-          <a:bodyPr wrap="square" anchor="t">
+          <a:bodyPr wrap="square" anchor="t" lIns="0" rIns="0" tIns="0" bIns="0">
             <a:spAutoFit/>
           </a:bodyPr>
           <a:lstStyle/>
@@ -10010,7 +10015,7 @@
           <a:noFill/>
         </p:spPr>
         <p:txBody>
-          <a:bodyPr wrap="square" anchor="ctr">
+          <a:bodyPr wrap="square" anchor="ctr" lIns="0" rIns="0" tIns="0" bIns="0">
             <a:spAutoFit/>
           </a:bodyPr>
           <a:lstStyle/>
@@ -10080,8 +10085,8 @@
           <p:nvPr/>
         </p:nvGraphicFramePr>
         <p:xfrm>
-          <a:off x="685800" y="2130044"/>
-          <a:ext cx="10820095" cy="1161288"/>
+          <a:off x="685800" y="2133092"/>
+          <a:ext cx="10820093" cy="1161288"/>
         </p:xfrm>
         <a:graphic>
           <a:graphicData uri="http://schemas.openxmlformats.org/drawingml/2006/table">
@@ -10090,9 +10095,9 @@
                 <a:tableStyleId>{2D5ABB26-0587-4C30-8999-92F81FD0307C}</a:tableStyleId>
               </a:tblPr>
               <a:tblGrid>
-                <a:gridCol w="3606698"/>
-                <a:gridCol w="3606698"/>
-                <a:gridCol w="3606699"/>
+                <a:gridCol w="4405310"/>
+                <a:gridCol w="3534097"/>
+                <a:gridCol w="2880686"/>
               </a:tblGrid>
               <a:tr h="387096">
                 <a:tc>
@@ -10310,7 +10315,7 @@
         </p:nvSpPr>
         <p:spPr>
           <a:xfrm>
-            <a:off x="685800" y="3547364"/>
+            <a:off x="685800" y="3550412"/>
             <a:ext cx="10820095" cy="910336"/>
           </a:xfrm>
           <a:prstGeom prst="rect">
@@ -10319,7 +10324,7 @@
           <a:noFill/>
         </p:spPr>
         <p:txBody>
-          <a:bodyPr wrap="square" anchor="t">
+          <a:bodyPr wrap="square" anchor="t" lIns="0" rIns="0" tIns="0" bIns="0">
             <a:spAutoFit/>
           </a:bodyPr>
           <a:lstStyle/>
@@ -10349,8 +10354,8 @@
         </p:nvSpPr>
         <p:spPr>
           <a:xfrm>
-            <a:off x="685800" y="4585716"/>
-            <a:ext cx="10820095" cy="965200"/>
+            <a:off x="685800" y="4588764"/>
+            <a:ext cx="10820095" cy="959104"/>
           </a:xfrm>
           <a:prstGeom prst="rect">
             <a:avLst/>
@@ -10393,8 +10398,8 @@
         </p:nvSpPr>
         <p:spPr>
           <a:xfrm>
-            <a:off x="685800" y="4585716"/>
-            <a:ext cx="50292" cy="965200"/>
+            <a:off x="685800" y="4588764"/>
+            <a:ext cx="50292" cy="959104"/>
           </a:xfrm>
           <a:prstGeom prst="rect">
             <a:avLst/>
@@ -10437,8 +10442,8 @@
         </p:nvSpPr>
         <p:spPr>
           <a:xfrm>
-            <a:off x="941832" y="4677155"/>
-            <a:ext cx="10362895" cy="818896"/>
+            <a:off x="941832" y="4680203"/>
+            <a:ext cx="10362895" cy="812800"/>
           </a:xfrm>
           <a:prstGeom prst="rect">
             <a:avLst/>
@@ -10446,7 +10451,7 @@
           <a:noFill/>
         </p:spPr>
         <p:txBody>
-          <a:bodyPr wrap="square" anchor="ctr">
+          <a:bodyPr wrap="square" anchor="ctr" lIns="0" rIns="0" tIns="0" bIns="0">
             <a:spAutoFit/>
           </a:bodyPr>
           <a:lstStyle/>
@@ -10533,7 +10538,7 @@
           <a:noFill/>
         </p:spPr>
         <p:txBody>
-          <a:bodyPr wrap="square" anchor="t">
+          <a:bodyPr wrap="square" anchor="t" lIns="0" rIns="0" tIns="0" bIns="0">
             <a:spAutoFit/>
           </a:bodyPr>
           <a:lstStyle/>
@@ -10567,7 +10572,7 @@
           <a:noFill/>
         </p:spPr>
         <p:txBody>
-          <a:bodyPr wrap="square" anchor="t">
+          <a:bodyPr wrap="square" anchor="t" lIns="0" rIns="0" tIns="0" bIns="0">
             <a:spAutoFit/>
           </a:bodyPr>
           <a:lstStyle/>
@@ -10717,7 +10722,7 @@
           <a:noFill/>
         </p:spPr>
         <p:txBody>
-          <a:bodyPr wrap="square" anchor="ctr">
+          <a:bodyPr wrap="square" anchor="ctr" lIns="0" rIns="0" tIns="0" bIns="0">
             <a:spAutoFit/>
           </a:bodyPr>
           <a:lstStyle/>
@@ -10795,7 +10800,7 @@
           <a:noFill/>
         </p:spPr>
         <p:txBody>
-          <a:bodyPr wrap="square" anchor="t">
+          <a:bodyPr wrap="square" anchor="t" lIns="0" rIns="0" tIns="0" bIns="0">
             <a:spAutoFit/>
           </a:bodyPr>
           <a:lstStyle/>
@@ -10942,7 +10947,7 @@
           <a:noFill/>
         </p:spPr>
         <p:txBody>
-          <a:bodyPr wrap="square" anchor="t">
+          <a:bodyPr wrap="square" anchor="t" lIns="0" rIns="0" tIns="0" bIns="0">
             <a:spAutoFit/>
           </a:bodyPr>
           <a:lstStyle/>
@@ -10976,7 +10981,7 @@
           <a:noFill/>
         </p:spPr>
         <p:txBody>
-          <a:bodyPr wrap="square" anchor="t">
+          <a:bodyPr wrap="square" anchor="t" lIns="0" rIns="0" tIns="0" bIns="0">
             <a:spAutoFit/>
           </a:bodyPr>
           <a:lstStyle/>
@@ -11126,7 +11131,7 @@
           <a:noFill/>
         </p:spPr>
         <p:txBody>
-          <a:bodyPr wrap="square" anchor="ctr">
+          <a:bodyPr wrap="square" anchor="ctr" lIns="0" rIns="0" tIns="0" bIns="0">
             <a:spAutoFit/>
           </a:bodyPr>
           <a:lstStyle/>
@@ -11196,7 +11201,7 @@
         <p:spPr>
           <a:xfrm>
             <a:off x="685800" y="1627632"/>
-            <a:ext cx="10820095" cy="965200"/>
+            <a:ext cx="10820095" cy="706628"/>
           </a:xfrm>
           <a:prstGeom prst="rect">
             <a:avLst/>
@@ -11240,7 +11245,7 @@
         <p:spPr>
           <a:xfrm>
             <a:off x="685800" y="1627632"/>
-            <a:ext cx="50292" cy="965200"/>
+            <a:ext cx="50292" cy="706628"/>
           </a:xfrm>
           <a:prstGeom prst="rect">
             <a:avLst/>
@@ -11284,7 +11289,7 @@
         <p:spPr>
           <a:xfrm>
             <a:off x="941832" y="1719072"/>
-            <a:ext cx="10362895" cy="818896"/>
+            <a:ext cx="10362895" cy="560324"/>
           </a:xfrm>
           <a:prstGeom prst="rect">
             <a:avLst/>
@@ -11292,13 +11297,13 @@
           <a:noFill/>
         </p:spPr>
         <p:txBody>
-          <a:bodyPr wrap="square" anchor="ctr">
+          <a:bodyPr wrap="square" anchor="ctr" lIns="0" rIns="0" tIns="0" bIns="0">
             <a:spAutoFit/>
           </a:bodyPr>
           <a:lstStyle/>
           <a:p>
             <a:r>
-              <a:rPr sz="2000" b="1">
+              <a:rPr sz="1300" b="1">
                 <a:solidFill>
                   <a:srgbClr val="2B4A7D"/>
                 </a:solidFill>
@@ -11307,7 +11312,7 @@
               <a:t>The claim. </a:t>
             </a:r>
             <a:r>
-              <a:rPr sz="2000" b="0">
+              <a:rPr sz="1300" b="0">
                 <a:solidFill>
                   <a:srgbClr val="1C1C1A"/>
                 </a:solidFill>
@@ -11327,8 +11332,8 @@
           <p:nvPr/>
         </p:nvGraphicFramePr>
         <p:xfrm>
-          <a:off x="685800" y="2757424"/>
-          <a:ext cx="10820095" cy="2325624"/>
+          <a:off x="685800" y="2498852"/>
+          <a:ext cx="10820094" cy="1406144"/>
         </p:xfrm>
         <a:graphic>
           <a:graphicData uri="http://schemas.openxmlformats.org/drawingml/2006/table">
@@ -11337,17 +11342,17 @@
                 <a:tableStyleId>{2D5ABB26-0587-4C30-8999-92F81FD0307C}</a:tableStyleId>
               </a:tblPr>
               <a:tblGrid>
-                <a:gridCol w="5410047"/>
-                <a:gridCol w="5410048"/>
+                <a:gridCol w="1410486"/>
+                <a:gridCol w="9409608"/>
               </a:tblGrid>
-              <a:tr h="387096">
+              <a:tr h="310896">
                 <a:tc>
                   <a:txBody>
                     <a:bodyPr/>
                     <a:lstStyle/>
                     <a:p>
                       <a:r>
-                        <a:rPr sz="1600" b="1">
+                        <a:rPr sz="1100" b="1">
                           <a:solidFill>
                             <a:srgbClr val="FFFFFF"/>
                           </a:solidFill>
@@ -11369,7 +11374,7 @@
                     <a:lstStyle/>
                     <a:p>
                       <a:r>
-                        <a:rPr sz="1600" b="1">
+                        <a:rPr sz="1100" b="1">
                           <a:solidFill>
                             <a:srgbClr val="FFFFFF"/>
                           </a:solidFill>
@@ -11386,14 +11391,14 @@
                   </a:tcPr>
                 </a:tc>
               </a:tr>
-              <a:tr h="905256">
+              <a:tr h="473456">
                 <a:tc>
                   <a:txBody>
                     <a:bodyPr/>
                     <a:lstStyle/>
                     <a:p>
                       <a:r>
-                        <a:rPr sz="1500" b="0">
+                        <a:rPr sz="1000" b="0">
                           <a:solidFill>
                             <a:srgbClr val="1C1C1A"/>
                           </a:solidFill>
@@ -11415,7 +11420,7 @@
                     <a:lstStyle/>
                     <a:p>
                       <a:r>
-                        <a:rPr sz="1500" b="0">
+                        <a:rPr sz="1000" b="0">
                           <a:solidFill>
                             <a:srgbClr val="1C1C1A"/>
                           </a:solidFill>
@@ -11432,14 +11437,14 @@
                   </a:tcPr>
                 </a:tc>
               </a:tr>
-              <a:tr h="646176">
+              <a:tr h="310896">
                 <a:tc>
                   <a:txBody>
                     <a:bodyPr/>
                     <a:lstStyle/>
                     <a:p>
                       <a:r>
-                        <a:rPr sz="1500" b="0">
+                        <a:rPr sz="1000" b="0">
                           <a:solidFill>
                             <a:srgbClr val="1C1C1A"/>
                           </a:solidFill>
@@ -11461,7 +11466,7 @@
                     <a:lstStyle/>
                     <a:p>
                       <a:r>
-                        <a:rPr sz="1500" b="0">
+                        <a:rPr sz="1000" b="0">
                           <a:solidFill>
                             <a:srgbClr val="1C1C1A"/>
                           </a:solidFill>
@@ -11478,14 +11483,14 @@
                   </a:tcPr>
                 </a:tc>
               </a:tr>
-              <a:tr h="387096">
+              <a:tr h="310896">
                 <a:tc>
                   <a:txBody>
                     <a:bodyPr/>
                     <a:lstStyle/>
                     <a:p>
                       <a:r>
-                        <a:rPr sz="1500" b="0">
+                        <a:rPr sz="1000" b="0">
                           <a:solidFill>
                             <a:srgbClr val="1C1C1A"/>
                           </a:solidFill>
@@ -11507,7 +11512,7 @@
                     <a:lstStyle/>
                     <a:p>
                       <a:r>
-                        <a:rPr sz="1500" b="0">
+                        <a:rPr sz="1000" b="0">
                           <a:solidFill>
                             <a:srgbClr val="1C1C1A"/>
                           </a:solidFill>
@@ -11536,8 +11541,8 @@
         </p:nvSpPr>
         <p:spPr>
           <a:xfrm>
-            <a:off x="685800" y="5339080"/>
-            <a:ext cx="10820095" cy="619760"/>
+            <a:off x="685800" y="4161028"/>
+            <a:ext cx="10820095" cy="472186"/>
           </a:xfrm>
           <a:prstGeom prst="rect">
             <a:avLst/>
@@ -11580,8 +11585,8 @@
         </p:nvSpPr>
         <p:spPr>
           <a:xfrm>
-            <a:off x="685800" y="5339080"/>
-            <a:ext cx="50292" cy="619760"/>
+            <a:off x="685800" y="4161028"/>
+            <a:ext cx="50292" cy="472186"/>
           </a:xfrm>
           <a:prstGeom prst="rect">
             <a:avLst/>
@@ -11624,8 +11629,8 @@
         </p:nvSpPr>
         <p:spPr>
           <a:xfrm>
-            <a:off x="941832" y="5430520"/>
-            <a:ext cx="10362895" cy="473456"/>
+            <a:off x="941832" y="4252468"/>
+            <a:ext cx="10362895" cy="325882"/>
           </a:xfrm>
           <a:prstGeom prst="rect">
             <a:avLst/>
@@ -11633,13 +11638,13 @@
           <a:noFill/>
         </p:spPr>
         <p:txBody>
-          <a:bodyPr wrap="square" anchor="ctr">
+          <a:bodyPr wrap="square" anchor="ctr" lIns="0" rIns="0" tIns="0" bIns="0">
             <a:spAutoFit/>
           </a:bodyPr>
           <a:lstStyle/>
           <a:p>
             <a:r>
-              <a:rPr sz="2000" b="1">
+              <a:rPr sz="1300" b="1">
                 <a:solidFill>
                   <a:srgbClr val="2B4A7D"/>
                 </a:solidFill>
@@ -11648,7 +11653,7 @@
               <a:t>The mental model. </a:t>
             </a:r>
             <a:r>
-              <a:rPr sz="2000" b="0">
+              <a:rPr sz="1300" b="0">
                 <a:solidFill>
                   <a:srgbClr val="1C1C1A"/>
                 </a:solidFill>
@@ -11659,9 +11664,33 @@
           </a:p>
         </p:txBody>
       </p:sp>
-      <p:sp>
-        <p:nvSpPr>
-          <p:cNvPr id="13" name="Rectangle 12"/>
+      <p:pic>
+        <p:nvPicPr>
+          <p:cNvPr id="13" name="Picture 12" descr="6537f3a9820bab07.png"/>
+          <p:cNvPicPr>
+            <a:picLocks noChangeAspect="1"/>
+          </p:cNvPicPr>
+          <p:nvPr/>
+        </p:nvPicPr>
+        <p:blipFill>
+          <a:blip r:embed="rId2"/>
+          <a:stretch>
+            <a:fillRect/>
+          </a:stretch>
+        </p:blipFill>
+        <p:spPr>
+          <a:xfrm>
+            <a:off x="4446582" y="4797806"/>
+            <a:ext cx="3298531" cy="1255521"/>
+          </a:xfrm>
+          <a:prstGeom prst="rect">
+            <a:avLst/>
+          </a:prstGeom>
+        </p:spPr>
+      </p:pic>
+      <p:sp>
+        <p:nvSpPr>
+          <p:cNvPr id="14" name="Rectangle 13"/>
           <p:cNvSpPr/>
           <p:nvPr/>
         </p:nvSpPr>
@@ -11705,7 +11734,7 @@
       </p:sp>
       <p:sp>
         <p:nvSpPr>
-          <p:cNvPr id="14" name="TextBox 13"/>
+          <p:cNvPr id="15" name="TextBox 14"/>
           <p:cNvSpPr txBox="1"/>
           <p:nvPr/>
         </p:nvSpPr>
@@ -11720,7 +11749,7 @@
           <a:noFill/>
         </p:spPr>
         <p:txBody>
-          <a:bodyPr wrap="square" anchor="t">
+          <a:bodyPr wrap="square" anchor="t" lIns="0" rIns="0" tIns="0" bIns="0">
             <a:spAutoFit/>
           </a:bodyPr>
           <a:lstStyle/>
@@ -11739,7 +11768,7 @@
       </p:sp>
       <p:sp>
         <p:nvSpPr>
-          <p:cNvPr id="15" name="TextBox 14"/>
+          <p:cNvPr id="16" name="TextBox 15"/>
           <p:cNvSpPr txBox="1"/>
           <p:nvPr/>
         </p:nvSpPr>
@@ -11754,7 +11783,7 @@
           <a:noFill/>
         </p:spPr>
         <p:txBody>
-          <a:bodyPr wrap="square" anchor="t">
+          <a:bodyPr wrap="square" anchor="t" lIns="0" rIns="0" tIns="0" bIns="0">
             <a:spAutoFit/>
           </a:bodyPr>
           <a:lstStyle/>
@@ -11957,7 +11986,7 @@
           <a:noFill/>
         </p:spPr>
         <p:txBody>
-          <a:bodyPr wrap="square" anchor="ctr">
+          <a:bodyPr wrap="square" anchor="ctr" lIns="0" rIns="0" tIns="0" bIns="0">
             <a:spAutoFit/>
           </a:bodyPr>
           <a:lstStyle/>
@@ -12027,7 +12056,7 @@
         <p:spPr>
           <a:xfrm>
             <a:off x="685800" y="1627632"/>
-            <a:ext cx="10820095" cy="564896"/>
+            <a:ext cx="10820095" cy="478536"/>
           </a:xfrm>
           <a:prstGeom prst="rect">
             <a:avLst/>
@@ -12035,18 +12064,18 @@
           <a:noFill/>
         </p:spPr>
         <p:txBody>
-          <a:bodyPr wrap="square" anchor="t">
+          <a:bodyPr wrap="square" anchor="t" lIns="0" rIns="0" tIns="0" bIns="0">
             <a:spAutoFit/>
           </a:bodyPr>
           <a:lstStyle/>
           <a:p>
             <a:pPr>
               <a:spcAft>
-                <a:spcPts val="900"/>
+                <a:spcPts val="700"/>
               </a:spcAft>
             </a:pPr>
             <a:r>
-              <a:rPr sz="2000" b="0">
+              <a:rPr sz="1500" b="0">
                 <a:solidFill>
                   <a:srgbClr val="1C1C1A"/>
                 </a:solidFill>
@@ -12066,8 +12095,8 @@
           <p:nvPr/>
         </p:nvGraphicFramePr>
         <p:xfrm>
-          <a:off x="685800" y="2320544"/>
-          <a:ext cx="10820095" cy="2325624"/>
+          <a:off x="685800" y="2234184"/>
+          <a:ext cx="10820094" cy="1652016"/>
         </p:xfrm>
         <a:graphic>
           <a:graphicData uri="http://schemas.openxmlformats.org/drawingml/2006/table">
@@ -12076,18 +12105,18 @@
                 <a:tableStyleId>{2D5ABB26-0587-4C30-8999-92F81FD0307C}</a:tableStyleId>
               </a:tblPr>
               <a:tblGrid>
-                <a:gridCol w="3606698"/>
-                <a:gridCol w="3606698"/>
-                <a:gridCol w="3606699"/>
+                <a:gridCol w="4183359"/>
+                <a:gridCol w="4543773"/>
+                <a:gridCol w="2092962"/>
               </a:tblGrid>
-              <a:tr h="387096">
+              <a:tr h="508000">
                 <a:tc>
                   <a:txBody>
                     <a:bodyPr/>
                     <a:lstStyle/>
                     <a:p>
                       <a:r>
-                        <a:rPr sz="1600" b="1">
+                        <a:rPr sz="1200" b="1">
                           <a:solidFill>
                             <a:srgbClr val="FFFFFF"/>
                           </a:solidFill>
@@ -12109,7 +12138,7 @@
                     <a:lstStyle/>
                     <a:p>
                       <a:r>
-                        <a:rPr sz="1600" b="1">
+                        <a:rPr sz="1200" b="1">
                           <a:solidFill>
                             <a:srgbClr val="FFFFFF"/>
                           </a:solidFill>
@@ -12131,7 +12160,7 @@
                     <a:lstStyle/>
                     <a:p>
                       <a:r>
-                        <a:rPr sz="1600" b="1">
+                        <a:rPr sz="1200" b="1">
                           <a:solidFill>
                             <a:srgbClr val="FFFFFF"/>
                           </a:solidFill>
@@ -12148,14 +12177,14 @@
                   </a:tcPr>
                 </a:tc>
               </a:tr>
-              <a:tr h="646176">
+              <a:tr h="318008">
                 <a:tc>
                   <a:txBody>
                     <a:bodyPr/>
                     <a:lstStyle/>
                     <a:p>
                       <a:r>
-                        <a:rPr sz="1500" b="0">
+                        <a:rPr sz="1100" b="0">
                           <a:solidFill>
                             <a:srgbClr val="1C1C1A"/>
                           </a:solidFill>
@@ -12177,7 +12206,7 @@
                     <a:lstStyle/>
                     <a:p>
                       <a:r>
-                        <a:rPr sz="1500" b="0">
+                        <a:rPr sz="1100" b="0">
                           <a:solidFill>
                             <a:srgbClr val="1C1C1A"/>
                           </a:solidFill>
@@ -12199,7 +12228,7 @@
                     <a:lstStyle/>
                     <a:p>
                       <a:r>
-                        <a:rPr sz="1500" b="0">
+                        <a:rPr sz="1100" b="0">
                           <a:solidFill>
                             <a:srgbClr val="1C1C1A"/>
                           </a:solidFill>
@@ -12216,14 +12245,14 @@
                   </a:tcPr>
                 </a:tc>
               </a:tr>
-              <a:tr h="646176">
+              <a:tr h="318008">
                 <a:tc>
                   <a:txBody>
                     <a:bodyPr/>
                     <a:lstStyle/>
                     <a:p>
                       <a:r>
-                        <a:rPr sz="1500" b="0">
+                        <a:rPr sz="1100" b="0">
                           <a:solidFill>
                             <a:srgbClr val="1C1C1A"/>
                           </a:solidFill>
@@ -12245,7 +12274,7 @@
                     <a:lstStyle/>
                     <a:p>
                       <a:r>
-                        <a:rPr sz="1500" b="0">
+                        <a:rPr sz="1100" b="0">
                           <a:solidFill>
                             <a:srgbClr val="1C1C1A"/>
                           </a:solidFill>
@@ -12267,7 +12296,7 @@
                     <a:lstStyle/>
                     <a:p>
                       <a:r>
-                        <a:rPr sz="1500" b="0">
+                        <a:rPr sz="1100" b="0">
                           <a:solidFill>
                             <a:srgbClr val="1C1C1A"/>
                           </a:solidFill>
@@ -12284,14 +12313,14 @@
                   </a:tcPr>
                 </a:tc>
               </a:tr>
-              <a:tr h="646176">
+              <a:tr h="508000">
                 <a:tc>
                   <a:txBody>
                     <a:bodyPr/>
                     <a:lstStyle/>
                     <a:p>
                       <a:r>
-                        <a:rPr sz="1500" b="0">
+                        <a:rPr sz="1100" b="0">
                           <a:solidFill>
                             <a:srgbClr val="1C1C1A"/>
                           </a:solidFill>
@@ -12313,7 +12342,7 @@
                     <a:lstStyle/>
                     <a:p>
                       <a:r>
-                        <a:rPr sz="1500" b="0">
+                        <a:rPr sz="1100" b="0">
                           <a:solidFill>
                             <a:srgbClr val="1C1C1A"/>
                           </a:solidFill>
@@ -12335,7 +12364,7 @@
                     <a:lstStyle/>
                     <a:p>
                       <a:r>
-                        <a:rPr sz="1500" b="0">
+                        <a:rPr sz="1100" b="0">
                           <a:solidFill>
                             <a:srgbClr val="1C1C1A"/>
                           </a:solidFill>
@@ -12364,8 +12393,8 @@
         </p:nvSpPr>
         <p:spPr>
           <a:xfrm>
-            <a:off x="685800" y="4902200"/>
-            <a:ext cx="10820095" cy="2056384"/>
+            <a:off x="685800" y="4142232"/>
+            <a:ext cx="10820095" cy="1624584"/>
           </a:xfrm>
           <a:prstGeom prst="rect">
             <a:avLst/>
@@ -12373,18 +12402,18 @@
           <a:noFill/>
         </p:spPr>
         <p:txBody>
-          <a:bodyPr wrap="square" anchor="t">
+          <a:bodyPr wrap="square" anchor="t" lIns="0" rIns="0" tIns="0" bIns="0">
             <a:spAutoFit/>
           </a:bodyPr>
           <a:lstStyle/>
           <a:p>
             <a:pPr>
               <a:spcAft>
-                <a:spcPts val="900"/>
+                <a:spcPts val="700"/>
               </a:spcAft>
             </a:pPr>
             <a:r>
-              <a:rPr sz="2000" b="0">
+              <a:rPr sz="1500" b="0">
                 <a:solidFill>
                   <a:srgbClr val="1C1C1A"/>
                 </a:solidFill>
@@ -12396,11 +12425,11 @@
           <a:p>
             <a:pPr>
               <a:spcAft>
-                <a:spcPts val="900"/>
+                <a:spcPts val="700"/>
               </a:spcAft>
             </a:pPr>
             <a:r>
-              <a:rPr sz="2000" b="0">
+              <a:rPr sz="1500" b="0">
                 <a:solidFill>
                   <a:srgbClr val="1C1C1A"/>
                 </a:solidFill>
@@ -12472,7 +12501,7 @@
           <a:noFill/>
         </p:spPr>
         <p:txBody>
-          <a:bodyPr wrap="square" anchor="t">
+          <a:bodyPr wrap="square" anchor="t" lIns="0" rIns="0" tIns="0" bIns="0">
             <a:spAutoFit/>
           </a:bodyPr>
           <a:lstStyle/>
@@ -12506,7 +12535,7 @@
           <a:noFill/>
         </p:spPr>
         <p:txBody>
-          <a:bodyPr wrap="square" anchor="t">
+          <a:bodyPr wrap="square" anchor="t" lIns="0" rIns="0" tIns="0" bIns="0">
             <a:spAutoFit/>
           </a:bodyPr>
           <a:lstStyle/>
@@ -12656,7 +12685,7 @@
           <a:noFill/>
         </p:spPr>
         <p:txBody>
-          <a:bodyPr wrap="square" anchor="ctr">
+          <a:bodyPr wrap="square" anchor="ctr" lIns="0" rIns="0" tIns="0" bIns="0">
             <a:spAutoFit/>
           </a:bodyPr>
           <a:lstStyle/>
@@ -12717,9 +12746,142 @@
           </a:p>
         </p:txBody>
       </p:sp>
+      <p:sp>
+        <p:nvSpPr>
+          <p:cNvPr id="6" name="Rectangle 5"/>
+          <p:cNvSpPr/>
+          <p:nvPr/>
+        </p:nvSpPr>
+        <p:spPr>
+          <a:xfrm>
+            <a:off x="685800" y="1627632"/>
+            <a:ext cx="41148" cy="424688"/>
+          </a:xfrm>
+          <a:prstGeom prst="rect">
+            <a:avLst/>
+          </a:prstGeom>
+          <a:solidFill>
+            <a:srgbClr val="C9C9C2"/>
+          </a:solidFill>
+          <a:ln>
+            <a:noFill/>
+          </a:ln>
+          <a:effectLst/>
+        </p:spPr>
+        <p:style>
+          <a:lnRef idx="1">
+            <a:schemeClr val="accent1"/>
+          </a:lnRef>
+          <a:fillRef idx="3">
+            <a:schemeClr val="accent1"/>
+          </a:fillRef>
+          <a:effectRef idx="2">
+            <a:schemeClr val="accent1"/>
+          </a:effectRef>
+          <a:fontRef idx="minor">
+            <a:schemeClr val="lt1"/>
+          </a:fontRef>
+        </p:style>
+        <p:txBody>
+          <a:bodyPr rtlCol="0" anchor="ctr" wrap="square"/>
+          <a:lstStyle/>
+          <a:p>
+            <a:pPr algn="ctr"/>
+          </a:p>
+        </p:txBody>
+      </p:sp>
+      <p:sp>
+        <p:nvSpPr>
+          <p:cNvPr id="7" name="TextBox 6"/>
+          <p:cNvSpPr txBox="1"/>
+          <p:nvPr/>
+        </p:nvSpPr>
+        <p:spPr>
+          <a:xfrm>
+            <a:off x="923544" y="1627632"/>
+            <a:ext cx="10545775" cy="424688"/>
+          </a:xfrm>
+          <a:prstGeom prst="rect">
+            <a:avLst/>
+          </a:prstGeom>
+          <a:noFill/>
+        </p:spPr>
+        <p:txBody>
+          <a:bodyPr wrap="square" anchor="t" lIns="0" rIns="0" tIns="0" bIns="0">
+            <a:spAutoFit/>
+          </a:bodyPr>
+          <a:lstStyle/>
+          <a:p>
+            <a:r>
+              <a:rPr sz="1400" b="0" i="1">
+                <a:solidFill>
+                  <a:srgbClr val="5F6360"/>
+                </a:solidFill>
+                <a:latin typeface="Calibri"/>
+              </a:rPr>
+              <a:t>On any money column, report the median and say so.</a:t>
+            </a:r>
+          </a:p>
+        </p:txBody>
+      </p:sp>
+      <p:sp>
+        <p:nvSpPr>
+          <p:cNvPr id="8" name="TextBox 7"/>
+          <p:cNvSpPr txBox="1"/>
+          <p:nvPr/>
+        </p:nvSpPr>
+        <p:spPr>
+          <a:xfrm>
+            <a:off x="685800" y="2198624"/>
+            <a:ext cx="10820095" cy="1365504"/>
+          </a:xfrm>
+          <a:prstGeom prst="rect">
+            <a:avLst/>
+          </a:prstGeom>
+          <a:noFill/>
+        </p:spPr>
+        <p:txBody>
+          <a:bodyPr wrap="square" anchor="t" lIns="0" rIns="0" tIns="0" bIns="0">
+            <a:spAutoFit/>
+          </a:bodyPr>
+          <a:lstStyle/>
+          <a:p>
+            <a:pPr>
+              <a:spcAft>
+                <a:spcPts val="700"/>
+              </a:spcAft>
+            </a:pPr>
+            <a:r>
+              <a:rPr sz="1500" b="0">
+                <a:solidFill>
+                  <a:srgbClr val="1C1C1A"/>
+                </a:solidFill>
+                <a:latin typeface="Calibri"/>
+              </a:rPr>
+              <a:t>This is not this programme's opinion. Statistical agencies report median household income rather than mean household income, because a small number of very large incomes drag the mean away from anything a household would recognise.</a:t>
+            </a:r>
+          </a:p>
+          <a:p>
+            <a:pPr>
+              <a:spcAft>
+                <a:spcPts val="700"/>
+              </a:spcAft>
+            </a:pPr>
+            <a:r>
+              <a:rPr sz="1500" b="0">
+                <a:solidFill>
+                  <a:srgbClr val="1C1C1A"/>
+                </a:solidFill>
+                <a:latin typeface="Calibri"/>
+              </a:rPr>
+              <a:t>Order values behave the same way. So do salaries, claim sizes, invoice amounts and basket totals.</a:t>
+            </a:r>
+          </a:p>
+        </p:txBody>
+      </p:sp>
       <p:pic>
         <p:nvPicPr>
-          <p:cNvPr id="6" name="Picture 5" descr="529771cfcc1b17f8.png"/>
+          <p:cNvPr id="9" name="Picture 8" descr="6537f3a9820bab07.png"/>
           <p:cNvPicPr>
             <a:picLocks noChangeAspect="1"/>
           </p:cNvPicPr>
@@ -12733,8 +12895,8 @@
         </p:blipFill>
         <p:spPr>
           <a:xfrm>
-            <a:off x="2911427" y="1627632"/>
-            <a:ext cx="6368841" cy="2424175"/>
+            <a:off x="2994173" y="3692144"/>
+            <a:ext cx="6203347" cy="2361183"/>
           </a:xfrm>
           <a:prstGeom prst="rect">
             <a:avLst/>
@@ -12743,41 +12905,7 @@
       </p:pic>
       <p:sp>
         <p:nvSpPr>
-          <p:cNvPr id="7" name="TextBox 6"/>
-          <p:cNvSpPr txBox="1"/>
-          <p:nvPr/>
-        </p:nvSpPr>
-        <p:spPr>
-          <a:xfrm>
-            <a:off x="685800" y="4161536"/>
-            <a:ext cx="10820095" cy="1891792"/>
-          </a:xfrm>
-          <a:prstGeom prst="rect">
-            <a:avLst/>
-          </a:prstGeom>
-          <a:noFill/>
-        </p:spPr>
-        <p:txBody>
-          <a:bodyPr wrap="square" anchor="t">
-            <a:spAutoFit/>
-          </a:bodyPr>
-          <a:lstStyle/>
-          <a:p>
-            <a:r>
-              <a:rPr sz="2000" b="0">
-                <a:solidFill>
-                  <a:srgbClr val="1C1C1A"/>
-                </a:solidFill>
-                <a:latin typeface="Calibri"/>
-              </a:rPr>
-              <a:t>&gt; On any money column, report the median and say so. This is not this programme's opinion. Statistical agencies report median household income rather than mean household income, because a small number of very large incomes drag the mean away from anything a household would recognise. Order values behave the same way. So do salaries, claim sizes, invoice amounts and basket totals.</a:t>
-            </a:r>
-          </a:p>
-        </p:txBody>
-      </p:sp>
-      <p:sp>
-        <p:nvSpPr>
-          <p:cNvPr id="8" name="Rectangle 7"/>
+          <p:cNvPr id="10" name="Rectangle 9"/>
           <p:cNvSpPr/>
           <p:nvPr/>
         </p:nvSpPr>
@@ -12821,7 +12949,7 @@
       </p:sp>
       <p:sp>
         <p:nvSpPr>
-          <p:cNvPr id="9" name="TextBox 8"/>
+          <p:cNvPr id="11" name="TextBox 10"/>
           <p:cNvSpPr txBox="1"/>
           <p:nvPr/>
         </p:nvSpPr>
@@ -12836,7 +12964,7 @@
           <a:noFill/>
         </p:spPr>
         <p:txBody>
-          <a:bodyPr wrap="square" anchor="t">
+          <a:bodyPr wrap="square" anchor="t" lIns="0" rIns="0" tIns="0" bIns="0">
             <a:spAutoFit/>
           </a:bodyPr>
           <a:lstStyle/>
@@ -12855,7 +12983,7 @@
       </p:sp>
       <p:sp>
         <p:nvSpPr>
-          <p:cNvPr id="10" name="TextBox 9"/>
+          <p:cNvPr id="12" name="TextBox 11"/>
           <p:cNvSpPr txBox="1"/>
           <p:nvPr/>
         </p:nvSpPr>
@@ -12870,7 +12998,7 @@
           <a:noFill/>
         </p:spPr>
         <p:txBody>
-          <a:bodyPr wrap="square" anchor="t">
+          <a:bodyPr wrap="square" anchor="t" lIns="0" rIns="0" tIns="0" bIns="0">
             <a:spAutoFit/>
           </a:bodyPr>
           <a:lstStyle/>
@@ -12967,7 +13095,7 @@
           <a:noFill/>
         </p:spPr>
         <p:txBody>
-          <a:bodyPr wrap="square" anchor="ctr">
+          <a:bodyPr wrap="square" anchor="ctr" lIns="0" rIns="0" tIns="0" bIns="0">
             <a:spAutoFit/>
           </a:bodyPr>
           <a:lstStyle/>
@@ -13311,7 +13439,7 @@
           <a:noFill/>
         </p:spPr>
         <p:txBody>
-          <a:bodyPr wrap="square" anchor="t">
+          <a:bodyPr wrap="square" anchor="t" lIns="0" rIns="0" tIns="0" bIns="0">
             <a:spAutoFit/>
           </a:bodyPr>
           <a:lstStyle/>
@@ -13345,7 +13473,7 @@
           <a:noFill/>
         </p:spPr>
         <p:txBody>
-          <a:bodyPr wrap="square" anchor="t">
+          <a:bodyPr wrap="square" anchor="t" lIns="0" rIns="0" tIns="0" bIns="0">
             <a:spAutoFit/>
           </a:bodyPr>
           <a:lstStyle/>
@@ -13495,7 +13623,7 @@
           <a:noFill/>
         </p:spPr>
         <p:txBody>
-          <a:bodyPr wrap="square" anchor="ctr">
+          <a:bodyPr wrap="square" anchor="ctr" lIns="0" rIns="0" tIns="0" bIns="0">
             <a:spAutoFit/>
           </a:bodyPr>
           <a:lstStyle/>
@@ -13564,8 +13692,8 @@
         </p:nvSpPr>
         <p:spPr>
           <a:xfrm>
-            <a:off x="685800" y="2535936"/>
-            <a:ext cx="10820095" cy="1078992"/>
+            <a:off x="685800" y="2341880"/>
+            <a:ext cx="10820095" cy="1121664"/>
           </a:xfrm>
           <a:prstGeom prst="rect">
             <a:avLst/>
@@ -13608,8 +13736,8 @@
         </p:nvSpPr>
         <p:spPr>
           <a:xfrm>
-            <a:off x="685800" y="2535936"/>
-            <a:ext cx="50292" cy="1078992"/>
+            <a:off x="685800" y="2341880"/>
+            <a:ext cx="50292" cy="1121664"/>
           </a:xfrm>
           <a:prstGeom prst="rect">
             <a:avLst/>
@@ -13652,8 +13780,8 @@
         </p:nvSpPr>
         <p:spPr>
           <a:xfrm>
-            <a:off x="923544" y="2636520"/>
-            <a:ext cx="10417759" cy="896112"/>
+            <a:off x="923544" y="2442464"/>
+            <a:ext cx="10417759" cy="938784"/>
           </a:xfrm>
           <a:prstGeom prst="rect">
             <a:avLst/>
@@ -13661,7 +13789,7 @@
           <a:noFill/>
         </p:spPr>
         <p:txBody>
-          <a:bodyPr wrap="square" anchor="t">
+          <a:bodyPr wrap="square" anchor="t" lIns="0" rIns="0" tIns="0" bIns="0">
             <a:spAutoFit/>
           </a:bodyPr>
           <a:lstStyle/>
@@ -13723,8 +13851,8 @@
         </p:nvSpPr>
         <p:spPr>
           <a:xfrm>
-            <a:off x="685800" y="3779520"/>
-            <a:ext cx="10820095" cy="1365504"/>
+            <a:off x="685800" y="3628136"/>
+            <a:ext cx="10820095" cy="1710944"/>
           </a:xfrm>
           <a:prstGeom prst="rect">
             <a:avLst/>
@@ -13732,7 +13860,7 @@
           <a:noFill/>
         </p:spPr>
         <p:txBody>
-          <a:bodyPr wrap="square" anchor="t">
+          <a:bodyPr wrap="square" anchor="t" lIns="0" rIns="0" tIns="0" bIns="0">
             <a:spAutoFit/>
           </a:bodyPr>
           <a:lstStyle/>
@@ -13831,7 +13959,7 @@
           <a:noFill/>
         </p:spPr>
         <p:txBody>
-          <a:bodyPr wrap="square" anchor="t">
+          <a:bodyPr wrap="square" anchor="t" lIns="0" rIns="0" tIns="0" bIns="0">
             <a:spAutoFit/>
           </a:bodyPr>
           <a:lstStyle/>
@@ -13865,7 +13993,7 @@
           <a:noFill/>
         </p:spPr>
         <p:txBody>
-          <a:bodyPr wrap="square" anchor="t">
+          <a:bodyPr wrap="square" anchor="t" lIns="0" rIns="0" tIns="0" bIns="0">
             <a:spAutoFit/>
           </a:bodyPr>
           <a:lstStyle/>
@@ -14015,7 +14143,7 @@
           <a:noFill/>
         </p:spPr>
         <p:txBody>
-          <a:bodyPr wrap="square" anchor="ctr">
+          <a:bodyPr wrap="square" anchor="ctr" lIns="0" rIns="0" tIns="0" bIns="0">
             <a:spAutoFit/>
           </a:bodyPr>
           <a:lstStyle/>
@@ -14084,7 +14212,7 @@
         </p:nvSpPr>
         <p:spPr>
           <a:xfrm>
-            <a:off x="685800" y="2247392"/>
+            <a:off x="685800" y="2215896"/>
             <a:ext cx="10820095" cy="1710944"/>
           </a:xfrm>
           <a:prstGeom prst="rect">
@@ -14093,7 +14221,7 @@
           <a:noFill/>
         </p:spPr>
         <p:txBody>
-          <a:bodyPr wrap="square" anchor="t">
+          <a:bodyPr wrap="square" anchor="t" lIns="0" rIns="0" tIns="0" bIns="0">
             <a:spAutoFit/>
           </a:bodyPr>
           <a:lstStyle/>
@@ -14139,8 +14267,8 @@
         </p:nvSpPr>
         <p:spPr>
           <a:xfrm>
-            <a:off x="685800" y="4086352"/>
-            <a:ext cx="10820095" cy="1347216"/>
+            <a:off x="685800" y="4054856"/>
+            <a:ext cx="10820095" cy="1410208"/>
           </a:xfrm>
           <a:prstGeom prst="rect">
             <a:avLst/>
@@ -14183,8 +14311,8 @@
         </p:nvSpPr>
         <p:spPr>
           <a:xfrm>
-            <a:off x="685800" y="4086352"/>
-            <a:ext cx="50292" cy="1347216"/>
+            <a:off x="685800" y="4054856"/>
+            <a:ext cx="50292" cy="1410208"/>
           </a:xfrm>
           <a:prstGeom prst="rect">
             <a:avLst/>
@@ -14227,8 +14355,8 @@
         </p:nvSpPr>
         <p:spPr>
           <a:xfrm>
-            <a:off x="923544" y="4186936"/>
-            <a:ext cx="10417759" cy="1164336"/>
+            <a:off x="923544" y="4155440"/>
+            <a:ext cx="10417759" cy="1227328"/>
           </a:xfrm>
           <a:prstGeom prst="rect">
             <a:avLst/>
@@ -14236,7 +14364,7 @@
           <a:noFill/>
         </p:spPr>
         <p:txBody>
-          <a:bodyPr wrap="square" anchor="t">
+          <a:bodyPr wrap="square" anchor="t" lIns="0" rIns="0" tIns="0" bIns="0">
             <a:spAutoFit/>
           </a:bodyPr>
           <a:lstStyle/>
@@ -14367,7 +14495,7 @@
           <a:noFill/>
         </p:spPr>
         <p:txBody>
-          <a:bodyPr wrap="square" anchor="t">
+          <a:bodyPr wrap="square" anchor="t" lIns="0" rIns="0" tIns="0" bIns="0">
             <a:spAutoFit/>
           </a:bodyPr>
           <a:lstStyle/>
@@ -14401,7 +14529,7 @@
           <a:noFill/>
         </p:spPr>
         <p:txBody>
-          <a:bodyPr wrap="square" anchor="t">
+          <a:bodyPr wrap="square" anchor="t" lIns="0" rIns="0" tIns="0" bIns="0">
             <a:spAutoFit/>
           </a:bodyPr>
           <a:lstStyle/>
@@ -14604,7 +14732,7 @@
           <a:noFill/>
         </p:spPr>
         <p:txBody>
-          <a:bodyPr wrap="square" anchor="ctr">
+          <a:bodyPr wrap="square" anchor="ctr" lIns="0" rIns="0" tIns="0" bIns="0">
             <a:spAutoFit/>
           </a:bodyPr>
           <a:lstStyle/>
@@ -14667,7 +14795,7 @@
       </p:sp>
       <p:pic>
         <p:nvPicPr>
-          <p:cNvPr id="7" name="Picture 6" descr="37c7372baadc3ca6.png"/>
+          <p:cNvPr id="7" name="Picture 6" descr="0a0a43a14ef8c23a.png"/>
           <p:cNvPicPr>
             <a:picLocks noChangeAspect="1"/>
           </p:cNvPicPr>
@@ -14681,8 +14809,8 @@
         </p:blipFill>
         <p:spPr>
           <a:xfrm>
-            <a:off x="685800" y="1724636"/>
-            <a:ext cx="4652640" cy="4231687"/>
+            <a:off x="4383382" y="1627632"/>
+            <a:ext cx="3424930" cy="3115055"/>
           </a:xfrm>
           <a:prstGeom prst="rect">
             <a:avLst/>
@@ -14697,8 +14825,8 @@
         </p:nvSpPr>
         <p:spPr>
           <a:xfrm>
-            <a:off x="5771244" y="2867152"/>
-            <a:ext cx="5734650" cy="1946656"/>
+            <a:off x="685800" y="4852416"/>
+            <a:ext cx="10820095" cy="1200912"/>
           </a:xfrm>
           <a:prstGeom prst="rect">
             <a:avLst/>
@@ -14706,16 +14834,11 @@
           <a:noFill/>
         </p:spPr>
         <p:txBody>
-          <a:bodyPr wrap="square" anchor="t">
+          <a:bodyPr wrap="square" anchor="t" lIns="0" rIns="0" tIns="0" bIns="0">
             <a:spAutoFit/>
           </a:bodyPr>
           <a:lstStyle/>
           <a:p>
-            <a:pPr>
-              <a:spcAft>
-                <a:spcPts val="900"/>
-              </a:spcAft>
-            </a:pPr>
             <a:r>
               <a:rPr sz="2000" b="0">
                 <a:solidFill>
@@ -14789,7 +14912,7 @@
           <a:noFill/>
         </p:spPr>
         <p:txBody>
-          <a:bodyPr wrap="square" anchor="t">
+          <a:bodyPr wrap="square" anchor="t" lIns="0" rIns="0" tIns="0" bIns="0">
             <a:spAutoFit/>
           </a:bodyPr>
           <a:lstStyle/>
@@ -14823,7 +14946,7 @@
           <a:noFill/>
         </p:spPr>
         <p:txBody>
-          <a:bodyPr wrap="square" anchor="t">
+          <a:bodyPr wrap="square" anchor="t" lIns="0" rIns="0" tIns="0" bIns="0">
             <a:spAutoFit/>
           </a:bodyPr>
           <a:lstStyle/>
@@ -14973,7 +15096,7 @@
           <a:noFill/>
         </p:spPr>
         <p:txBody>
-          <a:bodyPr wrap="square" anchor="ctr">
+          <a:bodyPr wrap="square" anchor="ctr" lIns="0" rIns="0" tIns="0" bIns="0">
             <a:spAutoFit/>
           </a:bodyPr>
           <a:lstStyle/>
@@ -15042,7 +15165,7 @@
         </p:nvSpPr>
         <p:spPr>
           <a:xfrm>
-            <a:off x="685800" y="2323592"/>
+            <a:off x="685800" y="2312416"/>
             <a:ext cx="10820095" cy="564896"/>
           </a:xfrm>
           <a:prstGeom prst="rect">
@@ -15051,7 +15174,7 @@
           <a:noFill/>
         </p:spPr>
         <p:txBody>
-          <a:bodyPr wrap="square" anchor="t">
+          <a:bodyPr wrap="square" anchor="t" lIns="0" rIns="0" tIns="0" bIns="0">
             <a:spAutoFit/>
           </a:bodyPr>
           <a:lstStyle/>
@@ -15081,8 +15204,8 @@
         </p:nvSpPr>
         <p:spPr>
           <a:xfrm>
-            <a:off x="685800" y="3016504"/>
-            <a:ext cx="10820095" cy="810768"/>
+            <a:off x="685800" y="3005328"/>
+            <a:ext cx="10820095" cy="833120"/>
           </a:xfrm>
           <a:prstGeom prst="rect">
             <a:avLst/>
@@ -15125,8 +15248,8 @@
         </p:nvSpPr>
         <p:spPr>
           <a:xfrm>
-            <a:off x="685800" y="3016504"/>
-            <a:ext cx="50292" cy="810768"/>
+            <a:off x="685800" y="3005328"/>
+            <a:ext cx="50292" cy="833120"/>
           </a:xfrm>
           <a:prstGeom prst="rect">
             <a:avLst/>
@@ -15169,8 +15292,8 @@
         </p:nvSpPr>
         <p:spPr>
           <a:xfrm>
-            <a:off x="923544" y="3117088"/>
-            <a:ext cx="10417759" cy="627888"/>
+            <a:off x="923544" y="3105912"/>
+            <a:ext cx="10417759" cy="650239"/>
           </a:xfrm>
           <a:prstGeom prst="rect">
             <a:avLst/>
@@ -15178,7 +15301,7 @@
           <a:noFill/>
         </p:spPr>
         <p:txBody>
-          <a:bodyPr wrap="square" anchor="t">
+          <a:bodyPr wrap="square" anchor="t" lIns="0" rIns="0" tIns="0" bIns="0">
             <a:spAutoFit/>
           </a:bodyPr>
           <a:lstStyle/>
@@ -15224,7 +15347,7 @@
         </p:nvSpPr>
         <p:spPr>
           <a:xfrm>
-            <a:off x="685800" y="3991864"/>
+            <a:off x="685800" y="4003040"/>
             <a:ext cx="10820095" cy="1365504"/>
           </a:xfrm>
           <a:prstGeom prst="rect">
@@ -15233,7 +15356,7 @@
           <a:noFill/>
         </p:spPr>
         <p:txBody>
-          <a:bodyPr wrap="square" anchor="t">
+          <a:bodyPr wrap="square" anchor="t" lIns="0" rIns="0" tIns="0" bIns="0">
             <a:spAutoFit/>
           </a:bodyPr>
           <a:lstStyle/>
@@ -15332,7 +15455,7 @@
           <a:noFill/>
         </p:spPr>
         <p:txBody>
-          <a:bodyPr wrap="square" anchor="t">
+          <a:bodyPr wrap="square" anchor="t" lIns="0" rIns="0" tIns="0" bIns="0">
             <a:spAutoFit/>
           </a:bodyPr>
           <a:lstStyle/>
@@ -15366,7 +15489,7 @@
           <a:noFill/>
         </p:spPr>
         <p:txBody>
-          <a:bodyPr wrap="square" anchor="t">
+          <a:bodyPr wrap="square" anchor="t" lIns="0" rIns="0" tIns="0" bIns="0">
             <a:spAutoFit/>
           </a:bodyPr>
           <a:lstStyle/>
@@ -15516,7 +15639,7 @@
           <a:noFill/>
         </p:spPr>
         <p:txBody>
-          <a:bodyPr wrap="square" anchor="ctr">
+          <a:bodyPr wrap="square" anchor="ctr" lIns="0" rIns="0" tIns="0" bIns="0">
             <a:spAutoFit/>
           </a:bodyPr>
           <a:lstStyle/>
@@ -15585,8 +15708,8 @@
         </p:nvSpPr>
         <p:spPr>
           <a:xfrm>
-            <a:off x="685800" y="2631440"/>
-            <a:ext cx="10820095" cy="542543"/>
+            <a:off x="685800" y="2630424"/>
+            <a:ext cx="10820095" cy="544576"/>
           </a:xfrm>
           <a:prstGeom prst="rect">
             <a:avLst/>
@@ -15629,8 +15752,8 @@
         </p:nvSpPr>
         <p:spPr>
           <a:xfrm>
-            <a:off x="685800" y="2631440"/>
-            <a:ext cx="50292" cy="542543"/>
+            <a:off x="685800" y="2630424"/>
+            <a:ext cx="50292" cy="544576"/>
           </a:xfrm>
           <a:prstGeom prst="rect">
             <a:avLst/>
@@ -15673,8 +15796,8 @@
         </p:nvSpPr>
         <p:spPr>
           <a:xfrm>
-            <a:off x="923544" y="2732024"/>
-            <a:ext cx="10417759" cy="359663"/>
+            <a:off x="923544" y="2731008"/>
+            <a:ext cx="10417759" cy="361696"/>
           </a:xfrm>
           <a:prstGeom prst="rect">
             <a:avLst/>
@@ -15682,7 +15805,7 @@
           <a:noFill/>
         </p:spPr>
         <p:txBody>
-          <a:bodyPr wrap="square" anchor="t">
+          <a:bodyPr wrap="square" anchor="t" lIns="0" rIns="0" tIns="0" bIns="0">
             <a:spAutoFit/>
           </a:bodyPr>
           <a:lstStyle/>
@@ -15712,7 +15835,7 @@
         </p:nvSpPr>
         <p:spPr>
           <a:xfrm>
-            <a:off x="685800" y="3338576"/>
+            <a:off x="685800" y="3339592"/>
             <a:ext cx="10820095" cy="1710944"/>
           </a:xfrm>
           <a:prstGeom prst="rect">
@@ -15721,7 +15844,7 @@
           <a:noFill/>
         </p:spPr>
         <p:txBody>
-          <a:bodyPr wrap="square" anchor="t">
+          <a:bodyPr wrap="square" anchor="t" lIns="0" rIns="0" tIns="0" bIns="0">
             <a:spAutoFit/>
           </a:bodyPr>
           <a:lstStyle/>
@@ -15820,7 +15943,7 @@
           <a:noFill/>
         </p:spPr>
         <p:txBody>
-          <a:bodyPr wrap="square" anchor="t">
+          <a:bodyPr wrap="square" anchor="t" lIns="0" rIns="0" tIns="0" bIns="0">
             <a:spAutoFit/>
           </a:bodyPr>
           <a:lstStyle/>
@@ -15854,7 +15977,7 @@
           <a:noFill/>
         </p:spPr>
         <p:txBody>
-          <a:bodyPr wrap="square" anchor="t">
+          <a:bodyPr wrap="square" anchor="t" lIns="0" rIns="0" tIns="0" bIns="0">
             <a:spAutoFit/>
           </a:bodyPr>
           <a:lstStyle/>
@@ -16004,7 +16127,7 @@
           <a:noFill/>
         </p:spPr>
         <p:txBody>
-          <a:bodyPr wrap="square" anchor="ctr">
+          <a:bodyPr wrap="square" anchor="ctr" lIns="0" rIns="0" tIns="0" bIns="0">
             <a:spAutoFit/>
           </a:bodyPr>
           <a:lstStyle/>
@@ -16065,9 +16188,64 @@
           </a:p>
         </p:txBody>
       </p:sp>
+      <p:sp>
+        <p:nvSpPr>
+          <p:cNvPr id="6" name="TextBox 5"/>
+          <p:cNvSpPr txBox="1"/>
+          <p:nvPr/>
+        </p:nvSpPr>
+        <p:spPr>
+          <a:xfrm>
+            <a:off x="685800" y="1969007"/>
+            <a:ext cx="10820095" cy="1365504"/>
+          </a:xfrm>
+          <a:prstGeom prst="rect">
+            <a:avLst/>
+          </a:prstGeom>
+          <a:noFill/>
+        </p:spPr>
+        <p:txBody>
+          <a:bodyPr wrap="square" anchor="t" lIns="0" rIns="0" tIns="0" bIns="0">
+            <a:spAutoFit/>
+          </a:bodyPr>
+          <a:lstStyle/>
+          <a:p>
+            <a:pPr>
+              <a:spcAft>
+                <a:spcPts val="900"/>
+              </a:spcAft>
+            </a:pPr>
+            <a:r>
+              <a:rPr sz="2000" b="0">
+                <a:solidFill>
+                  <a:srgbClr val="1C1C1A"/>
+                </a:solidFill>
+                <a:latin typeface="Calibri"/>
+              </a:rPr>
+              <a:t>The fence says "look at this order". It does not say "remove this order".</a:t>
+            </a:r>
+          </a:p>
+          <a:p>
+            <a:pPr>
+              <a:spcAft>
+                <a:spcPts val="900"/>
+              </a:spcAft>
+            </a:pPr>
+            <a:r>
+              <a:rPr sz="2000" b="0">
+                <a:solidFill>
+                  <a:srgbClr val="1C1C1A"/>
+                </a:solidFill>
+                <a:latin typeface="Calibri"/>
+              </a:rPr>
+              <a:t>Yesterday's language holds: an outlier is a finding to investigate before it is a row to delete. The fence just finds it faster, on a file too large to eyeball.</a:t>
+            </a:r>
+          </a:p>
+        </p:txBody>
+      </p:sp>
       <p:pic>
         <p:nvPicPr>
-          <p:cNvPr id="6" name="Picture 5" descr="04680af12862a4ea.png"/>
+          <p:cNvPr id="7" name="Picture 6" descr="7ab96f6f14263331.png"/>
           <p:cNvPicPr>
             <a:picLocks noChangeAspect="1"/>
           </p:cNvPicPr>
@@ -16081,7 +16259,7 @@
         </p:blipFill>
         <p:spPr>
           <a:xfrm>
-            <a:off x="685800" y="2662749"/>
+            <a:off x="685800" y="4342197"/>
             <a:ext cx="10820095" cy="1044820"/>
           </a:xfrm>
           <a:prstGeom prst="rect">
@@ -16089,40 +16267,6 @@
           </a:prstGeom>
         </p:spPr>
       </p:pic>
-      <p:sp>
-        <p:nvSpPr>
-          <p:cNvPr id="7" name="TextBox 6"/>
-          <p:cNvSpPr txBox="1"/>
-          <p:nvPr/>
-        </p:nvSpPr>
-        <p:spPr>
-          <a:xfrm>
-            <a:off x="685800" y="4852416"/>
-            <a:ext cx="10820095" cy="1200912"/>
-          </a:xfrm>
-          <a:prstGeom prst="rect">
-            <a:avLst/>
-          </a:prstGeom>
-          <a:noFill/>
-        </p:spPr>
-        <p:txBody>
-          <a:bodyPr wrap="square" anchor="t">
-            <a:spAutoFit/>
-          </a:bodyPr>
-          <a:lstStyle/>
-          <a:p>
-            <a:r>
-              <a:rPr sz="2000" b="0">
-                <a:solidFill>
-                  <a:srgbClr val="1C1C1A"/>
-                </a:solidFill>
-                <a:latin typeface="Calibri"/>
-              </a:rPr>
-              <a:t>The fence says "look at this order". It does not say "remove this order". Yesterday's language holds: an outlier is a finding to investigate before it is a row to delete. The fence just finds it faster, on a file too large to eyeball.</a:t>
-            </a:r>
-          </a:p>
-        </p:txBody>
-      </p:sp>
       <p:sp>
         <p:nvSpPr>
           <p:cNvPr id="8" name="Rectangle 7"/>
@@ -16184,7 +16328,7 @@
           <a:noFill/>
         </p:spPr>
         <p:txBody>
-          <a:bodyPr wrap="square" anchor="t">
+          <a:bodyPr wrap="square" anchor="t" lIns="0" rIns="0" tIns="0" bIns="0">
             <a:spAutoFit/>
           </a:bodyPr>
           <a:lstStyle/>
@@ -16218,7 +16362,7 @@
           <a:noFill/>
         </p:spPr>
         <p:txBody>
-          <a:bodyPr wrap="square" anchor="t">
+          <a:bodyPr wrap="square" anchor="t" lIns="0" rIns="0" tIns="0" bIns="0">
             <a:spAutoFit/>
           </a:bodyPr>
           <a:lstStyle/>
@@ -16315,7 +16459,7 @@
           <a:noFill/>
         </p:spPr>
         <p:txBody>
-          <a:bodyPr wrap="square" anchor="ctr">
+          <a:bodyPr wrap="square" anchor="ctr" lIns="0" rIns="0" tIns="0" bIns="0">
             <a:spAutoFit/>
           </a:bodyPr>
           <a:lstStyle/>
@@ -16659,7 +16803,7 @@
           <a:noFill/>
         </p:spPr>
         <p:txBody>
-          <a:bodyPr wrap="square" anchor="t">
+          <a:bodyPr wrap="square" anchor="t" lIns="0" rIns="0" tIns="0" bIns="0">
             <a:spAutoFit/>
           </a:bodyPr>
           <a:lstStyle/>
@@ -16693,7 +16837,7 @@
           <a:noFill/>
         </p:spPr>
         <p:txBody>
-          <a:bodyPr wrap="square" anchor="t">
+          <a:bodyPr wrap="square" anchor="t" lIns="0" rIns="0" tIns="0" bIns="0">
             <a:spAutoFit/>
           </a:bodyPr>
           <a:lstStyle/>
@@ -16896,7 +17040,7 @@
           <a:noFill/>
         </p:spPr>
         <p:txBody>
-          <a:bodyPr wrap="square" anchor="ctr">
+          <a:bodyPr wrap="square" anchor="ctr" lIns="0" rIns="0" tIns="0" bIns="0">
             <a:spAutoFit/>
           </a:bodyPr>
           <a:lstStyle/>
@@ -16965,8 +17109,8 @@
         </p:nvSpPr>
         <p:spPr>
           <a:xfrm>
-            <a:off x="685800" y="1627632"/>
-            <a:ext cx="10820095" cy="4003040"/>
+            <a:off x="685800" y="2244852"/>
+            <a:ext cx="10820095" cy="3191256"/>
           </a:xfrm>
           <a:prstGeom prst="rect">
             <a:avLst/>
@@ -16974,18 +17118,18 @@
           <a:noFill/>
         </p:spPr>
         <p:txBody>
-          <a:bodyPr wrap="square" anchor="t">
+          <a:bodyPr wrap="square" anchor="t" lIns="0" rIns="0" tIns="0" bIns="0">
             <a:spAutoFit/>
           </a:bodyPr>
           <a:lstStyle/>
           <a:p>
             <a:pPr>
               <a:spcAft>
-                <a:spcPts val="900"/>
+                <a:spcPts val="800"/>
               </a:spcAft>
             </a:pPr>
             <a:r>
-              <a:rPr sz="2000" b="0">
+              <a:rPr sz="1700" b="0">
                 <a:solidFill>
                   <a:srgbClr val="1C1C1A"/>
                 </a:solidFill>
@@ -16997,11 +17141,11 @@
           <a:p>
             <a:pPr>
               <a:spcAft>
-                <a:spcPts val="900"/>
+                <a:spcPts val="800"/>
               </a:spcAft>
             </a:pPr>
             <a:r>
-              <a:rPr sz="2000" b="0">
+              <a:rPr sz="1700" b="0">
                 <a:solidFill>
                   <a:srgbClr val="1C1C1A"/>
                 </a:solidFill>
@@ -17013,11 +17157,11 @@
           <a:p>
             <a:pPr>
               <a:spcAft>
-                <a:spcPts val="900"/>
+                <a:spcPts val="800"/>
               </a:spcAft>
             </a:pPr>
             <a:r>
-              <a:rPr sz="2000" b="0">
+              <a:rPr sz="1700" b="0">
                 <a:solidFill>
                   <a:srgbClr val="1C1C1A"/>
                 </a:solidFill>
@@ -17029,11 +17173,11 @@
           <a:p>
             <a:pPr>
               <a:spcAft>
-                <a:spcPts val="900"/>
+                <a:spcPts val="800"/>
               </a:spcAft>
             </a:pPr>
             <a:r>
-              <a:rPr sz="2000" b="0">
+              <a:rPr sz="1700" b="0">
                 <a:solidFill>
                   <a:srgbClr val="1C1C1A"/>
                 </a:solidFill>
@@ -17105,7 +17249,7 @@
           <a:noFill/>
         </p:spPr>
         <p:txBody>
-          <a:bodyPr wrap="square" anchor="t">
+          <a:bodyPr wrap="square" anchor="t" lIns="0" rIns="0" tIns="0" bIns="0">
             <a:spAutoFit/>
           </a:bodyPr>
           <a:lstStyle/>
@@ -17139,7 +17283,7 @@
           <a:noFill/>
         </p:spPr>
         <p:txBody>
-          <a:bodyPr wrap="square" anchor="t">
+          <a:bodyPr wrap="square" anchor="t" lIns="0" rIns="0" tIns="0" bIns="0">
             <a:spAutoFit/>
           </a:bodyPr>
           <a:lstStyle/>
@@ -17289,7 +17433,7 @@
           <a:noFill/>
         </p:spPr>
         <p:txBody>
-          <a:bodyPr wrap="square" anchor="ctr">
+          <a:bodyPr wrap="square" anchor="ctr" lIns="0" rIns="0" tIns="0" bIns="0">
             <a:spAutoFit/>
           </a:bodyPr>
           <a:lstStyle/>
@@ -17359,7 +17503,7 @@
         <p:spPr>
           <a:xfrm>
             <a:off x="685800" y="1627632"/>
-            <a:ext cx="10820095" cy="564896"/>
+            <a:ext cx="10820095" cy="478536"/>
           </a:xfrm>
           <a:prstGeom prst="rect">
             <a:avLst/>
@@ -17367,18 +17511,18 @@
           <a:noFill/>
         </p:spPr>
         <p:txBody>
-          <a:bodyPr wrap="square" anchor="t">
+          <a:bodyPr wrap="square" anchor="t" lIns="0" rIns="0" tIns="0" bIns="0">
             <a:spAutoFit/>
           </a:bodyPr>
           <a:lstStyle/>
           <a:p>
             <a:pPr>
               <a:spcAft>
-                <a:spcPts val="900"/>
+                <a:spcPts val="700"/>
               </a:spcAft>
             </a:pPr>
             <a:r>
-              <a:rPr sz="2000" b="0">
+              <a:rPr sz="1500" b="0">
                 <a:solidFill>
                   <a:srgbClr val="1C1C1A"/>
                 </a:solidFill>
@@ -17397,8 +17541,8 @@
         </p:nvSpPr>
         <p:spPr>
           <a:xfrm>
-            <a:off x="685800" y="2320544"/>
-            <a:ext cx="10820095" cy="1347216"/>
+            <a:off x="685800" y="2234184"/>
+            <a:ext cx="10820095" cy="1121664"/>
           </a:xfrm>
           <a:prstGeom prst="rect">
             <a:avLst/>
@@ -17441,8 +17585,8 @@
         </p:nvSpPr>
         <p:spPr>
           <a:xfrm>
-            <a:off x="685800" y="2320544"/>
-            <a:ext cx="50292" cy="1347216"/>
+            <a:off x="685800" y="2234184"/>
+            <a:ext cx="50292" cy="1121664"/>
           </a:xfrm>
           <a:prstGeom prst="rect">
             <a:avLst/>
@@ -17485,8 +17629,8 @@
         </p:nvSpPr>
         <p:spPr>
           <a:xfrm>
-            <a:off x="923544" y="2421128"/>
-            <a:ext cx="10417759" cy="1164336"/>
+            <a:off x="923544" y="2334768"/>
+            <a:ext cx="10417759" cy="938784"/>
           </a:xfrm>
           <a:prstGeom prst="rect">
             <a:avLst/>
@@ -17494,7 +17638,7 @@
           <a:noFill/>
         </p:spPr>
         <p:txBody>
-          <a:bodyPr wrap="square" anchor="t">
+          <a:bodyPr wrap="square" anchor="t" lIns="0" rIns="0" tIns="0" bIns="0">
             <a:spAutoFit/>
           </a:bodyPr>
           <a:lstStyle/>
@@ -17505,7 +17649,7 @@
               </a:spcAft>
             </a:pPr>
             <a:r>
-              <a:rPr sz="1600" b="0">
+              <a:rPr sz="1200" b="0">
                 <a:solidFill>
                   <a:srgbClr val="E4ECF7"/>
                 </a:solidFill>
@@ -17521,7 +17665,7 @@
               </a:spcAft>
             </a:pPr>
             <a:r>
-              <a:rPr sz="1600" b="0">
+              <a:rPr sz="1200" b="0">
                 <a:solidFill>
                   <a:srgbClr val="E4ECF7"/>
                 </a:solidFill>
@@ -17537,7 +17681,7 @@
               </a:spcAft>
             </a:pPr>
             <a:r>
-              <a:rPr sz="1600" b="0">
+              <a:rPr sz="1200" b="0">
                 <a:solidFill>
                   <a:srgbClr val="E4ECF7"/>
                 </a:solidFill>
@@ -17553,7 +17697,7 @@
               </a:spcAft>
             </a:pPr>
             <a:r>
-              <a:rPr sz="1600" b="0">
+              <a:rPr sz="1200" b="0">
                 <a:solidFill>
                   <a:srgbClr val="E4ECF7"/>
                 </a:solidFill>
@@ -17572,8 +17716,8 @@
         </p:nvSpPr>
         <p:spPr>
           <a:xfrm>
-            <a:off x="685800" y="3832351"/>
-            <a:ext cx="10820095" cy="910336"/>
+            <a:off x="685800" y="3520440"/>
+            <a:ext cx="10820095" cy="737616"/>
           </a:xfrm>
           <a:prstGeom prst="rect">
             <a:avLst/>
@@ -17581,18 +17725,18 @@
           <a:noFill/>
         </p:spPr>
         <p:txBody>
-          <a:bodyPr wrap="square" anchor="t">
+          <a:bodyPr wrap="square" anchor="t" lIns="0" rIns="0" tIns="0" bIns="0">
             <a:spAutoFit/>
           </a:bodyPr>
           <a:lstStyle/>
           <a:p>
             <a:pPr>
               <a:spcAft>
-                <a:spcPts val="900"/>
+                <a:spcPts val="700"/>
               </a:spcAft>
             </a:pPr>
             <a:r>
-              <a:rPr sz="2000" b="0">
+              <a:rPr sz="1500" b="0">
                 <a:solidFill>
                   <a:srgbClr val="1C1C1A"/>
                 </a:solidFill>
@@ -17605,7 +17749,7 @@
       </p:sp>
       <p:pic>
         <p:nvPicPr>
-          <p:cNvPr id="11" name="Picture 10" descr="04680af12862a4ea.png"/>
+          <p:cNvPr id="11" name="Picture 10" descr="7ab96f6f14263331.png"/>
           <p:cNvPicPr>
             <a:picLocks noChangeAspect="1"/>
           </p:cNvPicPr>
@@ -17619,7 +17763,7 @@
         </p:blipFill>
         <p:spPr>
           <a:xfrm>
-            <a:off x="685800" y="4870704"/>
+            <a:off x="685800" y="4753677"/>
             <a:ext cx="10820095" cy="1044820"/>
           </a:xfrm>
           <a:prstGeom prst="rect">
@@ -17688,7 +17832,7 @@
           <a:noFill/>
         </p:spPr>
         <p:txBody>
-          <a:bodyPr wrap="square" anchor="t">
+          <a:bodyPr wrap="square" anchor="t" lIns="0" rIns="0" tIns="0" bIns="0">
             <a:spAutoFit/>
           </a:bodyPr>
           <a:lstStyle/>
@@ -17722,7 +17866,7 @@
           <a:noFill/>
         </p:spPr>
         <p:txBody>
-          <a:bodyPr wrap="square" anchor="t">
+          <a:bodyPr wrap="square" anchor="t" lIns="0" rIns="0" tIns="0" bIns="0">
             <a:spAutoFit/>
           </a:bodyPr>
           <a:lstStyle/>
@@ -17872,7 +18016,7 @@
           <a:noFill/>
         </p:spPr>
         <p:txBody>
-          <a:bodyPr wrap="square" anchor="ctr">
+          <a:bodyPr wrap="square" anchor="ctr" lIns="0" rIns="0" tIns="0" bIns="0">
             <a:spAutoFit/>
           </a:bodyPr>
           <a:lstStyle/>
@@ -17994,7 +18138,7 @@
           <a:noFill/>
         </p:spPr>
         <p:txBody>
-          <a:bodyPr wrap="square" anchor="t">
+          <a:bodyPr wrap="square" anchor="t" lIns="0" rIns="0" tIns="0" bIns="0">
             <a:spAutoFit/>
           </a:bodyPr>
           <a:lstStyle/>
@@ -18072,7 +18216,7 @@
           <a:noFill/>
         </p:spPr>
         <p:txBody>
-          <a:bodyPr wrap="square" anchor="t">
+          <a:bodyPr wrap="square" anchor="t" lIns="0" rIns="0" tIns="0" bIns="0">
             <a:spAutoFit/>
           </a:bodyPr>
           <a:lstStyle/>
@@ -18150,7 +18294,7 @@
           <a:noFill/>
         </p:spPr>
         <p:txBody>
-          <a:bodyPr wrap="square" anchor="t">
+          <a:bodyPr wrap="square" anchor="t" lIns="0" rIns="0" tIns="0" bIns="0">
             <a:spAutoFit/>
           </a:bodyPr>
           <a:lstStyle/>
@@ -18184,7 +18328,7 @@
           <a:noFill/>
         </p:spPr>
         <p:txBody>
-          <a:bodyPr wrap="square" anchor="t">
+          <a:bodyPr wrap="square" anchor="t" lIns="0" rIns="0" tIns="0" bIns="0">
             <a:spAutoFit/>
           </a:bodyPr>
           <a:lstStyle/>
@@ -18267,7 +18411,7 @@
           <a:noFill/>
         </p:spPr>
         <p:txBody>
-          <a:bodyPr wrap="square" anchor="t">
+          <a:bodyPr wrap="square" anchor="t" lIns="0" rIns="0" tIns="0" bIns="0">
             <a:spAutoFit/>
           </a:bodyPr>
           <a:lstStyle/>
@@ -18301,7 +18445,7 @@
           <a:noFill/>
         </p:spPr>
         <p:txBody>
-          <a:bodyPr wrap="square" anchor="t">
+          <a:bodyPr wrap="square" anchor="t" lIns="0" rIns="0" tIns="0" bIns="0">
             <a:spAutoFit/>
           </a:bodyPr>
           <a:lstStyle/>
@@ -18451,7 +18595,7 @@
           <a:noFill/>
         </p:spPr>
         <p:txBody>
-          <a:bodyPr wrap="square" anchor="ctr">
+          <a:bodyPr wrap="square" anchor="ctr" lIns="0" rIns="0" tIns="0" bIns="0">
             <a:spAutoFit/>
           </a:bodyPr>
           <a:lstStyle/>
@@ -18520,8 +18664,8 @@
         </p:nvSpPr>
         <p:spPr>
           <a:xfrm>
-            <a:off x="685800" y="2584704"/>
-            <a:ext cx="10820095" cy="2511552"/>
+            <a:off x="685800" y="2411984"/>
+            <a:ext cx="10820095" cy="2856992"/>
           </a:xfrm>
           <a:prstGeom prst="rect">
             <a:avLst/>
@@ -18529,7 +18673,7 @@
           <a:noFill/>
         </p:spPr>
         <p:txBody>
-          <a:bodyPr wrap="square" anchor="t">
+          <a:bodyPr wrap="square" anchor="t" lIns="0" rIns="0" tIns="0" bIns="0">
             <a:spAutoFit/>
           </a:bodyPr>
           <a:lstStyle/>
@@ -18644,7 +18788,7 @@
           <a:noFill/>
         </p:spPr>
         <p:txBody>
-          <a:bodyPr wrap="square" anchor="t">
+          <a:bodyPr wrap="square" anchor="t" lIns="0" rIns="0" tIns="0" bIns="0">
             <a:spAutoFit/>
           </a:bodyPr>
           <a:lstStyle/>
@@ -18678,7 +18822,7 @@
           <a:noFill/>
         </p:spPr>
         <p:txBody>
-          <a:bodyPr wrap="square" anchor="t">
+          <a:bodyPr wrap="square" anchor="t" lIns="0" rIns="0" tIns="0" bIns="0">
             <a:spAutoFit/>
           </a:bodyPr>
           <a:lstStyle/>
@@ -18881,7 +19025,7 @@
           <a:noFill/>
         </p:spPr>
         <p:txBody>
-          <a:bodyPr wrap="square" anchor="ctr">
+          <a:bodyPr wrap="square" anchor="ctr" lIns="0" rIns="0" tIns="0" bIns="0">
             <a:spAutoFit/>
           </a:bodyPr>
           <a:lstStyle/>
@@ -18950,8 +19094,8 @@
         </p:nvSpPr>
         <p:spPr>
           <a:xfrm>
-            <a:off x="685800" y="1627632"/>
-            <a:ext cx="10820095" cy="910336"/>
+            <a:off x="685800" y="2029968"/>
+            <a:ext cx="10820095" cy="478536"/>
           </a:xfrm>
           <a:prstGeom prst="rect">
             <a:avLst/>
@@ -18959,18 +19103,18 @@
           <a:noFill/>
         </p:spPr>
         <p:txBody>
-          <a:bodyPr wrap="square" anchor="t">
+          <a:bodyPr wrap="square" anchor="t" lIns="0" rIns="0" tIns="0" bIns="0">
             <a:spAutoFit/>
           </a:bodyPr>
           <a:lstStyle/>
           <a:p>
             <a:pPr>
               <a:spcAft>
-                <a:spcPts val="900"/>
+                <a:spcPts val="700"/>
               </a:spcAft>
             </a:pPr>
             <a:r>
-              <a:rPr sz="2000" b="0">
+              <a:rPr sz="1500" b="0">
                 <a:solidFill>
                   <a:srgbClr val="1C1C1A"/>
                 </a:solidFill>
@@ -18990,8 +19134,8 @@
           <p:nvPr/>
         </p:nvGraphicFramePr>
         <p:xfrm>
-          <a:off x="685800" y="2665984"/>
-          <a:ext cx="10820095" cy="2325624"/>
+          <a:off x="685800" y="2636520"/>
+          <a:ext cx="10820094" cy="1652016"/>
         </p:xfrm>
         <a:graphic>
           <a:graphicData uri="http://schemas.openxmlformats.org/drawingml/2006/table">
@@ -19000,17 +19144,17 @@
                 <a:tableStyleId>{2D5ABB26-0587-4C30-8999-92F81FD0307C}</a:tableStyleId>
               </a:tblPr>
               <a:tblGrid>
-                <a:gridCol w="5410047"/>
-                <a:gridCol w="5410048"/>
+                <a:gridCol w="4989393"/>
+                <a:gridCol w="5830701"/>
               </a:tblGrid>
-              <a:tr h="387096">
+              <a:tr h="318008">
                 <a:tc>
                   <a:txBody>
                     <a:bodyPr/>
                     <a:lstStyle/>
                     <a:p>
                       <a:r>
-                        <a:rPr sz="1600" b="1">
+                        <a:rPr sz="1200" b="1">
                           <a:solidFill>
                             <a:srgbClr val="FFFFFF"/>
                           </a:solidFill>
@@ -19032,7 +19176,7 @@
                     <a:lstStyle/>
                     <a:p>
                       <a:r>
-                        <a:rPr sz="1600" b="1">
+                        <a:rPr sz="1200" b="1">
                           <a:solidFill>
                             <a:srgbClr val="FFFFFF"/>
                           </a:solidFill>
@@ -19049,14 +19193,14 @@
                   </a:tcPr>
                 </a:tc>
               </a:tr>
-              <a:tr h="905256">
+              <a:tr h="697992">
                 <a:tc>
                   <a:txBody>
                     <a:bodyPr/>
                     <a:lstStyle/>
                     <a:p>
                       <a:r>
-                        <a:rPr sz="1500" b="0">
+                        <a:rPr sz="1100" b="0">
                           <a:solidFill>
                             <a:srgbClr val="1C1C1A"/>
                           </a:solidFill>
@@ -19078,7 +19222,7 @@
                     <a:lstStyle/>
                     <a:p>
                       <a:r>
-                        <a:rPr sz="1500" b="0">
+                        <a:rPr sz="1100" b="0">
                           <a:solidFill>
                             <a:srgbClr val="1C1C1A"/>
                           </a:solidFill>
@@ -19095,14 +19239,14 @@
                   </a:tcPr>
                 </a:tc>
               </a:tr>
-              <a:tr h="387096">
+              <a:tr h="318008">
                 <a:tc>
                   <a:txBody>
                     <a:bodyPr/>
                     <a:lstStyle/>
                     <a:p>
                       <a:r>
-                        <a:rPr sz="1500" b="0">
+                        <a:rPr sz="1100" b="0">
                           <a:solidFill>
                             <a:srgbClr val="1C1C1A"/>
                           </a:solidFill>
@@ -19131,14 +19275,14 @@
                   </a:tcPr>
                 </a:tc>
               </a:tr>
-              <a:tr h="646176">
+              <a:tr h="318008">
                 <a:tc>
                   <a:txBody>
                     <a:bodyPr/>
                     <a:lstStyle/>
                     <a:p>
                       <a:r>
-                        <a:rPr sz="1500" b="0">
+                        <a:rPr sz="1100" b="0">
                           <a:solidFill>
                             <a:srgbClr val="1C1C1A"/>
                           </a:solidFill>
@@ -19179,8 +19323,8 @@
         </p:nvSpPr>
         <p:spPr>
           <a:xfrm>
-            <a:off x="685800" y="5247640"/>
-            <a:ext cx="10820095" cy="1710944"/>
+            <a:off x="685800" y="4544568"/>
+            <a:ext cx="10820095" cy="1106424"/>
           </a:xfrm>
           <a:prstGeom prst="rect">
             <a:avLst/>
@@ -19188,18 +19332,18 @@
           <a:noFill/>
         </p:spPr>
         <p:txBody>
-          <a:bodyPr wrap="square" anchor="t">
+          <a:bodyPr wrap="square" anchor="t" lIns="0" rIns="0" tIns="0" bIns="0">
             <a:spAutoFit/>
           </a:bodyPr>
           <a:lstStyle/>
           <a:p>
             <a:pPr>
               <a:spcAft>
-                <a:spcPts val="900"/>
+                <a:spcPts val="700"/>
               </a:spcAft>
             </a:pPr>
             <a:r>
-              <a:rPr sz="2000" b="0">
+              <a:rPr sz="1500" b="0">
                 <a:solidFill>
                   <a:srgbClr val="1C1C1A"/>
                 </a:solidFill>
@@ -19211,11 +19355,11 @@
           <a:p>
             <a:pPr>
               <a:spcAft>
-                <a:spcPts val="900"/>
+                <a:spcPts val="700"/>
               </a:spcAft>
             </a:pPr>
             <a:r>
-              <a:rPr sz="2000" b="0">
+              <a:rPr sz="1500" b="0">
                 <a:solidFill>
                   <a:srgbClr val="1C1C1A"/>
                 </a:solidFill>
@@ -19287,7 +19431,7 @@
           <a:noFill/>
         </p:spPr>
         <p:txBody>
-          <a:bodyPr wrap="square" anchor="t">
+          <a:bodyPr wrap="square" anchor="t" lIns="0" rIns="0" tIns="0" bIns="0">
             <a:spAutoFit/>
           </a:bodyPr>
           <a:lstStyle/>
@@ -19321,7 +19465,7 @@
           <a:noFill/>
         </p:spPr>
         <p:txBody>
-          <a:bodyPr wrap="square" anchor="t">
+          <a:bodyPr wrap="square" anchor="t" lIns="0" rIns="0" tIns="0" bIns="0">
             <a:spAutoFit/>
           </a:bodyPr>
           <a:lstStyle/>
@@ -19524,7 +19668,7 @@
           <a:noFill/>
         </p:spPr>
         <p:txBody>
-          <a:bodyPr wrap="square" anchor="ctr">
+          <a:bodyPr wrap="square" anchor="ctr" lIns="0" rIns="0" tIns="0" bIns="0">
             <a:spAutoFit/>
           </a:bodyPr>
           <a:lstStyle/>
@@ -19594,7 +19738,7 @@
         <p:spPr>
           <a:xfrm>
             <a:off x="685800" y="1627632"/>
-            <a:ext cx="10820095" cy="564896"/>
+            <a:ext cx="10820095" cy="478536"/>
           </a:xfrm>
           <a:prstGeom prst="rect">
             <a:avLst/>
@@ -19602,18 +19746,18 @@
           <a:noFill/>
         </p:spPr>
         <p:txBody>
-          <a:bodyPr wrap="square" anchor="t">
+          <a:bodyPr wrap="square" anchor="t" lIns="0" rIns="0" tIns="0" bIns="0">
             <a:spAutoFit/>
           </a:bodyPr>
           <a:lstStyle/>
           <a:p>
             <a:pPr>
               <a:spcAft>
-                <a:spcPts val="900"/>
+                <a:spcPts val="700"/>
               </a:spcAft>
             </a:pPr>
             <a:r>
-              <a:rPr sz="2000" b="0">
+              <a:rPr sz="1500" b="0">
                 <a:solidFill>
                   <a:srgbClr val="1C1C1A"/>
                 </a:solidFill>
@@ -19633,8 +19777,8 @@
           <p:nvPr/>
         </p:nvGraphicFramePr>
         <p:xfrm>
-          <a:off x="685800" y="2320544"/>
-          <a:ext cx="10820095" cy="3230880"/>
+          <a:off x="685800" y="2234184"/>
+          <a:ext cx="10820094" cy="2350008"/>
         </p:xfrm>
         <a:graphic>
           <a:graphicData uri="http://schemas.openxmlformats.org/drawingml/2006/table">
@@ -19643,18 +19787,18 @@
                 <a:tableStyleId>{2D5ABB26-0587-4C30-8999-92F81FD0307C}</a:tableStyleId>
               </a:tblPr>
               <a:tblGrid>
-                <a:gridCol w="3606698"/>
-                <a:gridCol w="3606698"/>
-                <a:gridCol w="3606699"/>
+                <a:gridCol w="1748576"/>
+                <a:gridCol w="4703662"/>
+                <a:gridCol w="4367856"/>
               </a:tblGrid>
-              <a:tr h="646176">
+              <a:tr h="318008">
                 <a:tc>
                   <a:txBody>
                     <a:bodyPr/>
                     <a:lstStyle/>
                     <a:p>
                       <a:r>
-                        <a:rPr sz="1600" b="1">
+                        <a:rPr sz="1200" b="1">
                           <a:solidFill>
                             <a:srgbClr val="FFFFFF"/>
                           </a:solidFill>
@@ -19676,7 +19820,7 @@
                     <a:lstStyle/>
                     <a:p>
                       <a:r>
-                        <a:rPr sz="1600" b="1">
+                        <a:rPr sz="1200" b="1">
                           <a:solidFill>
                             <a:srgbClr val="FFFFFF"/>
                           </a:solidFill>
@@ -19698,7 +19842,7 @@
                     <a:lstStyle/>
                     <a:p>
                       <a:r>
-                        <a:rPr sz="1600" b="1">
+                        <a:rPr sz="1200" b="1">
                           <a:solidFill>
                             <a:srgbClr val="FFFFFF"/>
                           </a:solidFill>
@@ -19715,14 +19859,14 @@
                   </a:tcPr>
                 </a:tc>
               </a:tr>
-              <a:tr h="646176">
+              <a:tr h="508000">
                 <a:tc>
                   <a:txBody>
                     <a:bodyPr/>
                     <a:lstStyle/>
                     <a:p>
                       <a:r>
-                        <a:rPr sz="1500" b="0">
+                        <a:rPr sz="1100" b="0">
                           <a:solidFill>
                             <a:srgbClr val="1C1C1A"/>
                           </a:solidFill>
@@ -19744,7 +19888,7 @@
                     <a:lstStyle/>
                     <a:p>
                       <a:r>
-                        <a:rPr sz="1500" b="0">
+                        <a:rPr sz="1100" b="0">
                           <a:solidFill>
                             <a:srgbClr val="1C1C1A"/>
                           </a:solidFill>
@@ -19766,7 +19910,7 @@
                     <a:lstStyle/>
                     <a:p>
                       <a:r>
-                        <a:rPr sz="1500" b="0">
+                        <a:rPr sz="1100" b="0">
                           <a:solidFill>
                             <a:srgbClr val="1C1C1A"/>
                           </a:solidFill>
@@ -19783,14 +19927,14 @@
                   </a:tcPr>
                 </a:tc>
               </a:tr>
-              <a:tr h="646176">
+              <a:tr h="508000">
                 <a:tc>
                   <a:txBody>
                     <a:bodyPr/>
                     <a:lstStyle/>
                     <a:p>
                       <a:r>
-                        <a:rPr sz="1500" b="0">
+                        <a:rPr sz="1100" b="0">
                           <a:solidFill>
                             <a:srgbClr val="1C1C1A"/>
                           </a:solidFill>
@@ -19812,7 +19956,7 @@
                     <a:lstStyle/>
                     <a:p>
                       <a:r>
-                        <a:rPr sz="1500" b="0">
+                        <a:rPr sz="1100" b="0">
                           <a:solidFill>
                             <a:srgbClr val="1C1C1A"/>
                           </a:solidFill>
@@ -19834,7 +19978,7 @@
                     <a:lstStyle/>
                     <a:p>
                       <a:r>
-                        <a:rPr sz="1500" b="0">
+                        <a:rPr sz="1100" b="0">
                           <a:solidFill>
                             <a:srgbClr val="1C1C1A"/>
                           </a:solidFill>
@@ -19851,14 +19995,14 @@
                   </a:tcPr>
                 </a:tc>
               </a:tr>
-              <a:tr h="646176">
+              <a:tr h="508000">
                 <a:tc>
                   <a:txBody>
                     <a:bodyPr/>
                     <a:lstStyle/>
                     <a:p>
                       <a:r>
-                        <a:rPr sz="1500" b="0">
+                        <a:rPr sz="1100" b="0">
                           <a:solidFill>
                             <a:srgbClr val="1C1C1A"/>
                           </a:solidFill>
@@ -19880,7 +20024,7 @@
                     <a:lstStyle/>
                     <a:p>
                       <a:r>
-                        <a:rPr sz="1500" b="0">
+                        <a:rPr sz="1100" b="0">
                           <a:solidFill>
                             <a:srgbClr val="1C1C1A"/>
                           </a:solidFill>
@@ -19902,7 +20046,7 @@
                     <a:lstStyle/>
                     <a:p>
                       <a:r>
-                        <a:rPr sz="1500" b="0">
+                        <a:rPr sz="1100" b="0">
                           <a:solidFill>
                             <a:srgbClr val="1C1C1A"/>
                           </a:solidFill>
@@ -19919,14 +20063,14 @@
                   </a:tcPr>
                 </a:tc>
               </a:tr>
-              <a:tr h="646176">
+              <a:tr h="508000">
                 <a:tc>
                   <a:txBody>
                     <a:bodyPr/>
                     <a:lstStyle/>
                     <a:p>
                       <a:r>
-                        <a:rPr sz="1500" b="0">
+                        <a:rPr sz="1100" b="0">
                           <a:solidFill>
                             <a:srgbClr val="1C1C1A"/>
                           </a:solidFill>
@@ -19948,7 +20092,7 @@
                     <a:lstStyle/>
                     <a:p>
                       <a:r>
-                        <a:rPr sz="1500" b="0">
+                        <a:rPr sz="1100" b="0">
                           <a:solidFill>
                             <a:srgbClr val="1C1C1A"/>
                           </a:solidFill>
@@ -19970,7 +20114,7 @@
                     <a:lstStyle/>
                     <a:p>
                       <a:r>
-                        <a:rPr sz="1500" b="0">
+                        <a:rPr sz="1100" b="0">
                           <a:solidFill>
                             <a:srgbClr val="1C1C1A"/>
                           </a:solidFill>
@@ -19993,7 +20137,46 @@
       </p:graphicFrame>
       <p:sp>
         <p:nvSpPr>
-          <p:cNvPr id="9" name="Rectangle 8"/>
+          <p:cNvPr id="9" name="TextBox 8"/>
+          <p:cNvSpPr txBox="1"/>
+          <p:nvPr/>
+        </p:nvSpPr>
+        <p:spPr>
+          <a:xfrm>
+            <a:off x="685800" y="4840224"/>
+            <a:ext cx="10820095" cy="737616"/>
+          </a:xfrm>
+          <a:prstGeom prst="rect">
+            <a:avLst/>
+          </a:prstGeom>
+          <a:noFill/>
+        </p:spPr>
+        <p:txBody>
+          <a:bodyPr wrap="square" anchor="t" lIns="0" rIns="0" tIns="0" bIns="0">
+            <a:spAutoFit/>
+          </a:bodyPr>
+          <a:lstStyle/>
+          <a:p>
+            <a:pPr>
+              <a:spcAft>
+                <a:spcPts val="700"/>
+              </a:spcAft>
+            </a:pPr>
+            <a:r>
+              <a:rPr sz="1500" b="0">
+                <a:solidFill>
+                  <a:srgbClr val="1C1C1A"/>
+                </a:solidFill>
+                <a:latin typeface="Calibri"/>
+              </a:rPr>
+              <a:t>The test never tells you the answer. It tells you whether to go and look, which is all a two second test should ever do.</a:t>
+            </a:r>
+          </a:p>
+        </p:txBody>
+      </p:sp>
+      <p:sp>
+        <p:nvSpPr>
+          <p:cNvPr id="10" name="Rectangle 9"/>
           <p:cNvSpPr/>
           <p:nvPr/>
         </p:nvSpPr>
@@ -20037,7 +20220,7 @@
       </p:sp>
       <p:sp>
         <p:nvSpPr>
-          <p:cNvPr id="10" name="TextBox 9"/>
+          <p:cNvPr id="11" name="TextBox 10"/>
           <p:cNvSpPr txBox="1"/>
           <p:nvPr/>
         </p:nvSpPr>
@@ -20052,7 +20235,7 @@
           <a:noFill/>
         </p:spPr>
         <p:txBody>
-          <a:bodyPr wrap="square" anchor="t">
+          <a:bodyPr wrap="square" anchor="t" lIns="0" rIns="0" tIns="0" bIns="0">
             <a:spAutoFit/>
           </a:bodyPr>
           <a:lstStyle/>
@@ -20071,7 +20254,7 @@
       </p:sp>
       <p:sp>
         <p:nvSpPr>
-          <p:cNvPr id="11" name="TextBox 10"/>
+          <p:cNvPr id="12" name="TextBox 11"/>
           <p:cNvSpPr txBox="1"/>
           <p:nvPr/>
         </p:nvSpPr>
@@ -20086,7 +20269,7 @@
           <a:noFill/>
         </p:spPr>
         <p:txBody>
-          <a:bodyPr wrap="square" anchor="t">
+          <a:bodyPr wrap="square" anchor="t" lIns="0" rIns="0" tIns="0" bIns="0">
             <a:spAutoFit/>
           </a:bodyPr>
           <a:lstStyle/>
@@ -20236,7 +20419,7 @@
           <a:noFill/>
         </p:spPr>
         <p:txBody>
-          <a:bodyPr wrap="square" anchor="ctr">
+          <a:bodyPr wrap="square" anchor="ctr" lIns="0" rIns="0" tIns="0" bIns="0">
             <a:spAutoFit/>
           </a:bodyPr>
           <a:lstStyle/>
@@ -20299,7 +20482,7 @@
       </p:sp>
       <p:pic>
         <p:nvPicPr>
-          <p:cNvPr id="6" name="Picture 5" descr="ac6408c8f700cf7a.png"/>
+          <p:cNvPr id="6" name="Picture 5" descr="3f214400bbd6d9a2.png"/>
           <p:cNvPicPr>
             <a:picLocks noChangeAspect="1"/>
           </p:cNvPicPr>
@@ -20331,7 +20514,7 @@
         </p:nvGraphicFramePr>
         <p:xfrm>
           <a:off x="5771244" y="1627632"/>
-          <a:ext cx="5734650" cy="3230880"/>
+          <a:ext cx="5734649" cy="3058160"/>
         </p:xfrm>
         <a:graphic>
           <a:graphicData uri="http://schemas.openxmlformats.org/drawingml/2006/table">
@@ -20340,18 +20523,18 @@
                 <a:tableStyleId>{2D5ABB26-0587-4C30-8999-92F81FD0307C}</a:tableStyleId>
               </a:tblPr>
               <a:tblGrid>
-                <a:gridCol w="1911550"/>
-                <a:gridCol w="1911550"/>
-                <a:gridCol w="1911550"/>
+                <a:gridCol w="2071005"/>
+                <a:gridCol w="2009834"/>
+                <a:gridCol w="1653810"/>
               </a:tblGrid>
-              <a:tr h="646176">
+              <a:tr h="611632">
                 <a:tc>
                   <a:txBody>
                     <a:bodyPr/>
                     <a:lstStyle/>
                     <a:p>
                       <a:r>
-                        <a:rPr sz="1600" b="1">
+                        <a:rPr sz="1500" b="1">
                           <a:solidFill>
                             <a:srgbClr val="FFFFFF"/>
                           </a:solidFill>
@@ -20373,7 +20556,7 @@
                     <a:lstStyle/>
                     <a:p>
                       <a:r>
-                        <a:rPr sz="1600" b="1">
+                        <a:rPr sz="1500" b="1">
                           <a:solidFill>
                             <a:srgbClr val="FFFFFF"/>
                           </a:solidFill>
@@ -20395,7 +20578,7 @@
                     <a:lstStyle/>
                     <a:p>
                       <a:r>
-                        <a:rPr sz="1600" b="1">
+                        <a:rPr sz="1500" b="1">
                           <a:solidFill>
                             <a:srgbClr val="FFFFFF"/>
                           </a:solidFill>
@@ -20412,14 +20595,14 @@
                   </a:tcPr>
                 </a:tc>
               </a:tr>
-              <a:tr h="646176">
+              <a:tr h="611632">
                 <a:tc>
                   <a:txBody>
                     <a:bodyPr/>
                     <a:lstStyle/>
                     <a:p>
                       <a:r>
-                        <a:rPr sz="1500" b="0">
+                        <a:rPr sz="1400" b="0">
                           <a:solidFill>
                             <a:srgbClr val="1C1C1A"/>
                           </a:solidFill>
@@ -20441,7 +20624,7 @@
                     <a:lstStyle/>
                     <a:p>
                       <a:r>
-                        <a:rPr sz="1500" b="0">
+                        <a:rPr sz="1400" b="0">
                           <a:solidFill>
                             <a:srgbClr val="1C1C1A"/>
                           </a:solidFill>
@@ -20463,7 +20646,7 @@
                     <a:lstStyle/>
                     <a:p>
                       <a:r>
-                        <a:rPr sz="1500" b="0">
+                        <a:rPr sz="1400" b="0">
                           <a:solidFill>
                             <a:srgbClr val="1C1C1A"/>
                           </a:solidFill>
@@ -20480,14 +20663,14 @@
                   </a:tcPr>
                 </a:tc>
               </a:tr>
-              <a:tr h="646176">
+              <a:tr h="611632">
                 <a:tc>
                   <a:txBody>
                     <a:bodyPr/>
                     <a:lstStyle/>
                     <a:p>
                       <a:r>
-                        <a:rPr sz="1500" b="0">
+                        <a:rPr sz="1400" b="0">
                           <a:solidFill>
                             <a:srgbClr val="1C1C1A"/>
                           </a:solidFill>
@@ -20509,7 +20692,7 @@
                     <a:lstStyle/>
                     <a:p>
                       <a:r>
-                        <a:rPr sz="1500" b="0">
+                        <a:rPr sz="1400" b="0">
                           <a:solidFill>
                             <a:srgbClr val="1C1C1A"/>
                           </a:solidFill>
@@ -20531,7 +20714,7 @@
                     <a:lstStyle/>
                     <a:p>
                       <a:r>
-                        <a:rPr sz="1500" b="0">
+                        <a:rPr sz="1400" b="0">
                           <a:solidFill>
                             <a:srgbClr val="1C1C1A"/>
                           </a:solidFill>
@@ -20548,14 +20731,14 @@
                   </a:tcPr>
                 </a:tc>
               </a:tr>
-              <a:tr h="646176">
+              <a:tr h="611632">
                 <a:tc>
                   <a:txBody>
                     <a:bodyPr/>
                     <a:lstStyle/>
                     <a:p>
                       <a:r>
-                        <a:rPr sz="1500" b="0">
+                        <a:rPr sz="1400" b="0">
                           <a:solidFill>
                             <a:srgbClr val="1C1C1A"/>
                           </a:solidFill>
@@ -20577,7 +20760,7 @@
                     <a:lstStyle/>
                     <a:p>
                       <a:r>
-                        <a:rPr sz="1500" b="0">
+                        <a:rPr sz="1400" b="0">
                           <a:solidFill>
                             <a:srgbClr val="1C1C1A"/>
                           </a:solidFill>
@@ -20599,7 +20782,7 @@
                     <a:lstStyle/>
                     <a:p>
                       <a:r>
-                        <a:rPr sz="1500" b="0">
+                        <a:rPr sz="1400" b="0">
                           <a:solidFill>
                             <a:srgbClr val="1C1C1A"/>
                           </a:solidFill>
@@ -20616,14 +20799,14 @@
                   </a:tcPr>
                 </a:tc>
               </a:tr>
-              <a:tr h="646176">
+              <a:tr h="611632">
                 <a:tc>
                   <a:txBody>
                     <a:bodyPr/>
                     <a:lstStyle/>
                     <a:p>
                       <a:r>
-                        <a:rPr sz="1500" b="0">
+                        <a:rPr sz="1400" b="0">
                           <a:solidFill>
                             <a:srgbClr val="1C1C1A"/>
                           </a:solidFill>
@@ -20645,7 +20828,7 @@
                     <a:lstStyle/>
                     <a:p>
                       <a:r>
-                        <a:rPr sz="1500" b="0">
+                        <a:rPr sz="1400" b="0">
                           <a:solidFill>
                             <a:srgbClr val="1C1C1A"/>
                           </a:solidFill>
@@ -20667,7 +20850,7 @@
                     <a:lstStyle/>
                     <a:p>
                       <a:r>
-                        <a:rPr sz="1500" b="0">
+                        <a:rPr sz="1400" b="0">
                           <a:solidFill>
                             <a:srgbClr val="1C1C1A"/>
                           </a:solidFill>
@@ -20696,7 +20879,7 @@
         </p:nvSpPr>
         <p:spPr>
           <a:xfrm>
-            <a:off x="5771244" y="5114544"/>
+            <a:off x="5771244" y="4941824"/>
             <a:ext cx="5734650" cy="910336"/>
           </a:xfrm>
           <a:prstGeom prst="rect">
@@ -20705,7 +20888,7 @@
           <a:noFill/>
         </p:spPr>
         <p:txBody>
-          <a:bodyPr wrap="square" anchor="t">
+          <a:bodyPr wrap="square" anchor="t" lIns="0" rIns="0" tIns="0" bIns="0">
             <a:spAutoFit/>
           </a:bodyPr>
           <a:lstStyle/>
@@ -20788,7 +20971,7 @@
           <a:noFill/>
         </p:spPr>
         <p:txBody>
-          <a:bodyPr wrap="square" anchor="t">
+          <a:bodyPr wrap="square" anchor="t" lIns="0" rIns="0" tIns="0" bIns="0">
             <a:spAutoFit/>
           </a:bodyPr>
           <a:lstStyle/>
@@ -20822,7 +21005,7 @@
           <a:noFill/>
         </p:spPr>
         <p:txBody>
-          <a:bodyPr wrap="square" anchor="t">
+          <a:bodyPr wrap="square" anchor="t" lIns="0" rIns="0" tIns="0" bIns="0">
             <a:spAutoFit/>
           </a:bodyPr>
           <a:lstStyle/>
@@ -20972,7 +21155,7 @@
           <a:noFill/>
         </p:spPr>
         <p:txBody>
-          <a:bodyPr wrap="square" anchor="ctr">
+          <a:bodyPr wrap="square" anchor="ctr" lIns="0" rIns="0" tIns="0" bIns="0">
             <a:spAutoFit/>
           </a:bodyPr>
           <a:lstStyle/>
@@ -21050,7 +21233,7 @@
           <a:noFill/>
         </p:spPr>
         <p:txBody>
-          <a:bodyPr wrap="square" anchor="t">
+          <a:bodyPr wrap="square" anchor="t" lIns="0" rIns="0" tIns="0" bIns="0">
             <a:spAutoFit/>
           </a:bodyPr>
           <a:lstStyle/>
@@ -21133,7 +21316,7 @@
           <a:noFill/>
         </p:spPr>
         <p:txBody>
-          <a:bodyPr wrap="square" anchor="t">
+          <a:bodyPr wrap="square" anchor="t" lIns="0" rIns="0" tIns="0" bIns="0">
             <a:spAutoFit/>
           </a:bodyPr>
           <a:lstStyle/>
@@ -21167,7 +21350,7 @@
           <a:noFill/>
         </p:spPr>
         <p:txBody>
-          <a:bodyPr wrap="square" anchor="t">
+          <a:bodyPr wrap="square" anchor="t" lIns="0" rIns="0" tIns="0" bIns="0">
             <a:spAutoFit/>
           </a:bodyPr>
           <a:lstStyle/>
@@ -21250,7 +21433,7 @@
           <a:noFill/>
         </p:spPr>
         <p:txBody>
-          <a:bodyPr wrap="square" anchor="t">
+          <a:bodyPr wrap="square" anchor="t" lIns="0" rIns="0" tIns="0" bIns="0">
             <a:spAutoFit/>
           </a:bodyPr>
           <a:lstStyle/>
@@ -21284,7 +21467,7 @@
           <a:noFill/>
         </p:spPr>
         <p:txBody>
-          <a:bodyPr wrap="square" anchor="t">
+          <a:bodyPr wrap="square" anchor="t" lIns="0" rIns="0" tIns="0" bIns="0">
             <a:spAutoFit/>
           </a:bodyPr>
           <a:lstStyle/>
@@ -21434,7 +21617,7 @@
           <a:noFill/>
         </p:spPr>
         <p:txBody>
-          <a:bodyPr wrap="square" anchor="ctr">
+          <a:bodyPr wrap="square" anchor="ctr" lIns="0" rIns="0" tIns="0" bIns="0">
             <a:spAutoFit/>
           </a:bodyPr>
           <a:lstStyle/>
@@ -21512,7 +21695,7 @@
           <a:noFill/>
         </p:spPr>
         <p:txBody>
-          <a:bodyPr wrap="square" anchor="t">
+          <a:bodyPr wrap="square" anchor="t" lIns="0" rIns="0" tIns="0" bIns="0">
             <a:spAutoFit/>
           </a:bodyPr>
           <a:lstStyle/>
@@ -21611,7 +21794,7 @@
           <a:noFill/>
         </p:spPr>
         <p:txBody>
-          <a:bodyPr wrap="square" anchor="t">
+          <a:bodyPr wrap="square" anchor="t" lIns="0" rIns="0" tIns="0" bIns="0">
             <a:spAutoFit/>
           </a:bodyPr>
           <a:lstStyle/>
@@ -21645,7 +21828,7 @@
           <a:noFill/>
         </p:spPr>
         <p:txBody>
-          <a:bodyPr wrap="square" anchor="t">
+          <a:bodyPr wrap="square" anchor="t" lIns="0" rIns="0" tIns="0" bIns="0">
             <a:spAutoFit/>
           </a:bodyPr>
           <a:lstStyle/>
@@ -21742,7 +21925,7 @@
           <a:noFill/>
         </p:spPr>
         <p:txBody>
-          <a:bodyPr wrap="square" anchor="ctr">
+          <a:bodyPr wrap="square" anchor="ctr" lIns="0" rIns="0" tIns="0" bIns="0">
             <a:spAutoFit/>
           </a:bodyPr>
           <a:lstStyle/>
@@ -22086,7 +22269,7 @@
           <a:noFill/>
         </p:spPr>
         <p:txBody>
-          <a:bodyPr wrap="square" anchor="t">
+          <a:bodyPr wrap="square" anchor="t" lIns="0" rIns="0" tIns="0" bIns="0">
             <a:spAutoFit/>
           </a:bodyPr>
           <a:lstStyle/>
@@ -22120,7 +22303,7 @@
           <a:noFill/>
         </p:spPr>
         <p:txBody>
-          <a:bodyPr wrap="square" anchor="t">
+          <a:bodyPr wrap="square" anchor="t" lIns="0" rIns="0" tIns="0" bIns="0">
             <a:spAutoFit/>
           </a:bodyPr>
           <a:lstStyle/>
@@ -22270,7 +22453,7 @@
           <a:noFill/>
         </p:spPr>
         <p:txBody>
-          <a:bodyPr wrap="square" anchor="ctr">
+          <a:bodyPr wrap="square" anchor="ctr" lIns="0" rIns="0" tIns="0" bIns="0">
             <a:spAutoFit/>
           </a:bodyPr>
           <a:lstStyle/>
@@ -22348,7 +22531,7 @@
           <a:noFill/>
         </p:spPr>
         <p:txBody>
-          <a:bodyPr wrap="square" anchor="t">
+          <a:bodyPr wrap="square" anchor="t" lIns="0" rIns="0" tIns="0" bIns="0">
             <a:spAutoFit/>
           </a:bodyPr>
           <a:lstStyle/>
@@ -22431,7 +22614,7 @@
           <a:noFill/>
         </p:spPr>
         <p:txBody>
-          <a:bodyPr wrap="square" anchor="t">
+          <a:bodyPr wrap="square" anchor="t" lIns="0" rIns="0" tIns="0" bIns="0">
             <a:spAutoFit/>
           </a:bodyPr>
           <a:lstStyle/>
@@ -22465,7 +22648,7 @@
           <a:noFill/>
         </p:spPr>
         <p:txBody>
-          <a:bodyPr wrap="square" anchor="t">
+          <a:bodyPr wrap="square" anchor="t" lIns="0" rIns="0" tIns="0" bIns="0">
             <a:spAutoFit/>
           </a:bodyPr>
           <a:lstStyle/>
@@ -22615,7 +22798,7 @@
           <a:noFill/>
         </p:spPr>
         <p:txBody>
-          <a:bodyPr wrap="square" anchor="ctr">
+          <a:bodyPr wrap="square" anchor="ctr" lIns="0" rIns="0" tIns="0" bIns="0">
             <a:spAutoFit/>
           </a:bodyPr>
           <a:lstStyle/>
@@ -22693,7 +22876,7 @@
           <a:noFill/>
         </p:spPr>
         <p:txBody>
-          <a:bodyPr wrap="square" anchor="t">
+          <a:bodyPr wrap="square" anchor="t" lIns="0" rIns="0" tIns="0" bIns="0">
             <a:spAutoFit/>
           </a:bodyPr>
           <a:lstStyle/>
@@ -22840,7 +23023,7 @@
           <a:noFill/>
         </p:spPr>
         <p:txBody>
-          <a:bodyPr wrap="square" anchor="t">
+          <a:bodyPr wrap="square" anchor="t" lIns="0" rIns="0" tIns="0" bIns="0">
             <a:spAutoFit/>
           </a:bodyPr>
           <a:lstStyle/>
@@ -22874,7 +23057,7 @@
           <a:noFill/>
         </p:spPr>
         <p:txBody>
-          <a:bodyPr wrap="square" anchor="t">
+          <a:bodyPr wrap="square" anchor="t" lIns="0" rIns="0" tIns="0" bIns="0">
             <a:spAutoFit/>
           </a:bodyPr>
           <a:lstStyle/>
@@ -23024,7 +23207,7 @@
           <a:noFill/>
         </p:spPr>
         <p:txBody>
-          <a:bodyPr wrap="square" anchor="ctr">
+          <a:bodyPr wrap="square" anchor="ctr" lIns="0" rIns="0" tIns="0" bIns="0">
             <a:spAutoFit/>
           </a:bodyPr>
           <a:lstStyle/>
@@ -23085,40 +23268,16 @@
           </a:p>
         </p:txBody>
       </p:sp>
-      <p:pic>
-        <p:nvPicPr>
-          <p:cNvPr id="6" name="Picture 5" descr="ac6408c8f700cf7a.png"/>
-          <p:cNvPicPr>
-            <a:picLocks noChangeAspect="1"/>
-          </p:cNvPicPr>
-          <p:nvPr/>
-        </p:nvPicPr>
-        <p:blipFill>
-          <a:blip r:embed="rId2"/>
-          <a:stretch>
-            <a:fillRect/>
-          </a:stretch>
-        </p:blipFill>
-        <p:spPr>
-          <a:xfrm>
-            <a:off x="685800" y="2028686"/>
-            <a:ext cx="4652640" cy="3623586"/>
-          </a:xfrm>
-          <a:prstGeom prst="rect">
-            <a:avLst/>
-          </a:prstGeom>
-        </p:spPr>
-      </p:pic>
-      <p:sp>
-        <p:nvSpPr>
-          <p:cNvPr id="7" name="Rectangle 6"/>
+      <p:sp>
+        <p:nvSpPr>
+          <p:cNvPr id="6" name="Rectangle 5"/>
           <p:cNvSpPr/>
           <p:nvPr/>
         </p:nvSpPr>
         <p:spPr>
           <a:xfrm>
-            <a:off x="5771244" y="1627632"/>
-            <a:ext cx="5734650" cy="1310640"/>
+            <a:off x="685800" y="1627632"/>
+            <a:ext cx="5135727" cy="941070"/>
           </a:xfrm>
           <a:prstGeom prst="rect">
             <a:avLst/>
@@ -23155,14 +23314,14 @@
       </p:sp>
       <p:sp>
         <p:nvSpPr>
-          <p:cNvPr id="8" name="Rectangle 7"/>
+          <p:cNvPr id="7" name="Rectangle 6"/>
           <p:cNvSpPr/>
           <p:nvPr/>
         </p:nvSpPr>
         <p:spPr>
           <a:xfrm>
-            <a:off x="5771244" y="1627632"/>
-            <a:ext cx="50292" cy="1310640"/>
+            <a:off x="685800" y="1627632"/>
+            <a:ext cx="50292" cy="941070"/>
           </a:xfrm>
           <a:prstGeom prst="rect">
             <a:avLst/>
@@ -23199,14 +23358,14 @@
       </p:sp>
       <p:sp>
         <p:nvSpPr>
-          <p:cNvPr id="9" name="TextBox 8"/>
+          <p:cNvPr id="8" name="TextBox 7"/>
           <p:cNvSpPr txBox="1"/>
           <p:nvPr/>
         </p:nvSpPr>
         <p:spPr>
           <a:xfrm>
-            <a:off x="6027276" y="1719072"/>
-            <a:ext cx="5277450" cy="1164336"/>
+            <a:off x="941832" y="1719072"/>
+            <a:ext cx="4678527" cy="794766"/>
           </a:xfrm>
           <a:prstGeom prst="rect">
             <a:avLst/>
@@ -23214,13 +23373,13 @@
           <a:noFill/>
         </p:spPr>
         <p:txBody>
-          <a:bodyPr wrap="square" anchor="ctr">
+          <a:bodyPr wrap="square" anchor="ctr" lIns="0" rIns="0" tIns="0" bIns="0">
             <a:spAutoFit/>
           </a:bodyPr>
           <a:lstStyle/>
           <a:p>
             <a:r>
-              <a:rPr sz="2000" b="1">
+              <a:rPr sz="1300" b="1">
                 <a:solidFill>
                   <a:srgbClr val="2B4A7D"/>
                 </a:solidFill>
@@ -23229,7 +23388,7 @@
               <a:t>The claim. </a:t>
             </a:r>
             <a:r>
-              <a:rPr sz="2000" b="0">
+              <a:rPr sz="1300" b="0">
                 <a:solidFill>
                   <a:srgbClr val="1C1C1A"/>
                 </a:solidFill>
@@ -23242,15 +23401,15 @@
       </p:sp>
       <p:graphicFrame>
         <p:nvGraphicFramePr>
-          <p:cNvPr id="10" name="Table 9"/>
+          <p:cNvPr id="9" name="Table 8"/>
           <p:cNvGraphicFramePr>
             <a:graphicFrameLocks noGrp="1"/>
           </p:cNvGraphicFramePr>
           <p:nvPr/>
         </p:nvGraphicFramePr>
         <p:xfrm>
-          <a:off x="5771244" y="3102864"/>
-          <a:ext cx="5734650" cy="2843784"/>
+          <a:off x="685800" y="2733294"/>
+          <a:ext cx="5135726" cy="1499616"/>
         </p:xfrm>
         <a:graphic>
           <a:graphicData uri="http://schemas.openxmlformats.org/drawingml/2006/table">
@@ -23259,17 +23418,17 @@
                 <a:tableStyleId>{2D5ABB26-0587-4C30-8999-92F81FD0307C}</a:tableStyleId>
               </a:tblPr>
               <a:tblGrid>
-                <a:gridCol w="2867325"/>
-                <a:gridCol w="2867325"/>
+                <a:gridCol w="2068027"/>
+                <a:gridCol w="3067699"/>
               </a:tblGrid>
-              <a:tr h="387096">
+              <a:tr h="310896">
                 <a:tc>
                   <a:txBody>
                     <a:bodyPr/>
                     <a:lstStyle/>
                     <a:p>
                       <a:r>
-                        <a:rPr sz="1600" b="1">
+                        <a:rPr sz="1000" b="1">
                           <a:solidFill>
                             <a:srgbClr val="FFFFFF"/>
                           </a:solidFill>
@@ -23291,7 +23450,7 @@
                     <a:lstStyle/>
                     <a:p>
                       <a:r>
-                        <a:rPr sz="1600" b="1">
+                        <a:rPr sz="1000" b="1">
                           <a:solidFill>
                             <a:srgbClr val="FFFFFF"/>
                           </a:solidFill>
@@ -23308,14 +23467,14 @@
                   </a:tcPr>
                 </a:tc>
               </a:tr>
-              <a:tr h="905256">
+              <a:tr h="438912">
                 <a:tc>
                   <a:txBody>
                     <a:bodyPr/>
                     <a:lstStyle/>
                     <a:p>
                       <a:r>
-                        <a:rPr sz="1500" b="0">
+                        <a:rPr sz="900" b="0">
                           <a:solidFill>
                             <a:srgbClr val="1C1C1A"/>
                           </a:solidFill>
@@ -23337,7 +23496,7 @@
                     <a:lstStyle/>
                     <a:p>
                       <a:r>
-                        <a:rPr sz="1500" b="0">
+                        <a:rPr sz="900" b="0">
                           <a:solidFill>
                             <a:srgbClr val="1C1C1A"/>
                           </a:solidFill>
@@ -23354,14 +23513,14 @@
                   </a:tcPr>
                 </a:tc>
               </a:tr>
-              <a:tr h="646176">
+              <a:tr h="310896">
                 <a:tc>
                   <a:txBody>
                     <a:bodyPr/>
                     <a:lstStyle/>
                     <a:p>
                       <a:r>
-                        <a:rPr sz="1500" b="0">
+                        <a:rPr sz="900" b="0">
                           <a:solidFill>
                             <a:srgbClr val="1C1C1A"/>
                           </a:solidFill>
@@ -23383,7 +23542,7 @@
                     <a:lstStyle/>
                     <a:p>
                       <a:r>
-                        <a:rPr sz="1500" b="0">
+                        <a:rPr sz="900" b="0">
                           <a:solidFill>
                             <a:srgbClr val="1C1C1A"/>
                           </a:solidFill>
@@ -23400,14 +23559,14 @@
                   </a:tcPr>
                 </a:tc>
               </a:tr>
-              <a:tr h="905256">
+              <a:tr h="438912">
                 <a:tc>
                   <a:txBody>
                     <a:bodyPr/>
                     <a:lstStyle/>
                     <a:p>
                       <a:r>
-                        <a:rPr sz="1500" b="0">
+                        <a:rPr sz="900" b="0">
                           <a:solidFill>
                             <a:srgbClr val="1C1C1A"/>
                           </a:solidFill>
@@ -23429,7 +23588,7 @@
                     <a:lstStyle/>
                     <a:p>
                       <a:r>
-                        <a:rPr sz="1500" b="0">
+                        <a:rPr sz="900" b="0">
                           <a:solidFill>
                             <a:srgbClr val="1C1C1A"/>
                           </a:solidFill>
@@ -23452,7 +23611,201 @@
       </p:graphicFrame>
       <p:sp>
         <p:nvSpPr>
+          <p:cNvPr id="10" name="TextBox 9"/>
+          <p:cNvSpPr txBox="1"/>
+          <p:nvPr/>
+        </p:nvSpPr>
+        <p:spPr>
+          <a:xfrm>
+            <a:off x="6370167" y="1627632"/>
+            <a:ext cx="5135727" cy="668528"/>
+          </a:xfrm>
+          <a:prstGeom prst="rect">
+            <a:avLst/>
+          </a:prstGeom>
+          <a:noFill/>
+        </p:spPr>
+        <p:txBody>
+          <a:bodyPr wrap="square" anchor="t" lIns="0" rIns="0" tIns="0" bIns="0">
+            <a:spAutoFit/>
+          </a:bodyPr>
+          <a:lstStyle/>
+          <a:p>
+            <a:pPr>
+              <a:spcAft>
+                <a:spcPts val="600"/>
+              </a:spcAft>
+            </a:pPr>
+            <a:r>
+              <a:rPr sz="1300" b="0">
+                <a:solidFill>
+                  <a:srgbClr val="1C1C1A"/>
+                </a:solidFill>
+                <a:latin typeface="Calibri"/>
+              </a:rPr>
+              <a:t>Say Rs 1,910, then say the mean is Rs 12,753 because KR4232 is 86 percent of the money in the file.</a:t>
+            </a:r>
+          </a:p>
+        </p:txBody>
+      </p:sp>
+      <p:sp>
+        <p:nvSpPr>
           <p:cNvPr id="11" name="Rectangle 10"/>
+          <p:cNvSpPr/>
+          <p:nvPr/>
+        </p:nvSpPr>
+        <p:spPr>
+          <a:xfrm>
+            <a:off x="6370167" y="2424176"/>
+            <a:ext cx="5135727" cy="706628"/>
+          </a:xfrm>
+          <a:prstGeom prst="rect">
+            <a:avLst/>
+          </a:prstGeom>
+          <a:solidFill>
+            <a:srgbClr val="E4ECF7"/>
+          </a:solidFill>
+          <a:ln>
+            <a:noFill/>
+          </a:ln>
+          <a:effectLst/>
+        </p:spPr>
+        <p:style>
+          <a:lnRef idx="1">
+            <a:schemeClr val="accent1"/>
+          </a:lnRef>
+          <a:fillRef idx="3">
+            <a:schemeClr val="accent1"/>
+          </a:fillRef>
+          <a:effectRef idx="2">
+            <a:schemeClr val="accent1"/>
+          </a:effectRef>
+          <a:fontRef idx="minor">
+            <a:schemeClr val="lt1"/>
+          </a:fontRef>
+        </p:style>
+        <p:txBody>
+          <a:bodyPr rtlCol="0" anchor="ctr" wrap="square"/>
+          <a:lstStyle/>
+          <a:p>
+            <a:pPr algn="ctr"/>
+          </a:p>
+        </p:txBody>
+      </p:sp>
+      <p:sp>
+        <p:nvSpPr>
+          <p:cNvPr id="12" name="Rectangle 11"/>
+          <p:cNvSpPr/>
+          <p:nvPr/>
+        </p:nvSpPr>
+        <p:spPr>
+          <a:xfrm>
+            <a:off x="6370167" y="2424176"/>
+            <a:ext cx="50292" cy="706628"/>
+          </a:xfrm>
+          <a:prstGeom prst="rect">
+            <a:avLst/>
+          </a:prstGeom>
+          <a:solidFill>
+            <a:srgbClr val="2B4A7D"/>
+          </a:solidFill>
+          <a:ln>
+            <a:noFill/>
+          </a:ln>
+          <a:effectLst/>
+        </p:spPr>
+        <p:style>
+          <a:lnRef idx="1">
+            <a:schemeClr val="accent1"/>
+          </a:lnRef>
+          <a:fillRef idx="3">
+            <a:schemeClr val="accent1"/>
+          </a:fillRef>
+          <a:effectRef idx="2">
+            <a:schemeClr val="accent1"/>
+          </a:effectRef>
+          <a:fontRef idx="minor">
+            <a:schemeClr val="lt1"/>
+          </a:fontRef>
+        </p:style>
+        <p:txBody>
+          <a:bodyPr rtlCol="0" anchor="ctr" wrap="square"/>
+          <a:lstStyle/>
+          <a:p>
+            <a:pPr algn="ctr"/>
+          </a:p>
+        </p:txBody>
+      </p:sp>
+      <p:sp>
+        <p:nvSpPr>
+          <p:cNvPr id="13" name="TextBox 12"/>
+          <p:cNvSpPr txBox="1"/>
+          <p:nvPr/>
+        </p:nvSpPr>
+        <p:spPr>
+          <a:xfrm>
+            <a:off x="6626199" y="2515616"/>
+            <a:ext cx="4678527" cy="560324"/>
+          </a:xfrm>
+          <a:prstGeom prst="rect">
+            <a:avLst/>
+          </a:prstGeom>
+          <a:noFill/>
+        </p:spPr>
+        <p:txBody>
+          <a:bodyPr wrap="square" anchor="ctr" lIns="0" rIns="0" tIns="0" bIns="0">
+            <a:spAutoFit/>
+          </a:bodyPr>
+          <a:lstStyle/>
+          <a:p>
+            <a:r>
+              <a:rPr sz="1300" b="1">
+                <a:solidFill>
+                  <a:srgbClr val="2B4A7D"/>
+                </a:solidFill>
+                <a:latin typeface="Calibri"/>
+              </a:rPr>
+              <a:t>The mental model. </a:t>
+            </a:r>
+            <a:r>
+              <a:rPr sz="1300" b="0">
+                <a:solidFill>
+                  <a:srgbClr val="1C1C1A"/>
+                </a:solidFill>
+                <a:latin typeface="Calibri"/>
+              </a:rPr>
+              <a:t>Statistical agencies report median household income for exactly this reason.</a:t>
+            </a:r>
+          </a:p>
+        </p:txBody>
+      </p:sp>
+      <p:pic>
+        <p:nvPicPr>
+          <p:cNvPr id="14" name="Picture 13" descr="3f214400bbd6d9a2.png"/>
+          <p:cNvPicPr>
+            <a:picLocks noChangeAspect="1"/>
+          </p:cNvPicPr>
+          <p:nvPr/>
+        </p:nvPicPr>
+        <p:blipFill>
+          <a:blip r:embed="rId2"/>
+          <a:stretch>
+            <a:fillRect/>
+          </a:stretch>
+        </p:blipFill>
+        <p:spPr>
+          <a:xfrm>
+            <a:off x="7167455" y="3295396"/>
+            <a:ext cx="3541151" cy="2757932"/>
+          </a:xfrm>
+          <a:prstGeom prst="rect">
+            <a:avLst/>
+          </a:prstGeom>
+        </p:spPr>
+      </p:pic>
+      <p:sp>
+        <p:nvSpPr>
+          <p:cNvPr id="15" name="Rectangle 14"/>
           <p:cNvSpPr/>
           <p:nvPr/>
         </p:nvSpPr>
@@ -23496,7 +23849,7 @@
       </p:sp>
       <p:sp>
         <p:nvSpPr>
-          <p:cNvPr id="12" name="TextBox 11"/>
+          <p:cNvPr id="16" name="TextBox 15"/>
           <p:cNvSpPr txBox="1"/>
           <p:nvPr/>
         </p:nvSpPr>
@@ -23511,7 +23864,7 @@
           <a:noFill/>
         </p:spPr>
         <p:txBody>
-          <a:bodyPr wrap="square" anchor="t">
+          <a:bodyPr wrap="square" anchor="t" lIns="0" rIns="0" tIns="0" bIns="0">
             <a:spAutoFit/>
           </a:bodyPr>
           <a:lstStyle/>
@@ -23530,7 +23883,7 @@
       </p:sp>
       <p:sp>
         <p:nvSpPr>
-          <p:cNvPr id="13" name="TextBox 12"/>
+          <p:cNvPr id="17" name="TextBox 16"/>
           <p:cNvSpPr txBox="1"/>
           <p:nvPr/>
         </p:nvSpPr>
@@ -23545,7 +23898,7 @@
           <a:noFill/>
         </p:spPr>
         <p:txBody>
-          <a:bodyPr wrap="square" anchor="t">
+          <a:bodyPr wrap="square" anchor="t" lIns="0" rIns="0" tIns="0" bIns="0">
             <a:spAutoFit/>
           </a:bodyPr>
           <a:lstStyle/>
@@ -23748,7 +24101,7 @@
           <a:noFill/>
         </p:spPr>
         <p:txBody>
-          <a:bodyPr wrap="square" anchor="ctr">
+          <a:bodyPr wrap="square" anchor="ctr" lIns="0" rIns="0" tIns="0" bIns="0">
             <a:spAutoFit/>
           </a:bodyPr>
           <a:lstStyle/>
@@ -23826,7 +24179,7 @@
           <a:noFill/>
         </p:spPr>
         <p:txBody>
-          <a:bodyPr wrap="square" anchor="t">
+          <a:bodyPr wrap="square" anchor="t" lIns="0" rIns="0" tIns="0" bIns="0">
             <a:spAutoFit/>
           </a:bodyPr>
           <a:lstStyle/>
@@ -23941,7 +24294,7 @@
           <a:noFill/>
         </p:spPr>
         <p:txBody>
-          <a:bodyPr wrap="square" anchor="t">
+          <a:bodyPr wrap="square" anchor="t" lIns="0" rIns="0" tIns="0" bIns="0">
             <a:spAutoFit/>
           </a:bodyPr>
           <a:lstStyle/>
@@ -23975,7 +24328,7 @@
           <a:noFill/>
         </p:spPr>
         <p:txBody>
-          <a:bodyPr wrap="square" anchor="t">
+          <a:bodyPr wrap="square" anchor="t" lIns="0" rIns="0" tIns="0" bIns="0">
             <a:spAutoFit/>
           </a:bodyPr>
           <a:lstStyle/>
@@ -24125,7 +24478,7 @@
           <a:noFill/>
         </p:spPr>
         <p:txBody>
-          <a:bodyPr wrap="square" anchor="ctr">
+          <a:bodyPr wrap="square" anchor="ctr" lIns="0" rIns="0" tIns="0" bIns="0">
             <a:spAutoFit/>
           </a:bodyPr>
           <a:lstStyle/>
@@ -24203,7 +24556,7 @@
           <a:noFill/>
         </p:spPr>
         <p:txBody>
-          <a:bodyPr wrap="square" anchor="t">
+          <a:bodyPr wrap="square" anchor="t" lIns="0" rIns="0" tIns="0" bIns="0">
             <a:spAutoFit/>
           </a:bodyPr>
           <a:lstStyle/>
@@ -24350,7 +24703,7 @@
           <a:noFill/>
         </p:spPr>
         <p:txBody>
-          <a:bodyPr wrap="square" anchor="t">
+          <a:bodyPr wrap="square" anchor="t" lIns="0" rIns="0" tIns="0" bIns="0">
             <a:spAutoFit/>
           </a:bodyPr>
           <a:lstStyle/>
@@ -24384,7 +24737,7 @@
           <a:noFill/>
         </p:spPr>
         <p:txBody>
-          <a:bodyPr wrap="square" anchor="t">
+          <a:bodyPr wrap="square" anchor="t" lIns="0" rIns="0" tIns="0" bIns="0">
             <a:spAutoFit/>
           </a:bodyPr>
           <a:lstStyle/>
@@ -24534,7 +24887,7 @@
           <a:noFill/>
         </p:spPr>
         <p:txBody>
-          <a:bodyPr wrap="square" anchor="ctr">
+          <a:bodyPr wrap="square" anchor="ctr" lIns="0" rIns="0" tIns="0" bIns="0">
             <a:spAutoFit/>
           </a:bodyPr>
           <a:lstStyle/>
@@ -24597,7 +24950,7 @@
       </p:sp>
       <p:pic>
         <p:nvPicPr>
-          <p:cNvPr id="6" name="Picture 5" descr="8b79ea01c285e16d.png"/>
+          <p:cNvPr id="6" name="Picture 5" descr="afc505a4ce7b0404.png"/>
           <p:cNvPicPr>
             <a:picLocks noChangeAspect="1"/>
           </p:cNvPicPr>
@@ -24627,8 +24980,8 @@
         </p:nvSpPr>
         <p:spPr>
           <a:xfrm>
-            <a:off x="5771244" y="1627632"/>
-            <a:ext cx="5734650" cy="1656080"/>
+            <a:off x="5771244" y="1985137"/>
+            <a:ext cx="5734650" cy="1049274"/>
           </a:xfrm>
           <a:prstGeom prst="rect">
             <a:avLst/>
@@ -24671,8 +25024,8 @@
         </p:nvSpPr>
         <p:spPr>
           <a:xfrm>
-            <a:off x="5771244" y="1627632"/>
-            <a:ext cx="50292" cy="1656080"/>
+            <a:off x="5771244" y="1985137"/>
+            <a:ext cx="50292" cy="1049274"/>
           </a:xfrm>
           <a:prstGeom prst="rect">
             <a:avLst/>
@@ -24715,8 +25068,8 @@
         </p:nvSpPr>
         <p:spPr>
           <a:xfrm>
-            <a:off x="6027276" y="1719072"/>
-            <a:ext cx="5277450" cy="1509776"/>
+            <a:off x="6027276" y="2076577"/>
+            <a:ext cx="5277450" cy="902969"/>
           </a:xfrm>
           <a:prstGeom prst="rect">
             <a:avLst/>
@@ -24724,13 +25077,13 @@
           <a:noFill/>
         </p:spPr>
         <p:txBody>
-          <a:bodyPr wrap="square" anchor="ctr">
+          <a:bodyPr wrap="square" anchor="ctr" lIns="0" rIns="0" tIns="0" bIns="0">
             <a:spAutoFit/>
           </a:bodyPr>
           <a:lstStyle/>
           <a:p>
             <a:r>
-              <a:rPr sz="2000" b="1">
+              <a:rPr sz="1500" b="1">
                 <a:solidFill>
                   <a:srgbClr val="2B4A7D"/>
                 </a:solidFill>
@@ -24739,7 +25092,7 @@
               <a:t>The claim. </a:t>
             </a:r>
             <a:r>
-              <a:rPr sz="2000" b="0">
+              <a:rPr sz="1500" b="0">
                 <a:solidFill>
                   <a:srgbClr val="1C1C1A"/>
                 </a:solidFill>
@@ -24759,8 +25112,8 @@
           <p:nvPr/>
         </p:nvGraphicFramePr>
         <p:xfrm>
-          <a:off x="5771244" y="3448304"/>
-          <a:ext cx="5734650" cy="2513583"/>
+          <a:off x="5771244" y="3199003"/>
+          <a:ext cx="5734649" cy="1462024"/>
         </p:xfrm>
         <a:graphic>
           <a:graphicData uri="http://schemas.openxmlformats.org/drawingml/2006/table">
@@ -24769,17 +25122,17 @@
                 <a:tableStyleId>{2D5ABB26-0587-4C30-8999-92F81FD0307C}</a:tableStyleId>
               </a:tblPr>
               <a:tblGrid>
-                <a:gridCol w="2867325"/>
-                <a:gridCol w="2867325"/>
+                <a:gridCol w="1335078"/>
+                <a:gridCol w="4399571"/>
               </a:tblGrid>
-              <a:tr h="376444">
+              <a:tr h="318008">
                 <a:tc>
                   <a:txBody>
                     <a:bodyPr/>
                     <a:lstStyle/>
                     <a:p>
                       <a:r>
-                        <a:rPr sz="1600" b="1">
+                        <a:rPr sz="1200" b="1">
                           <a:solidFill>
                             <a:srgbClr val="FFFFFF"/>
                           </a:solidFill>
@@ -24801,7 +25154,7 @@
                     <a:lstStyle/>
                     <a:p>
                       <a:r>
-                        <a:rPr sz="1600" b="1">
+                        <a:rPr sz="1200" b="1">
                           <a:solidFill>
                             <a:srgbClr val="FFFFFF"/>
                           </a:solidFill>
@@ -24818,14 +25171,14 @@
                   </a:tcPr>
                 </a:tc>
               </a:tr>
-              <a:tr h="628396">
+              <a:tr h="318008">
                 <a:tc>
                   <a:txBody>
                     <a:bodyPr/>
                     <a:lstStyle/>
                     <a:p>
                       <a:r>
-                        <a:rPr sz="1500" b="0">
+                        <a:rPr sz="1100" b="0">
                           <a:solidFill>
                             <a:srgbClr val="1C1C1A"/>
                           </a:solidFill>
@@ -24847,7 +25200,7 @@
                     <a:lstStyle/>
                     <a:p>
                       <a:r>
-                        <a:rPr sz="1500" b="0">
+                        <a:rPr sz="1100" b="0">
                           <a:solidFill>
                             <a:srgbClr val="1C1C1A"/>
                           </a:solidFill>
@@ -24864,14 +25217,14 @@
                   </a:tcPr>
                 </a:tc>
               </a:tr>
-              <a:tr h="628396">
+              <a:tr h="318008">
                 <a:tc>
                   <a:txBody>
                     <a:bodyPr/>
                     <a:lstStyle/>
                     <a:p>
                       <a:r>
-                        <a:rPr sz="1500" b="0">
+                        <a:rPr sz="1100" b="0">
                           <a:solidFill>
                             <a:srgbClr val="1C1C1A"/>
                           </a:solidFill>
@@ -24893,7 +25246,7 @@
                     <a:lstStyle/>
                     <a:p>
                       <a:r>
-                        <a:rPr sz="1500" b="0">
+                        <a:rPr sz="1100" b="0">
                           <a:solidFill>
                             <a:srgbClr val="1C1C1A"/>
                           </a:solidFill>
@@ -24910,14 +25263,14 @@
                   </a:tcPr>
                 </a:tc>
               </a:tr>
-              <a:tr h="880347">
+              <a:tr h="508000">
                 <a:tc>
                   <a:txBody>
                     <a:bodyPr/>
                     <a:lstStyle/>
                     <a:p>
                       <a:r>
-                        <a:rPr sz="1500" b="0">
+                        <a:rPr sz="1100" b="0">
                           <a:solidFill>
                             <a:srgbClr val="1C1C1A"/>
                           </a:solidFill>
@@ -24939,7 +25292,7 @@
                     <a:lstStyle/>
                     <a:p>
                       <a:r>
-                        <a:rPr sz="1500" b="0">
+                        <a:rPr sz="1100" b="0">
                           <a:solidFill>
                             <a:srgbClr val="1C1C1A"/>
                           </a:solidFill>
@@ -24968,6 +25321,137 @@
         </p:nvSpPr>
         <p:spPr>
           <a:xfrm>
+            <a:off x="5771244" y="4917059"/>
+            <a:ext cx="5734650" cy="778764"/>
+          </a:xfrm>
+          <a:prstGeom prst="rect">
+            <a:avLst/>
+          </a:prstGeom>
+          <a:solidFill>
+            <a:srgbClr val="E4ECF7"/>
+          </a:solidFill>
+          <a:ln>
+            <a:noFill/>
+          </a:ln>
+          <a:effectLst/>
+        </p:spPr>
+        <p:style>
+          <a:lnRef idx="1">
+            <a:schemeClr val="accent1"/>
+          </a:lnRef>
+          <a:fillRef idx="3">
+            <a:schemeClr val="accent1"/>
+          </a:fillRef>
+          <a:effectRef idx="2">
+            <a:schemeClr val="accent1"/>
+          </a:effectRef>
+          <a:fontRef idx="minor">
+            <a:schemeClr val="lt1"/>
+          </a:fontRef>
+        </p:style>
+        <p:txBody>
+          <a:bodyPr rtlCol="0" anchor="ctr" wrap="square"/>
+          <a:lstStyle/>
+          <a:p>
+            <a:pPr algn="ctr"/>
+          </a:p>
+        </p:txBody>
+      </p:sp>
+      <p:sp>
+        <p:nvSpPr>
+          <p:cNvPr id="12" name="Rectangle 11"/>
+          <p:cNvSpPr/>
+          <p:nvPr/>
+        </p:nvSpPr>
+        <p:spPr>
+          <a:xfrm>
+            <a:off x="5771244" y="4917059"/>
+            <a:ext cx="50292" cy="778764"/>
+          </a:xfrm>
+          <a:prstGeom prst="rect">
+            <a:avLst/>
+          </a:prstGeom>
+          <a:solidFill>
+            <a:srgbClr val="2B4A7D"/>
+          </a:solidFill>
+          <a:ln>
+            <a:noFill/>
+          </a:ln>
+          <a:effectLst/>
+        </p:spPr>
+        <p:style>
+          <a:lnRef idx="1">
+            <a:schemeClr val="accent1"/>
+          </a:lnRef>
+          <a:fillRef idx="3">
+            <a:schemeClr val="accent1"/>
+          </a:fillRef>
+          <a:effectRef idx="2">
+            <a:schemeClr val="accent1"/>
+          </a:effectRef>
+          <a:fontRef idx="minor">
+            <a:schemeClr val="lt1"/>
+          </a:fontRef>
+        </p:style>
+        <p:txBody>
+          <a:bodyPr rtlCol="0" anchor="ctr" wrap="square"/>
+          <a:lstStyle/>
+          <a:p>
+            <a:pPr algn="ctr"/>
+          </a:p>
+        </p:txBody>
+      </p:sp>
+      <p:sp>
+        <p:nvSpPr>
+          <p:cNvPr id="13" name="TextBox 12"/>
+          <p:cNvSpPr txBox="1"/>
+          <p:nvPr/>
+        </p:nvSpPr>
+        <p:spPr>
+          <a:xfrm>
+            <a:off x="6027276" y="5008499"/>
+            <a:ext cx="5277450" cy="632460"/>
+          </a:xfrm>
+          <a:prstGeom prst="rect">
+            <a:avLst/>
+          </a:prstGeom>
+          <a:noFill/>
+        </p:spPr>
+        <p:txBody>
+          <a:bodyPr wrap="square" anchor="ctr" lIns="0" rIns="0" tIns="0" bIns="0">
+            <a:spAutoFit/>
+          </a:bodyPr>
+          <a:lstStyle/>
+          <a:p>
+            <a:r>
+              <a:rPr sz="1500" b="1">
+                <a:solidFill>
+                  <a:srgbClr val="2B4A7D"/>
+                </a:solidFill>
+                <a:latin typeface="Calibri"/>
+              </a:rPr>
+              <a:t>The mental model. </a:t>
+            </a:r>
+            <a:r>
+              <a:rPr sz="1500" b="0">
+                <a:solidFill>
+                  <a:srgbClr val="1C1C1A"/>
+                </a:solidFill>
+                <a:latin typeface="Calibri"/>
+              </a:rPr>
+              <a:t>The fence spots the tail. It never proves anything about the row it caught.</a:t>
+            </a:r>
+          </a:p>
+        </p:txBody>
+      </p:sp>
+      <p:sp>
+        <p:nvSpPr>
+          <p:cNvPr id="14" name="Rectangle 13"/>
+          <p:cNvSpPr/>
+          <p:nvPr/>
+        </p:nvSpPr>
+        <p:spPr>
+          <a:xfrm>
             <a:off x="685800" y="6327648"/>
             <a:ext cx="10820095" cy="12801"/>
           </a:xfrm>
@@ -25006,7 +25490,7 @@
       </p:sp>
       <p:sp>
         <p:nvSpPr>
-          <p:cNvPr id="12" name="TextBox 11"/>
+          <p:cNvPr id="15" name="TextBox 14"/>
           <p:cNvSpPr txBox="1"/>
           <p:nvPr/>
         </p:nvSpPr>
@@ -25021,7 +25505,7 @@
           <a:noFill/>
         </p:spPr>
         <p:txBody>
-          <a:bodyPr wrap="square" anchor="t">
+          <a:bodyPr wrap="square" anchor="t" lIns="0" rIns="0" tIns="0" bIns="0">
             <a:spAutoFit/>
           </a:bodyPr>
           <a:lstStyle/>
@@ -25040,7 +25524,7 @@
       </p:sp>
       <p:sp>
         <p:nvSpPr>
-          <p:cNvPr id="13" name="TextBox 12"/>
+          <p:cNvPr id="16" name="TextBox 15"/>
           <p:cNvSpPr txBox="1"/>
           <p:nvPr/>
         </p:nvSpPr>
@@ -25055,7 +25539,7 @@
           <a:noFill/>
         </p:spPr>
         <p:txBody>
-          <a:bodyPr wrap="square" anchor="t">
+          <a:bodyPr wrap="square" anchor="t" lIns="0" rIns="0" tIns="0" bIns="0">
             <a:spAutoFit/>
           </a:bodyPr>
           <a:lstStyle/>
@@ -25205,7 +25689,7 @@
           <a:noFill/>
         </p:spPr>
         <p:txBody>
-          <a:bodyPr wrap="square" anchor="ctr">
+          <a:bodyPr wrap="square" anchor="ctr" lIns="0" rIns="0" tIns="0" bIns="0">
             <a:spAutoFit/>
           </a:bodyPr>
           <a:lstStyle/>
@@ -25283,7 +25767,7 @@
           <a:noFill/>
         </p:spPr>
         <p:txBody>
-          <a:bodyPr wrap="square" anchor="t">
+          <a:bodyPr wrap="square" anchor="t" lIns="0" rIns="0" tIns="0" bIns="0">
             <a:spAutoFit/>
           </a:bodyPr>
           <a:lstStyle/>
@@ -25430,7 +25914,7 @@
           <a:noFill/>
         </p:spPr>
         <p:txBody>
-          <a:bodyPr wrap="square" anchor="t">
+          <a:bodyPr wrap="square" anchor="t" lIns="0" rIns="0" tIns="0" bIns="0">
             <a:spAutoFit/>
           </a:bodyPr>
           <a:lstStyle/>
@@ -25464,7 +25948,7 @@
           <a:noFill/>
         </p:spPr>
         <p:txBody>
-          <a:bodyPr wrap="square" anchor="t">
+          <a:bodyPr wrap="square" anchor="t" lIns="0" rIns="0" tIns="0" bIns="0">
             <a:spAutoFit/>
           </a:bodyPr>
           <a:lstStyle/>
@@ -25614,7 +26098,7 @@
           <a:noFill/>
         </p:spPr>
         <p:txBody>
-          <a:bodyPr wrap="square" anchor="ctr">
+          <a:bodyPr wrap="square" anchor="ctr" lIns="0" rIns="0" tIns="0" bIns="0">
             <a:spAutoFit/>
           </a:bodyPr>
           <a:lstStyle/>
@@ -25684,7 +26168,7 @@
         <p:spPr>
           <a:xfrm>
             <a:off x="685800" y="1627632"/>
-            <a:ext cx="10820095" cy="965200"/>
+            <a:ext cx="10820095" cy="778764"/>
           </a:xfrm>
           <a:prstGeom prst="rect">
             <a:avLst/>
@@ -25728,7 +26212,7 @@
         <p:spPr>
           <a:xfrm>
             <a:off x="685800" y="1627632"/>
-            <a:ext cx="50292" cy="965200"/>
+            <a:ext cx="50292" cy="778764"/>
           </a:xfrm>
           <a:prstGeom prst="rect">
             <a:avLst/>
@@ -25772,7 +26256,7 @@
         <p:spPr>
           <a:xfrm>
             <a:off x="941832" y="1719072"/>
-            <a:ext cx="10362895" cy="818896"/>
+            <a:ext cx="10362895" cy="632460"/>
           </a:xfrm>
           <a:prstGeom prst="rect">
             <a:avLst/>
@@ -25780,13 +26264,13 @@
           <a:noFill/>
         </p:spPr>
         <p:txBody>
-          <a:bodyPr wrap="square" anchor="ctr">
+          <a:bodyPr wrap="square" anchor="ctr" lIns="0" rIns="0" tIns="0" bIns="0">
             <a:spAutoFit/>
           </a:bodyPr>
           <a:lstStyle/>
           <a:p>
             <a:r>
-              <a:rPr sz="2000" b="1">
+              <a:rPr sz="1500" b="1">
                 <a:solidFill>
                   <a:srgbClr val="2B4A7D"/>
                 </a:solidFill>
@@ -25795,7 +26279,7 @@
               <a:t>The claim. </a:t>
             </a:r>
             <a:r>
-              <a:rPr sz="2000" b="0">
+              <a:rPr sz="1500" b="0">
                 <a:solidFill>
                   <a:srgbClr val="1C1C1A"/>
                 </a:solidFill>
@@ -25815,8 +26299,8 @@
           <p:nvPr/>
         </p:nvGraphicFramePr>
         <p:xfrm>
-          <a:off x="685800" y="2757424"/>
-          <a:ext cx="10820095" cy="1807464"/>
+          <a:off x="685800" y="2570988"/>
+          <a:ext cx="10820095" cy="1272032"/>
         </p:xfrm>
         <a:graphic>
           <a:graphicData uri="http://schemas.openxmlformats.org/drawingml/2006/table">
@@ -25825,17 +26309,17 @@
                 <a:tableStyleId>{2D5ABB26-0587-4C30-8999-92F81FD0307C}</a:tableStyleId>
               </a:tblPr>
               <a:tblGrid>
-                <a:gridCol w="5410047"/>
-                <a:gridCol w="5410048"/>
+                <a:gridCol w="2952701"/>
+                <a:gridCol w="7867394"/>
               </a:tblGrid>
-              <a:tr h="387096">
+              <a:tr h="318008">
                 <a:tc>
                   <a:txBody>
                     <a:bodyPr/>
                     <a:lstStyle/>
                     <a:p>
                       <a:r>
-                        <a:rPr sz="1600" b="1">
+                        <a:rPr sz="1200" b="1">
                           <a:solidFill>
                             <a:srgbClr val="FFFFFF"/>
                           </a:solidFill>
@@ -25857,7 +26341,7 @@
                     <a:lstStyle/>
                     <a:p>
                       <a:r>
-                        <a:rPr sz="1600" b="1">
+                        <a:rPr sz="1200" b="1">
                           <a:solidFill>
                             <a:srgbClr val="FFFFFF"/>
                           </a:solidFill>
@@ -25874,14 +26358,14 @@
                   </a:tcPr>
                 </a:tc>
               </a:tr>
-              <a:tr h="646176">
+              <a:tr h="318008">
                 <a:tc>
                   <a:txBody>
                     <a:bodyPr/>
                     <a:lstStyle/>
                     <a:p>
                       <a:r>
-                        <a:rPr sz="1500" b="0">
+                        <a:rPr sz="1100" b="0">
                           <a:solidFill>
                             <a:srgbClr val="1C1C1A"/>
                           </a:solidFill>
@@ -25903,7 +26387,7 @@
                     <a:lstStyle/>
                     <a:p>
                       <a:r>
-                        <a:rPr sz="1500" b="0">
+                        <a:rPr sz="1100" b="0">
                           <a:solidFill>
                             <a:srgbClr val="1C1C1A"/>
                           </a:solidFill>
@@ -25920,14 +26404,14 @@
                   </a:tcPr>
                 </a:tc>
               </a:tr>
-              <a:tr h="387096">
+              <a:tr h="318008">
                 <a:tc>
                   <a:txBody>
                     <a:bodyPr/>
                     <a:lstStyle/>
                     <a:p>
                       <a:r>
-                        <a:rPr sz="1500" b="0">
+                        <a:rPr sz="1100" b="0">
                           <a:solidFill>
                             <a:srgbClr val="1C1C1A"/>
                           </a:solidFill>
@@ -25949,7 +26433,7 @@
                     <a:lstStyle/>
                     <a:p>
                       <a:r>
-                        <a:rPr sz="1500" b="0">
+                        <a:rPr sz="1100" b="0">
                           <a:solidFill>
                             <a:srgbClr val="1C1C1A"/>
                           </a:solidFill>
@@ -25966,14 +26450,14 @@
                   </a:tcPr>
                 </a:tc>
               </a:tr>
-              <a:tr h="387096">
+              <a:tr h="318008">
                 <a:tc>
                   <a:txBody>
                     <a:bodyPr/>
                     <a:lstStyle/>
                     <a:p>
                       <a:r>
-                        <a:rPr sz="1500" b="0">
+                        <a:rPr sz="1100" b="0">
                           <a:solidFill>
                             <a:srgbClr val="1C1C1A"/>
                           </a:solidFill>
@@ -25995,7 +26479,7 @@
                     <a:lstStyle/>
                     <a:p>
                       <a:r>
-                        <a:rPr sz="1500" b="0">
+                        <a:rPr sz="1100" b="0">
                           <a:solidFill>
                             <a:srgbClr val="1C1C1A"/>
                           </a:solidFill>
@@ -26024,8 +26508,8 @@
         </p:nvSpPr>
         <p:spPr>
           <a:xfrm>
-            <a:off x="685800" y="4820920"/>
-            <a:ext cx="10820095" cy="965200"/>
+            <a:off x="685800" y="4099052"/>
+            <a:ext cx="10820095" cy="508254"/>
           </a:xfrm>
           <a:prstGeom prst="rect">
             <a:avLst/>
@@ -26068,8 +26552,8 @@
         </p:nvSpPr>
         <p:spPr>
           <a:xfrm>
-            <a:off x="685800" y="4820920"/>
-            <a:ext cx="50292" cy="965200"/>
+            <a:off x="685800" y="4099052"/>
+            <a:ext cx="50292" cy="508254"/>
           </a:xfrm>
           <a:prstGeom prst="rect">
             <a:avLst/>
@@ -26112,8 +26596,8 @@
         </p:nvSpPr>
         <p:spPr>
           <a:xfrm>
-            <a:off x="941832" y="4912360"/>
-            <a:ext cx="10362895" cy="818896"/>
+            <a:off x="941832" y="4190492"/>
+            <a:ext cx="10362895" cy="361950"/>
           </a:xfrm>
           <a:prstGeom prst="rect">
             <a:avLst/>
@@ -26121,13 +26605,13 @@
           <a:noFill/>
         </p:spPr>
         <p:txBody>
-          <a:bodyPr wrap="square" anchor="ctr">
+          <a:bodyPr wrap="square" anchor="ctr" lIns="0" rIns="0" tIns="0" bIns="0">
             <a:spAutoFit/>
           </a:bodyPr>
           <a:lstStyle/>
           <a:p>
             <a:r>
-              <a:rPr sz="2000" b="1">
+              <a:rPr sz="1500" b="1">
                 <a:solidFill>
                   <a:srgbClr val="2B4A7D"/>
                 </a:solidFill>
@@ -26136,7 +26620,7 @@
               <a:t>The mental model. </a:t>
             </a:r>
             <a:r>
-              <a:rPr sz="2000" b="0">
+              <a:rPr sz="1500" b="0">
                 <a:solidFill>
                   <a:srgbClr val="1C1C1A"/>
                 </a:solidFill>
@@ -26147,9 +26631,33 @@
           </a:p>
         </p:txBody>
       </p:sp>
-      <p:sp>
-        <p:nvSpPr>
-          <p:cNvPr id="13" name="Rectangle 12"/>
+      <p:pic>
+        <p:nvPicPr>
+          <p:cNvPr id="13" name="Picture 12" descr="6537f3a9820bab07.png"/>
+          <p:cNvPicPr>
+            <a:picLocks noChangeAspect="1"/>
+          </p:cNvPicPr>
+          <p:nvPr/>
+        </p:nvPicPr>
+        <p:blipFill>
+          <a:blip r:embed="rId2"/>
+          <a:stretch>
+            <a:fillRect/>
+          </a:stretch>
+        </p:blipFill>
+        <p:spPr>
+          <a:xfrm>
+            <a:off x="4412549" y="4771898"/>
+            <a:ext cx="3366597" cy="1281429"/>
+          </a:xfrm>
+          <a:prstGeom prst="rect">
+            <a:avLst/>
+          </a:prstGeom>
+        </p:spPr>
+      </p:pic>
+      <p:sp>
+        <p:nvSpPr>
+          <p:cNvPr id="14" name="Rectangle 13"/>
           <p:cNvSpPr/>
           <p:nvPr/>
         </p:nvSpPr>
@@ -26193,7 +26701,7 @@
       </p:sp>
       <p:sp>
         <p:nvSpPr>
-          <p:cNvPr id="14" name="TextBox 13"/>
+          <p:cNvPr id="15" name="TextBox 14"/>
           <p:cNvSpPr txBox="1"/>
           <p:nvPr/>
         </p:nvSpPr>
@@ -26208,7 +26716,7 @@
           <a:noFill/>
         </p:spPr>
         <p:txBody>
-          <a:bodyPr wrap="square" anchor="t">
+          <a:bodyPr wrap="square" anchor="t" lIns="0" rIns="0" tIns="0" bIns="0">
             <a:spAutoFit/>
           </a:bodyPr>
           <a:lstStyle/>
@@ -26227,7 +26735,7 @@
       </p:sp>
       <p:sp>
         <p:nvSpPr>
-          <p:cNvPr id="15" name="TextBox 14"/>
+          <p:cNvPr id="16" name="TextBox 15"/>
           <p:cNvSpPr txBox="1"/>
           <p:nvPr/>
         </p:nvSpPr>
@@ -26242,7 +26750,7 @@
           <a:noFill/>
         </p:spPr>
         <p:txBody>
-          <a:bodyPr wrap="square" anchor="t">
+          <a:bodyPr wrap="square" anchor="t" lIns="0" rIns="0" tIns="0" bIns="0">
             <a:spAutoFit/>
           </a:bodyPr>
           <a:lstStyle/>
@@ -26392,7 +26900,7 @@
           <a:noFill/>
         </p:spPr>
         <p:txBody>
-          <a:bodyPr wrap="square" anchor="ctr">
+          <a:bodyPr wrap="square" anchor="ctr" lIns="0" rIns="0" tIns="0" bIns="0">
             <a:spAutoFit/>
           </a:bodyPr>
           <a:lstStyle/>
@@ -26455,7 +26963,7 @@
       </p:sp>
       <p:pic>
         <p:nvPicPr>
-          <p:cNvPr id="6" name="Picture 5" descr="e4470e9b92652dd6.png"/>
+          <p:cNvPr id="6" name="Picture 5" descr="9d8a8bfa3f81771a.png"/>
           <p:cNvPicPr>
             <a:picLocks noChangeAspect="1"/>
           </p:cNvPicPr>
@@ -26469,7 +26977,7 @@
         </p:blipFill>
         <p:spPr>
           <a:xfrm>
-            <a:off x="685800" y="3086487"/>
+            <a:off x="685800" y="3040768"/>
             <a:ext cx="10820095" cy="542784"/>
           </a:xfrm>
           <a:prstGeom prst="rect">
@@ -26485,8 +26993,8 @@
         </p:nvSpPr>
         <p:spPr>
           <a:xfrm>
-            <a:off x="685800" y="5197856"/>
-            <a:ext cx="10820095" cy="855471"/>
+            <a:off x="685800" y="3729856"/>
+            <a:ext cx="10820095" cy="910336"/>
           </a:xfrm>
           <a:prstGeom prst="rect">
             <a:avLst/>
@@ -26494,11 +27002,16 @@
           <a:noFill/>
         </p:spPr>
         <p:txBody>
-          <a:bodyPr wrap="square" anchor="t">
+          <a:bodyPr wrap="square" anchor="t" lIns="0" rIns="0" tIns="0" bIns="0">
             <a:spAutoFit/>
           </a:bodyPr>
           <a:lstStyle/>
           <a:p>
+            <a:pPr>
+              <a:spcAft>
+                <a:spcPts val="900"/>
+              </a:spcAft>
+            </a:pPr>
             <a:r>
               <a:rPr sz="2000" b="0">
                 <a:solidFill>
@@ -26572,7 +27085,7 @@
           <a:noFill/>
         </p:spPr>
         <p:txBody>
-          <a:bodyPr wrap="square" anchor="t">
+          <a:bodyPr wrap="square" anchor="t" lIns="0" rIns="0" tIns="0" bIns="0">
             <a:spAutoFit/>
           </a:bodyPr>
           <a:lstStyle/>
@@ -26606,7 +27119,7 @@
           <a:noFill/>
         </p:spPr>
         <p:txBody>
-          <a:bodyPr wrap="square" anchor="t">
+          <a:bodyPr wrap="square" anchor="t" lIns="0" rIns="0" tIns="0" bIns="0">
             <a:spAutoFit/>
           </a:bodyPr>
           <a:lstStyle/>
@@ -26756,7 +27269,7 @@
           <a:noFill/>
         </p:spPr>
         <p:txBody>
-          <a:bodyPr wrap="square" anchor="ctr">
+          <a:bodyPr wrap="square" anchor="ctr" lIns="0" rIns="0" tIns="0" bIns="0">
             <a:spAutoFit/>
           </a:bodyPr>
           <a:lstStyle/>
@@ -26834,7 +27347,7 @@
           <a:noFill/>
         </p:spPr>
         <p:txBody>
-          <a:bodyPr wrap="square" anchor="t">
+          <a:bodyPr wrap="square" anchor="t" lIns="0" rIns="0" tIns="0" bIns="0">
             <a:spAutoFit/>
           </a:bodyPr>
           <a:lstStyle/>
@@ -26981,7 +27494,7 @@
           <a:noFill/>
         </p:spPr>
         <p:txBody>
-          <a:bodyPr wrap="square" anchor="t">
+          <a:bodyPr wrap="square" anchor="t" lIns="0" rIns="0" tIns="0" bIns="0">
             <a:spAutoFit/>
           </a:bodyPr>
           <a:lstStyle/>
@@ -27015,7 +27528,7 @@
           <a:noFill/>
         </p:spPr>
         <p:txBody>
-          <a:bodyPr wrap="square" anchor="t">
+          <a:bodyPr wrap="square" anchor="t" lIns="0" rIns="0" tIns="0" bIns="0">
             <a:spAutoFit/>
           </a:bodyPr>
           <a:lstStyle/>
@@ -27165,7 +27678,7 @@
           <a:noFill/>
         </p:spPr>
         <p:txBody>
-          <a:bodyPr wrap="square" anchor="ctr">
+          <a:bodyPr wrap="square" anchor="ctr" lIns="0" rIns="0" tIns="0" bIns="0">
             <a:spAutoFit/>
           </a:bodyPr>
           <a:lstStyle/>
@@ -27228,7 +27741,7 @@
       </p:sp>
       <p:pic>
         <p:nvPicPr>
-          <p:cNvPr id="6" name="Picture 5" descr="8b79ea01c285e16d.png"/>
+          <p:cNvPr id="6" name="Picture 5" descr="afc505a4ce7b0404.png"/>
           <p:cNvPicPr>
             <a:picLocks noChangeAspect="1"/>
           </p:cNvPicPr>
@@ -27259,7 +27772,7 @@
         <p:spPr>
           <a:xfrm>
             <a:off x="5771244" y="1627632"/>
-            <a:ext cx="5734650" cy="1656080"/>
+            <a:ext cx="5734650" cy="1049274"/>
           </a:xfrm>
           <a:prstGeom prst="rect">
             <a:avLst/>
@@ -27303,7 +27816,7 @@
         <p:spPr>
           <a:xfrm>
             <a:off x="5771244" y="1627632"/>
-            <a:ext cx="50292" cy="1656080"/>
+            <a:ext cx="50292" cy="1049274"/>
           </a:xfrm>
           <a:prstGeom prst="rect">
             <a:avLst/>
@@ -27347,7 +27860,7 @@
         <p:spPr>
           <a:xfrm>
             <a:off x="6027276" y="1719072"/>
-            <a:ext cx="5277450" cy="1509776"/>
+            <a:ext cx="5277450" cy="902969"/>
           </a:xfrm>
           <a:prstGeom prst="rect">
             <a:avLst/>
@@ -27355,13 +27868,13 @@
           <a:noFill/>
         </p:spPr>
         <p:txBody>
-          <a:bodyPr wrap="square" anchor="ctr">
+          <a:bodyPr wrap="square" anchor="ctr" lIns="0" rIns="0" tIns="0" bIns="0">
             <a:spAutoFit/>
           </a:bodyPr>
           <a:lstStyle/>
           <a:p>
             <a:r>
-              <a:rPr sz="2000" b="1">
+              <a:rPr sz="1500" b="1">
                 <a:solidFill>
                   <a:srgbClr val="2B4A7D"/>
                 </a:solidFill>
@@ -27370,7 +27883,7 @@
               <a:t>The claim. </a:t>
             </a:r>
             <a:r>
-              <a:rPr sz="2000" b="0">
+              <a:rPr sz="1500" b="0">
                 <a:solidFill>
                   <a:srgbClr val="1C1C1A"/>
                 </a:solidFill>
@@ -27390,8 +27903,8 @@
           <p:nvPr/>
         </p:nvGraphicFramePr>
         <p:xfrm>
-          <a:off x="5771244" y="3448304"/>
-          <a:ext cx="5734650" cy="2325624"/>
+          <a:off x="5771244" y="2841498"/>
+          <a:ext cx="5734650" cy="1652016"/>
         </p:xfrm>
         <a:graphic>
           <a:graphicData uri="http://schemas.openxmlformats.org/drawingml/2006/table">
@@ -27400,17 +27913,17 @@
                 <a:tableStyleId>{2D5ABB26-0587-4C30-8999-92F81FD0307C}</a:tableStyleId>
               </a:tblPr>
               <a:tblGrid>
-                <a:gridCol w="2867325"/>
-                <a:gridCol w="2867325"/>
+                <a:gridCol w="2374903"/>
+                <a:gridCol w="3359747"/>
               </a:tblGrid>
-              <a:tr h="387096">
+              <a:tr h="318008">
                 <a:tc>
                   <a:txBody>
                     <a:bodyPr/>
                     <a:lstStyle/>
                     <a:p>
                       <a:r>
-                        <a:rPr sz="1600" b="1">
+                        <a:rPr sz="1200" b="1">
                           <a:solidFill>
                             <a:srgbClr val="FFFFFF"/>
                           </a:solidFill>
@@ -27432,7 +27945,7 @@
                     <a:lstStyle/>
                     <a:p>
                       <a:r>
-                        <a:rPr sz="1600" b="1">
+                        <a:rPr sz="1200" b="1">
                           <a:solidFill>
                             <a:srgbClr val="FFFFFF"/>
                           </a:solidFill>
@@ -27449,14 +27962,14 @@
                   </a:tcPr>
                 </a:tc>
               </a:tr>
-              <a:tr h="646176">
+              <a:tr h="508000">
                 <a:tc>
                   <a:txBody>
                     <a:bodyPr/>
                     <a:lstStyle/>
                     <a:p>
                       <a:r>
-                        <a:rPr sz="1500" b="0">
+                        <a:rPr sz="1100" b="0">
                           <a:solidFill>
                             <a:srgbClr val="1C1C1A"/>
                           </a:solidFill>
@@ -27478,7 +27991,7 @@
                     <a:lstStyle/>
                     <a:p>
                       <a:r>
-                        <a:rPr sz="1500" b="0">
+                        <a:rPr sz="1100" b="0">
                           <a:solidFill>
                             <a:srgbClr val="1C1C1A"/>
                           </a:solidFill>
@@ -27495,14 +28008,14 @@
                   </a:tcPr>
                 </a:tc>
               </a:tr>
-              <a:tr h="646176">
+              <a:tr h="508000">
                 <a:tc>
                   <a:txBody>
                     <a:bodyPr/>
                     <a:lstStyle/>
                     <a:p>
                       <a:r>
-                        <a:rPr sz="1500" b="0">
+                        <a:rPr sz="1100" b="0">
                           <a:solidFill>
                             <a:srgbClr val="1C1C1A"/>
                           </a:solidFill>
@@ -27524,7 +28037,7 @@
                     <a:lstStyle/>
                     <a:p>
                       <a:r>
-                        <a:rPr sz="1500" b="0">
+                        <a:rPr sz="1100" b="0">
                           <a:solidFill>
                             <a:srgbClr val="1C1C1A"/>
                           </a:solidFill>
@@ -27541,14 +28054,14 @@
                   </a:tcPr>
                 </a:tc>
               </a:tr>
-              <a:tr h="646176">
+              <a:tr h="318008">
                 <a:tc>
                   <a:txBody>
                     <a:bodyPr/>
                     <a:lstStyle/>
                     <a:p>
                       <a:r>
-                        <a:rPr sz="1500" b="0">
+                        <a:rPr sz="1100" b="0">
                           <a:solidFill>
                             <a:srgbClr val="1C1C1A"/>
                           </a:solidFill>
@@ -27570,7 +28083,7 @@
                     <a:lstStyle/>
                     <a:p>
                       <a:r>
-                        <a:rPr sz="1500" b="0">
+                        <a:rPr sz="1100" b="0">
                           <a:solidFill>
                             <a:srgbClr val="1C1C1A"/>
                           </a:solidFill>
@@ -27599,6 +28112,137 @@
         </p:nvSpPr>
         <p:spPr>
           <a:xfrm>
+            <a:off x="5771244" y="4749546"/>
+            <a:ext cx="5734650" cy="778764"/>
+          </a:xfrm>
+          <a:prstGeom prst="rect">
+            <a:avLst/>
+          </a:prstGeom>
+          <a:solidFill>
+            <a:srgbClr val="E4ECF7"/>
+          </a:solidFill>
+          <a:ln>
+            <a:noFill/>
+          </a:ln>
+          <a:effectLst/>
+        </p:spPr>
+        <p:style>
+          <a:lnRef idx="1">
+            <a:schemeClr val="accent1"/>
+          </a:lnRef>
+          <a:fillRef idx="3">
+            <a:schemeClr val="accent1"/>
+          </a:fillRef>
+          <a:effectRef idx="2">
+            <a:schemeClr val="accent1"/>
+          </a:effectRef>
+          <a:fontRef idx="minor">
+            <a:schemeClr val="lt1"/>
+          </a:fontRef>
+        </p:style>
+        <p:txBody>
+          <a:bodyPr rtlCol="0" anchor="ctr" wrap="square"/>
+          <a:lstStyle/>
+          <a:p>
+            <a:pPr algn="ctr"/>
+          </a:p>
+        </p:txBody>
+      </p:sp>
+      <p:sp>
+        <p:nvSpPr>
+          <p:cNvPr id="12" name="Rectangle 11"/>
+          <p:cNvSpPr/>
+          <p:nvPr/>
+        </p:nvSpPr>
+        <p:spPr>
+          <a:xfrm>
+            <a:off x="5771244" y="4749546"/>
+            <a:ext cx="50292" cy="778764"/>
+          </a:xfrm>
+          <a:prstGeom prst="rect">
+            <a:avLst/>
+          </a:prstGeom>
+          <a:solidFill>
+            <a:srgbClr val="2B4A7D"/>
+          </a:solidFill>
+          <a:ln>
+            <a:noFill/>
+          </a:ln>
+          <a:effectLst/>
+        </p:spPr>
+        <p:style>
+          <a:lnRef idx="1">
+            <a:schemeClr val="accent1"/>
+          </a:lnRef>
+          <a:fillRef idx="3">
+            <a:schemeClr val="accent1"/>
+          </a:fillRef>
+          <a:effectRef idx="2">
+            <a:schemeClr val="accent1"/>
+          </a:effectRef>
+          <a:fontRef idx="minor">
+            <a:schemeClr val="lt1"/>
+          </a:fontRef>
+        </p:style>
+        <p:txBody>
+          <a:bodyPr rtlCol="0" anchor="ctr" wrap="square"/>
+          <a:lstStyle/>
+          <a:p>
+            <a:pPr algn="ctr"/>
+          </a:p>
+        </p:txBody>
+      </p:sp>
+      <p:sp>
+        <p:nvSpPr>
+          <p:cNvPr id="13" name="TextBox 12"/>
+          <p:cNvSpPr txBox="1"/>
+          <p:nvPr/>
+        </p:nvSpPr>
+        <p:spPr>
+          <a:xfrm>
+            <a:off x="6027276" y="4840986"/>
+            <a:ext cx="5277450" cy="632460"/>
+          </a:xfrm>
+          <a:prstGeom prst="rect">
+            <a:avLst/>
+          </a:prstGeom>
+          <a:noFill/>
+        </p:spPr>
+        <p:txBody>
+          <a:bodyPr wrap="square" anchor="ctr" lIns="0" rIns="0" tIns="0" bIns="0">
+            <a:spAutoFit/>
+          </a:bodyPr>
+          <a:lstStyle/>
+          <a:p>
+            <a:r>
+              <a:rPr sz="1500" b="1">
+                <a:solidFill>
+                  <a:srgbClr val="2B4A7D"/>
+                </a:solidFill>
+                <a:latin typeface="Calibri"/>
+              </a:rPr>
+              <a:t>The mental model. </a:t>
+            </a:r>
+            <a:r>
+              <a:rPr sz="1500" b="0">
+                <a:solidFill>
+                  <a:srgbClr val="1C1C1A"/>
+                </a:solidFill>
+                <a:latin typeface="Calibri"/>
+              </a:rPr>
+              <a:t>Range moves when one record changes. The interquartile range does not.</a:t>
+            </a:r>
+          </a:p>
+        </p:txBody>
+      </p:sp>
+      <p:sp>
+        <p:nvSpPr>
+          <p:cNvPr id="14" name="Rectangle 13"/>
+          <p:cNvSpPr/>
+          <p:nvPr/>
+        </p:nvSpPr>
+        <p:spPr>
+          <a:xfrm>
             <a:off x="685800" y="6327648"/>
             <a:ext cx="10820095" cy="12801"/>
           </a:xfrm>
@@ -27637,7 +28281,7 @@
       </p:sp>
       <p:sp>
         <p:nvSpPr>
-          <p:cNvPr id="12" name="TextBox 11"/>
+          <p:cNvPr id="15" name="TextBox 14"/>
           <p:cNvSpPr txBox="1"/>
           <p:nvPr/>
         </p:nvSpPr>
@@ -27652,7 +28296,7 @@
           <a:noFill/>
         </p:spPr>
         <p:txBody>
-          <a:bodyPr wrap="square" anchor="t">
+          <a:bodyPr wrap="square" anchor="t" lIns="0" rIns="0" tIns="0" bIns="0">
             <a:spAutoFit/>
           </a:bodyPr>
           <a:lstStyle/>
@@ -27671,7 +28315,7 @@
       </p:sp>
       <p:sp>
         <p:nvSpPr>
-          <p:cNvPr id="13" name="TextBox 12"/>
+          <p:cNvPr id="16" name="TextBox 15"/>
           <p:cNvSpPr txBox="1"/>
           <p:nvPr/>
         </p:nvSpPr>
@@ -27686,7 +28330,7 @@
           <a:noFill/>
         </p:spPr>
         <p:txBody>
-          <a:bodyPr wrap="square" anchor="t">
+          <a:bodyPr wrap="square" anchor="t" lIns="0" rIns="0" tIns="0" bIns="0">
             <a:spAutoFit/>
           </a:bodyPr>
           <a:lstStyle/>
@@ -27836,7 +28480,7 @@
           <a:noFill/>
         </p:spPr>
         <p:txBody>
-          <a:bodyPr wrap="square" anchor="ctr">
+          <a:bodyPr wrap="square" anchor="ctr" lIns="0" rIns="0" tIns="0" bIns="0">
             <a:spAutoFit/>
           </a:bodyPr>
           <a:lstStyle/>
@@ -27958,7 +28602,7 @@
           <a:noFill/>
         </p:spPr>
         <p:txBody>
-          <a:bodyPr wrap="square" anchor="t">
+          <a:bodyPr wrap="square" anchor="t" lIns="0" rIns="0" tIns="0" bIns="0">
             <a:spAutoFit/>
           </a:bodyPr>
           <a:lstStyle/>
@@ -28036,7 +28680,7 @@
           <a:noFill/>
         </p:spPr>
         <p:txBody>
-          <a:bodyPr wrap="square" anchor="t">
+          <a:bodyPr wrap="square" anchor="t" lIns="0" rIns="0" tIns="0" bIns="0">
             <a:spAutoFit/>
           </a:bodyPr>
           <a:lstStyle/>
@@ -28070,7 +28714,7 @@
           <a:noFill/>
         </p:spPr>
         <p:txBody>
-          <a:bodyPr wrap="square" anchor="t">
+          <a:bodyPr wrap="square" anchor="t" lIns="0" rIns="0" tIns="0" bIns="0">
             <a:spAutoFit/>
           </a:bodyPr>
           <a:lstStyle/>
@@ -28169,7 +28813,7 @@
           <a:noFill/>
         </p:spPr>
         <p:txBody>
-          <a:bodyPr wrap="square" anchor="t">
+          <a:bodyPr wrap="square" anchor="t" lIns="0" rIns="0" tIns="0" bIns="0">
             <a:spAutoFit/>
           </a:bodyPr>
           <a:lstStyle/>
@@ -28203,7 +28847,7 @@
           <a:noFill/>
         </p:spPr>
         <p:txBody>
-          <a:bodyPr wrap="square" anchor="t">
+          <a:bodyPr wrap="square" anchor="t" lIns="0" rIns="0" tIns="0" bIns="0">
             <a:spAutoFit/>
           </a:bodyPr>
           <a:lstStyle/>
@@ -28300,7 +28944,7 @@
           <a:noFill/>
         </p:spPr>
         <p:txBody>
-          <a:bodyPr wrap="square" anchor="ctr">
+          <a:bodyPr wrap="square" anchor="ctr" lIns="0" rIns="0" tIns="0" bIns="0">
             <a:spAutoFit/>
           </a:bodyPr>
           <a:lstStyle/>
@@ -28644,7 +29288,7 @@
           <a:noFill/>
         </p:spPr>
         <p:txBody>
-          <a:bodyPr wrap="square" anchor="t">
+          <a:bodyPr wrap="square" anchor="t" lIns="0" rIns="0" tIns="0" bIns="0">
             <a:spAutoFit/>
           </a:bodyPr>
           <a:lstStyle/>
@@ -28678,7 +29322,7 @@
           <a:noFill/>
         </p:spPr>
         <p:txBody>
-          <a:bodyPr wrap="square" anchor="t">
+          <a:bodyPr wrap="square" anchor="t" lIns="0" rIns="0" tIns="0" bIns="0">
             <a:spAutoFit/>
           </a:bodyPr>
           <a:lstStyle/>
@@ -28828,7 +29472,7 @@
           <a:noFill/>
         </p:spPr>
         <p:txBody>
-          <a:bodyPr wrap="square" anchor="ctr">
+          <a:bodyPr wrap="square" anchor="ctr" lIns="0" rIns="0" tIns="0" bIns="0">
             <a:spAutoFit/>
           </a:bodyPr>
           <a:lstStyle/>
@@ -28897,7 +29541,7 @@
         </p:nvSpPr>
         <p:spPr>
           <a:xfrm>
-            <a:off x="685800" y="2858008"/>
+            <a:off x="685800" y="2856992"/>
             <a:ext cx="10820095" cy="564896"/>
           </a:xfrm>
           <a:prstGeom prst="rect">
@@ -28906,7 +29550,7 @@
           <a:noFill/>
         </p:spPr>
         <p:txBody>
-          <a:bodyPr wrap="square" anchor="t">
+          <a:bodyPr wrap="square" anchor="t" lIns="0" rIns="0" tIns="0" bIns="0">
             <a:spAutoFit/>
           </a:bodyPr>
           <a:lstStyle/>
@@ -28936,8 +29580,8 @@
         </p:nvSpPr>
         <p:spPr>
           <a:xfrm>
-            <a:off x="685800" y="3550920"/>
-            <a:ext cx="10820095" cy="542543"/>
+            <a:off x="685800" y="3549904"/>
+            <a:ext cx="10820095" cy="544576"/>
           </a:xfrm>
           <a:prstGeom prst="rect">
             <a:avLst/>
@@ -28980,8 +29624,8 @@
         </p:nvSpPr>
         <p:spPr>
           <a:xfrm>
-            <a:off x="685800" y="3550920"/>
-            <a:ext cx="50292" cy="542543"/>
+            <a:off x="685800" y="3549904"/>
+            <a:ext cx="50292" cy="544576"/>
           </a:xfrm>
           <a:prstGeom prst="rect">
             <a:avLst/>
@@ -29024,8 +29668,8 @@
         </p:nvSpPr>
         <p:spPr>
           <a:xfrm>
-            <a:off x="923544" y="3651504"/>
-            <a:ext cx="10417759" cy="359663"/>
+            <a:off x="923544" y="3650488"/>
+            <a:ext cx="10417759" cy="361696"/>
           </a:xfrm>
           <a:prstGeom prst="rect">
             <a:avLst/>
@@ -29033,7 +29677,7 @@
           <a:noFill/>
         </p:spPr>
         <p:txBody>
-          <a:bodyPr wrap="square" anchor="t">
+          <a:bodyPr wrap="square" anchor="t" lIns="0" rIns="0" tIns="0" bIns="0">
             <a:spAutoFit/>
           </a:bodyPr>
           <a:lstStyle/>
@@ -29063,7 +29707,7 @@
         </p:nvSpPr>
         <p:spPr>
           <a:xfrm>
-            <a:off x="685800" y="4258056"/>
+            <a:off x="685800" y="4259072"/>
             <a:ext cx="10820095" cy="564896"/>
           </a:xfrm>
           <a:prstGeom prst="rect">
@@ -29072,7 +29716,7 @@
           <a:noFill/>
         </p:spPr>
         <p:txBody>
-          <a:bodyPr wrap="square" anchor="t">
+          <a:bodyPr wrap="square" anchor="t" lIns="0" rIns="0" tIns="0" bIns="0">
             <a:spAutoFit/>
           </a:bodyPr>
           <a:lstStyle/>
@@ -29155,7 +29799,7 @@
           <a:noFill/>
         </p:spPr>
         <p:txBody>
-          <a:bodyPr wrap="square" anchor="t">
+          <a:bodyPr wrap="square" anchor="t" lIns="0" rIns="0" tIns="0" bIns="0">
             <a:spAutoFit/>
           </a:bodyPr>
           <a:lstStyle/>
@@ -29189,7 +29833,7 @@
           <a:noFill/>
         </p:spPr>
         <p:txBody>
-          <a:bodyPr wrap="square" anchor="t">
+          <a:bodyPr wrap="square" anchor="t" lIns="0" rIns="0" tIns="0" bIns="0">
             <a:spAutoFit/>
           </a:bodyPr>
           <a:lstStyle/>
@@ -29339,7 +29983,7 @@
           <a:noFill/>
         </p:spPr>
         <p:txBody>
-          <a:bodyPr wrap="square" anchor="ctr">
+          <a:bodyPr wrap="square" anchor="ctr" lIns="0" rIns="0" tIns="0" bIns="0">
             <a:spAutoFit/>
           </a:bodyPr>
           <a:lstStyle/>
@@ -29408,8 +30052,8 @@
         </p:nvSpPr>
         <p:spPr>
           <a:xfrm>
-            <a:off x="685800" y="2670048"/>
-            <a:ext cx="10820095" cy="810768"/>
+            <a:off x="685800" y="2658872"/>
+            <a:ext cx="10820095" cy="833120"/>
           </a:xfrm>
           <a:prstGeom prst="rect">
             <a:avLst/>
@@ -29452,8 +30096,8 @@
         </p:nvSpPr>
         <p:spPr>
           <a:xfrm>
-            <a:off x="685800" y="2670048"/>
-            <a:ext cx="50292" cy="810768"/>
+            <a:off x="685800" y="2658872"/>
+            <a:ext cx="50292" cy="833120"/>
           </a:xfrm>
           <a:prstGeom prst="rect">
             <a:avLst/>
@@ -29496,8 +30140,8 @@
         </p:nvSpPr>
         <p:spPr>
           <a:xfrm>
-            <a:off x="923544" y="2770632"/>
-            <a:ext cx="10417759" cy="627888"/>
+            <a:off x="923544" y="2759456"/>
+            <a:ext cx="10417759" cy="650239"/>
           </a:xfrm>
           <a:prstGeom prst="rect">
             <a:avLst/>
@@ -29505,7 +30149,7 @@
           <a:noFill/>
         </p:spPr>
         <p:txBody>
-          <a:bodyPr wrap="square" anchor="t">
+          <a:bodyPr wrap="square" anchor="t" lIns="0" rIns="0" tIns="0" bIns="0">
             <a:spAutoFit/>
           </a:bodyPr>
           <a:lstStyle/>
@@ -29551,7 +30195,7 @@
         </p:nvSpPr>
         <p:spPr>
           <a:xfrm>
-            <a:off x="685800" y="3645408"/>
+            <a:off x="685800" y="3656584"/>
             <a:ext cx="10820095" cy="1365504"/>
           </a:xfrm>
           <a:prstGeom prst="rect">
@@ -29560,7 +30204,7 @@
           <a:noFill/>
         </p:spPr>
         <p:txBody>
-          <a:bodyPr wrap="square" anchor="t">
+          <a:bodyPr wrap="square" anchor="t" lIns="0" rIns="0" tIns="0" bIns="0">
             <a:spAutoFit/>
           </a:bodyPr>
           <a:lstStyle/>
@@ -29659,7 +30303,7 @@
           <a:noFill/>
         </p:spPr>
         <p:txBody>
-          <a:bodyPr wrap="square" anchor="t">
+          <a:bodyPr wrap="square" anchor="t" lIns="0" rIns="0" tIns="0" bIns="0">
             <a:spAutoFit/>
           </a:bodyPr>
           <a:lstStyle/>
@@ -29693,7 +30337,7 @@
           <a:noFill/>
         </p:spPr>
         <p:txBody>
-          <a:bodyPr wrap="square" anchor="t">
+          <a:bodyPr wrap="square" anchor="t" lIns="0" rIns="0" tIns="0" bIns="0">
             <a:spAutoFit/>
           </a:bodyPr>
           <a:lstStyle/>
@@ -29843,7 +30487,7 @@
           <a:noFill/>
         </p:spPr>
         <p:txBody>
-          <a:bodyPr wrap="square" anchor="ctr">
+          <a:bodyPr wrap="square" anchor="ctr" lIns="0" rIns="0" tIns="0" bIns="0">
             <a:spAutoFit/>
           </a:bodyPr>
           <a:lstStyle/>
@@ -29913,7 +30557,7 @@
         <p:spPr>
           <a:xfrm>
             <a:off x="685800" y="1627632"/>
-            <a:ext cx="10820095" cy="1078992"/>
+            <a:ext cx="10820095" cy="905256"/>
           </a:xfrm>
           <a:prstGeom prst="rect">
             <a:avLst/>
@@ -29957,7 +30601,7 @@
         <p:spPr>
           <a:xfrm>
             <a:off x="685800" y="1627632"/>
-            <a:ext cx="50292" cy="1078992"/>
+            <a:ext cx="50292" cy="905256"/>
           </a:xfrm>
           <a:prstGeom prst="rect">
             <a:avLst/>
@@ -30001,7 +30645,7 @@
         <p:spPr>
           <a:xfrm>
             <a:off x="923544" y="1728216"/>
-            <a:ext cx="10417759" cy="896112"/>
+            <a:ext cx="10417759" cy="722376"/>
           </a:xfrm>
           <a:prstGeom prst="rect">
             <a:avLst/>
@@ -30009,7 +30653,7 @@
           <a:noFill/>
         </p:spPr>
         <p:txBody>
-          <a:bodyPr wrap="square" anchor="t">
+          <a:bodyPr wrap="square" anchor="t" lIns="0" rIns="0" tIns="0" bIns="0">
             <a:spAutoFit/>
           </a:bodyPr>
           <a:lstStyle/>
@@ -30020,7 +30664,7 @@
               </a:spcAft>
             </a:pPr>
             <a:r>
-              <a:rPr sz="1600" b="0">
+              <a:rPr sz="1200" b="0">
                 <a:solidFill>
                   <a:srgbClr val="E4ECF7"/>
                 </a:solidFill>
@@ -30036,7 +30680,7 @@
               </a:spcAft>
             </a:pPr>
             <a:r>
-              <a:rPr sz="1600" b="0">
+              <a:rPr sz="1200" b="0">
                 <a:solidFill>
                   <a:srgbClr val="E4ECF7"/>
                 </a:solidFill>
@@ -30052,7 +30696,7 @@
               </a:spcAft>
             </a:pPr>
             <a:r>
-              <a:rPr sz="1600" b="0">
+              <a:rPr sz="1200" b="0">
                 <a:solidFill>
                   <a:srgbClr val="E4ECF7"/>
                 </a:solidFill>
@@ -30071,8 +30715,8 @@
         </p:nvSpPr>
         <p:spPr>
           <a:xfrm>
-            <a:off x="685800" y="2871216"/>
-            <a:ext cx="10820095" cy="1020064"/>
+            <a:off x="685800" y="2697480"/>
+            <a:ext cx="10820095" cy="847344"/>
           </a:xfrm>
           <a:prstGeom prst="rect">
             <a:avLst/>
@@ -30080,18 +30724,18 @@
           <a:noFill/>
         </p:spPr>
         <p:txBody>
-          <a:bodyPr wrap="square" anchor="t">
+          <a:bodyPr wrap="square" anchor="t" lIns="0" rIns="0" tIns="0" bIns="0">
             <a:spAutoFit/>
           </a:bodyPr>
           <a:lstStyle/>
           <a:p>
             <a:pPr>
               <a:spcAft>
-                <a:spcPts val="900"/>
+                <a:spcPts val="700"/>
               </a:spcAft>
             </a:pPr>
             <a:r>
-              <a:rPr sz="2000" b="0">
+              <a:rPr sz="1500" b="0">
                 <a:solidFill>
                   <a:srgbClr val="1C1C1A"/>
                 </a:solidFill>
@@ -30103,11 +30747,11 @@
           <a:p>
             <a:pPr>
               <a:spcAft>
-                <a:spcPts val="900"/>
+                <a:spcPts val="700"/>
               </a:spcAft>
             </a:pPr>
             <a:r>
-              <a:rPr sz="2000" b="0">
+              <a:rPr sz="1500" b="0">
                 <a:solidFill>
                   <a:srgbClr val="1C1C1A"/>
                 </a:solidFill>
@@ -30120,7 +30764,7 @@
       </p:sp>
       <p:pic>
         <p:nvPicPr>
-          <p:cNvPr id="10" name="Picture 9" descr="af5e1b144456f8ba.png"/>
+          <p:cNvPr id="10" name="Picture 9" descr="8cef6679ab27188b.png"/>
           <p:cNvPicPr>
             <a:picLocks noChangeAspect="1"/>
           </p:cNvPicPr>
@@ -30134,8 +30778,8 @@
         </p:blipFill>
         <p:spPr>
           <a:xfrm>
-            <a:off x="4109990" y="4019295"/>
-            <a:ext cx="3971715" cy="2034032"/>
+            <a:off x="3774715" y="3675887"/>
+            <a:ext cx="4642264" cy="2377440"/>
           </a:xfrm>
           <a:prstGeom prst="rect">
             <a:avLst/>
@@ -30203,7 +30847,7 @@
           <a:noFill/>
         </p:spPr>
         <p:txBody>
-          <a:bodyPr wrap="square" anchor="t">
+          <a:bodyPr wrap="square" anchor="t" lIns="0" rIns="0" tIns="0" bIns="0">
             <a:spAutoFit/>
           </a:bodyPr>
           <a:lstStyle/>
@@ -30237,7 +30881,7 @@
           <a:noFill/>
         </p:spPr>
         <p:txBody>
-          <a:bodyPr wrap="square" anchor="t">
+          <a:bodyPr wrap="square" anchor="t" lIns="0" rIns="0" tIns="0" bIns="0">
             <a:spAutoFit/>
           </a:bodyPr>
           <a:lstStyle/>

--- a/content/W01/D4/slides/C2_W01_D04_half1_STUDENT.pptx
+++ b/content/W01/D4/slides/C2_W01_D04_half1_STUDENT.pptx
@@ -14809,8 +14809,8 @@
         </p:blipFill>
         <p:spPr>
           <a:xfrm>
-            <a:off x="4383382" y="1627632"/>
-            <a:ext cx="3424930" cy="3115055"/>
+            <a:off x="4267765" y="1517904"/>
+            <a:ext cx="3656163" cy="3325368"/>
           </a:xfrm>
           <a:prstGeom prst="rect">
             <a:avLst/>
@@ -14825,8 +14825,8 @@
         </p:nvSpPr>
         <p:spPr>
           <a:xfrm>
-            <a:off x="685800" y="4852416"/>
-            <a:ext cx="10820095" cy="1200912"/>
+            <a:off x="685800" y="4888992"/>
+            <a:ext cx="10820095" cy="1164336"/>
           </a:xfrm>
           <a:prstGeom prst="rect">
             <a:avLst/>
